--- a/seminar/slides/세션5_멀티GPU_이식성_프로젝트.pptx
+++ b/seminar/slides/세션5_멀티GPU_이식성_프로젝트.pptx
@@ -15,9 +15,10 @@
     <p:sldId id="263" r:id="rId9"/>
     <p:sldId id="264" r:id="rId10"/>
     <p:sldId id="265" r:id="rId11"/>
+    <p:sldId id="266" r:id="rId12"/>
   </p:sldIdLst>
   <p:notesMasterIdLst>
-    <p:notesMasterId r:id="rId12"/>
+    <p:notesMasterId r:id="rId13"/>
   </p:notesMasterIdLst>
   <p:sldSz cx="12192000" cy="6858000"/>
   <p:notesSz cx="6858000" cy="12192000"/>
@@ -599,7 +600,7 @@
           <a:p>
             <a:r>
               <a:rPr lang="en-US" dirty="0"/>
-              <a:t>마무리. 캡스톤 발표로 세미나를 닫습니다. 심화 학습 경로를 안내하세요.</a:t>
+              <a:t>한 저장소로 커널부터 멀티 GPU까지 완주. 실제 코드로 배운 것이 이 세미나의 강점.</a:t>
             </a:r>
             <a:endParaRPr lang="en-US" dirty="0"/>
           </a:p>
@@ -623,6 +624,94 @@
             <a:fld id="{F7021451-1387-4CA6-816F-3879F97B5CBC}" type="slidenum">
               <a:rPr lang="en-US"/>
               <a:t>10</a:t>
+            </a:fld>
+            <a:endParaRPr lang="en-US"/>
+          </a:p>
+        </p:txBody>
+      </p:sp>
+    </p:spTree>
+    <p:extLst>
+      <p:ext uri="{BB962C8B-B14F-4D97-AF65-F5344CB8AC3E}">
+        <p14:creationId xmlns:p14="http://schemas.microsoft.com/office/powerpoint/2010/main" val="1024086991"/>
+      </p:ext>
+    </p:extLst>
+  </p:cSld>
+  <p:clrMapOvr>
+    <a:masterClrMapping/>
+  </p:clrMapOvr>
+</p:notes>
+</file>
+
+<file path=ppt/notesSlides/notesSlide11.xml><?xml version="1.0" encoding="utf-8"?>
+<p:notes xmlns:a="http://schemas.openxmlformats.org/drawingml/2006/main" xmlns:r="http://schemas.openxmlformats.org/officeDocument/2006/relationships" xmlns:p="http://schemas.openxmlformats.org/presentationml/2006/main">
+  <p:cSld>
+    <p:spTree>
+      <p:nvGrpSpPr>
+        <p:cNvPr id="1" name=""/>
+        <p:cNvGrpSpPr/>
+        <p:nvPr/>
+      </p:nvGrpSpPr>
+      <p:grpSpPr>
+        <a:xfrm>
+          <a:off x="0" y="0"/>
+          <a:ext cx="0" cy="0"/>
+          <a:chOff x="0" y="0"/>
+          <a:chExt cx="0" cy="0"/>
+        </a:xfrm>
+      </p:grpSpPr>
+      <p:sp>
+        <p:nvSpPr>
+          <p:cNvPr id="2" name="Slide Image Placeholder 1"/>
+          <p:cNvSpPr>
+            <a:spLocks noGrp="1" noRot="1" noChangeAspect="1"/>
+          </p:cNvSpPr>
+          <p:nvPr>
+            <p:ph type="sldImg"/>
+          </p:nvPr>
+        </p:nvSpPr>
+        <p:spPr/>
+      </p:sp>
+      <p:sp>
+        <p:nvSpPr>
+          <p:cNvPr id="3" name="Notes Placeholder 2"/>
+          <p:cNvSpPr>
+            <a:spLocks noGrp="1"/>
+          </p:cNvSpPr>
+          <p:nvPr>
+            <p:ph type="body" idx="1"/>
+          </p:nvPr>
+        </p:nvSpPr>
+        <p:spPr/>
+        <p:txBody>
+          <a:bodyPr/>
+          <a:lstStyle/>
+          <a:p>
+            <a:r>
+              <a:rPr lang="en-US" dirty="0"/>
+              <a:t>마무리. 캡스톤 발표로 세미나를 닫습니다. 심화 학습 경로를 안내하세요.</a:t>
+            </a:r>
+            <a:endParaRPr lang="en-US" dirty="0"/>
+          </a:p>
+        </p:txBody>
+      </p:sp>
+      <p:sp>
+        <p:nvSpPr>
+          <p:cNvPr id="4" name="Slide Number Placeholder 3"/>
+          <p:cNvSpPr>
+            <a:spLocks noGrp="1"/>
+          </p:cNvSpPr>
+          <p:nvPr>
+            <p:ph type="sldNum" sz="quarter" idx="10"/>
+          </p:nvPr>
+        </p:nvSpPr>
+        <p:spPr/>
+        <p:txBody>
+          <a:bodyPr/>
+          <a:lstStyle/>
+          <a:p>
+            <a:fld id="{F7021451-1387-4CA6-816F-3879F97B5CBC}" type="slidenum">
+              <a:rPr lang="en-US"/>
+              <a:t>11</a:t>
             </a:fld>
             <a:endParaRPr lang="en-US"/>
           </a:p>
@@ -863,7 +952,7 @@
           <a:p>
             <a:r>
               <a:rPr lang="en-US" dirty="0"/>
-              <a:t>TLS 개념: 로그 접두사 [host][gpu_idx]가 스레드마다 올바른 GPU를 가리키는 이유.</a:t>
+              <a:t>GPU마다 pthread→cudaSetDevice→버퍼할당→테스트→VRAM의 독립 스택. 병렬·독립 실행이 핵심. 논문의 S1070(4 GPU/노드)과 연결.</a:t>
             </a:r>
             <a:endParaRPr lang="en-US" dirty="0"/>
           </a:p>
@@ -951,7 +1040,7 @@
           <a:p>
             <a:r>
               <a:rPr lang="en-US" dirty="0"/>
-              <a:t>## 토큰 페이스팅으로 cuda/hip 접두사를 붙임. 코드를 두 벌 관리하지 않는 이식성의 핵심.</a:t>
+              <a:t>TLS 개념: 로그 접두사 [host][gpu_idx]가 스레드마다 올바른 GPU를 가리키는 이유.</a:t>
             </a:r>
             <a:endParaRPr lang="en-US" dirty="0"/>
           </a:p>
@@ -1039,7 +1128,7 @@
           <a:p>
             <a:r>
               <a:rPr lang="en-US" dirty="0"/>
-              <a:t>옵션 A는 40~50분이면 충분. 자신 있는 참석자에게만 B·C 권장.</a:t>
+              <a:t>## 토큰 페이스팅으로 cuda/hip 접두사를 붙임. 코드를 두 벌 관리하지 않는 이식성의 핵심.</a:t>
             </a:r>
             <a:endParaRPr lang="en-US" dirty="0"/>
           </a:p>
@@ -1127,7 +1216,7 @@
           <a:p>
             <a:r>
               <a:rPr lang="en-US" dirty="0"/>
-              <a:t>3단계 하드코딩 상수가 가장 흔한 실수. 세션 2의 move_inv_test 재사용이 핵심 — 새 커널을 짤 필요 없음.</a:t>
+              <a:t>옵션 A는 40~50분이면 충분. 자신 있는 참석자에게만 B·C 권장.</a:t>
             </a:r>
             <a:endParaRPr lang="en-US" dirty="0"/>
           </a:p>
@@ -1215,7 +1304,7 @@
           <a:p>
             <a:r>
               <a:rPr lang="en-US" dirty="0"/>
-              <a:t>코드는 놀랄 만큼 짧습니다. 지금까지 배운 조각을 조립하는 것이 핵심 메시지.</a:t>
+              <a:t>3단계 하드코딩 상수가 가장 흔한 실수. 세션 2의 move_inv_test 재사용이 핵심 — 새 커널을 짤 필요 없음.</a:t>
             </a:r>
             <a:endParaRPr lang="en-US" dirty="0"/>
           </a:p>
@@ -1303,7 +1392,7 @@
           <a:p>
             <a:r>
               <a:rPr lang="en-US" dirty="0"/>
-              <a:t>한 저장소로 커널부터 멀티 GPU까지 완주. 실제 코드로 배운 것이 이 세미나의 강점.</a:t>
+              <a:t>코드는 놀랄 만큼 짧습니다. 지금까지 배운 조각을 조립하는 것이 핵심 메시지.</a:t>
             </a:r>
             <a:endParaRPr lang="en-US" dirty="0"/>
           </a:p>
@@ -1984,6 +2073,854 @@
         </p:nvSpPr>
         <p:spPr>
           <a:xfrm>
+            <a:off x="548640" y="411480"/>
+            <a:ext cx="640080" cy="640080"/>
+          </a:xfrm>
+          <a:prstGeom prst="roundRect">
+            <a:avLst>
+              <a:gd name="adj" fmla="val 12857"/>
+            </a:avLst>
+          </a:prstGeom>
+          <a:solidFill>
+            <a:srgbClr val="8CC63F"/>
+          </a:solidFill>
+          <a:ln/>
+        </p:spPr>
+        <p:txBody>
+          <a:bodyPr wrap="square" rtlCol="0" anchor="ctr"/>
+          <a:lstStyle/>
+          <a:p>
+            <a:pPr algn="ctr" indent="0" marL="0">
+              <a:buNone/>
+            </a:pPr>
+            <a:r>
+              <a:rPr lang="en-US" sz="2200" b="1" dirty="0">
+                <a:solidFill>
+                  <a:srgbClr val="13161C"/>
+                </a:solidFill>
+                <a:latin typeface="Courier New" pitchFamily="34" charset="0"/>
+                <a:ea typeface="Courier New" pitchFamily="34" charset="-122"/>
+                <a:cs typeface="Courier New" pitchFamily="34" charset="-120"/>
+              </a:rPr>
+              <a:t>8</a:t>
+            </a:r>
+            <a:endParaRPr lang="en-US" sz="2200" dirty="0"/>
+          </a:p>
+        </p:txBody>
+      </p:sp>
+      <p:sp>
+        <p:nvSpPr>
+          <p:cNvPr id="3" name="Text 1"/>
+          <p:cNvSpPr/>
+          <p:nvPr/>
+        </p:nvSpPr>
+        <p:spPr>
+          <a:xfrm>
+            <a:off x="1325880" y="384048"/>
+            <a:ext cx="10287000" cy="694944"/>
+          </a:xfrm>
+          <a:prstGeom prst="rect">
+            <a:avLst/>
+          </a:prstGeom>
+          <a:noFill/>
+          <a:ln/>
+        </p:spPr>
+        <p:txBody>
+          <a:bodyPr wrap="square" lIns="0" tIns="0" rIns="0" bIns="0" rtlCol="0" anchor="ctr"/>
+          <a:lstStyle/>
+          <a:p>
+            <a:pPr algn="l" indent="0" marL="0">
+              <a:buNone/>
+            </a:pPr>
+            <a:r>
+              <a:rPr lang="en-US" sz="3000" b="1" dirty="0">
+                <a:solidFill>
+                  <a:srgbClr val="E8EDF2"/>
+                </a:solidFill>
+                <a:latin typeface="Malgun Gothic" pitchFamily="34" charset="0"/>
+                <a:ea typeface="Malgun Gothic" pitchFamily="34" charset="-122"/>
+                <a:cs typeface="Malgun Gothic" pitchFamily="34" charset="-120"/>
+              </a:rPr>
+              <a:t>전체 여정 되짚기</a:t>
+            </a:r>
+            <a:endParaRPr lang="en-US" sz="3000" dirty="0"/>
+          </a:p>
+        </p:txBody>
+      </p:sp>
+      <p:sp>
+        <p:nvSpPr>
+          <p:cNvPr id="4" name="Shape 2"/>
+          <p:cNvSpPr/>
+          <p:nvPr/>
+        </p:nvSpPr>
+        <p:spPr>
+          <a:xfrm>
+            <a:off x="548640" y="1600200"/>
+            <a:ext cx="11064240" cy="786384"/>
+          </a:xfrm>
+          <a:prstGeom prst="roundRect">
+            <a:avLst>
+              <a:gd name="adj" fmla="val 8140"/>
+            </a:avLst>
+          </a:prstGeom>
+          <a:solidFill>
+            <a:srgbClr val="1E232C"/>
+          </a:solidFill>
+          <a:ln/>
+        </p:spPr>
+      </p:sp>
+      <p:sp>
+        <p:nvSpPr>
+          <p:cNvPr id="5" name="Text 3"/>
+          <p:cNvSpPr/>
+          <p:nvPr/>
+        </p:nvSpPr>
+        <p:spPr>
+          <a:xfrm>
+            <a:off x="804672" y="1691640"/>
+            <a:ext cx="1554480" cy="603504"/>
+          </a:xfrm>
+          <a:prstGeom prst="rect">
+            <a:avLst/>
+          </a:prstGeom>
+          <a:noFill/>
+          <a:ln/>
+        </p:spPr>
+        <p:txBody>
+          <a:bodyPr wrap="square" lIns="0" tIns="0" rIns="0" bIns="0" rtlCol="0" anchor="ctr"/>
+          <a:lstStyle/>
+          <a:p>
+            <a:pPr indent="0" marL="0">
+              <a:buNone/>
+            </a:pPr>
+            <a:r>
+              <a:rPr lang="en-US" sz="1700" b="1" dirty="0">
+                <a:solidFill>
+                  <a:srgbClr val="8CC63F"/>
+                </a:solidFill>
+                <a:latin typeface="Courier New" pitchFamily="34" charset="0"/>
+                <a:ea typeface="Courier New" pitchFamily="34" charset="-122"/>
+                <a:cs typeface="Courier New" pitchFamily="34" charset="-120"/>
+              </a:rPr>
+              <a:t>세션 1</a:t>
+            </a:r>
+            <a:endParaRPr lang="en-US" sz="1700" dirty="0"/>
+          </a:p>
+        </p:txBody>
+      </p:sp>
+      <p:sp>
+        <p:nvSpPr>
+          <p:cNvPr id="6" name="Text 4"/>
+          <p:cNvSpPr/>
+          <p:nvPr/>
+        </p:nvSpPr>
+        <p:spPr>
+          <a:xfrm>
+            <a:off x="2468880" y="1691640"/>
+            <a:ext cx="4206240" cy="603504"/>
+          </a:xfrm>
+          <a:prstGeom prst="rect">
+            <a:avLst/>
+          </a:prstGeom>
+          <a:noFill/>
+          <a:ln/>
+        </p:spPr>
+        <p:txBody>
+          <a:bodyPr wrap="square" lIns="0" tIns="0" rIns="0" bIns="0" rtlCol="0" anchor="ctr"/>
+          <a:lstStyle/>
+          <a:p>
+            <a:pPr indent="0" marL="0">
+              <a:buNone/>
+            </a:pPr>
+            <a:r>
+              <a:rPr lang="en-US" sz="1600" b="1" dirty="0">
+                <a:solidFill>
+                  <a:srgbClr val="E8EDF2"/>
+                </a:solidFill>
+                <a:latin typeface="Malgun Gothic" pitchFamily="34" charset="0"/>
+                <a:ea typeface="Malgun Gothic" pitchFamily="34" charset="-122"/>
+                <a:cs typeface="Malgun Gothic" pitchFamily="34" charset="-120"/>
+              </a:rPr>
+              <a:t>스레드 모델 · 첫 커널</a:t>
+            </a:r>
+            <a:endParaRPr lang="en-US" sz="1600" dirty="0"/>
+          </a:p>
+        </p:txBody>
+      </p:sp>
+      <p:sp>
+        <p:nvSpPr>
+          <p:cNvPr id="7" name="Text 5"/>
+          <p:cNvSpPr/>
+          <p:nvPr/>
+        </p:nvSpPr>
+        <p:spPr>
+          <a:xfrm>
+            <a:off x="6858000" y="1691640"/>
+            <a:ext cx="4480560" cy="603504"/>
+          </a:xfrm>
+          <a:prstGeom prst="rect">
+            <a:avLst/>
+          </a:prstGeom>
+          <a:noFill/>
+          <a:ln/>
+        </p:spPr>
+        <p:txBody>
+          <a:bodyPr wrap="square" lIns="0" tIns="0" rIns="0" bIns="0" rtlCol="0" anchor="ctr"/>
+          <a:lstStyle/>
+          <a:p>
+            <a:pPr indent="0" marL="0">
+              <a:buNone/>
+            </a:pPr>
+            <a:r>
+              <a:rPr lang="en-US" sz="1300" dirty="0">
+                <a:solidFill>
+                  <a:srgbClr val="9AA6B2"/>
+                </a:solidFill>
+                <a:latin typeface="Courier New" pitchFamily="34" charset="0"/>
+                <a:ea typeface="Courier New" pitchFamily="34" charset="-122"/>
+                <a:cs typeface="Courier New" pitchFamily="34" charset="-120"/>
+              </a:rPr>
+              <a:t>__global__, &lt;&lt;&lt;grid,block&gt;&gt;&gt;, blockIdx</a:t>
+            </a:r>
+            <a:endParaRPr lang="en-US" sz="1300" dirty="0"/>
+          </a:p>
+        </p:txBody>
+      </p:sp>
+      <p:sp>
+        <p:nvSpPr>
+          <p:cNvPr id="8" name="Shape 6"/>
+          <p:cNvSpPr/>
+          <p:nvPr/>
+        </p:nvSpPr>
+        <p:spPr>
+          <a:xfrm>
+            <a:off x="548640" y="2496312"/>
+            <a:ext cx="11064240" cy="786384"/>
+          </a:xfrm>
+          <a:prstGeom prst="roundRect">
+            <a:avLst>
+              <a:gd name="adj" fmla="val 8140"/>
+            </a:avLst>
+          </a:prstGeom>
+          <a:solidFill>
+            <a:srgbClr val="1E232C"/>
+          </a:solidFill>
+          <a:ln/>
+        </p:spPr>
+      </p:sp>
+      <p:sp>
+        <p:nvSpPr>
+          <p:cNvPr id="9" name="Text 7"/>
+          <p:cNvSpPr/>
+          <p:nvPr/>
+        </p:nvSpPr>
+        <p:spPr>
+          <a:xfrm>
+            <a:off x="804672" y="2587752"/>
+            <a:ext cx="1554480" cy="603504"/>
+          </a:xfrm>
+          <a:prstGeom prst="rect">
+            <a:avLst/>
+          </a:prstGeom>
+          <a:noFill/>
+          <a:ln/>
+        </p:spPr>
+        <p:txBody>
+          <a:bodyPr wrap="square" lIns="0" tIns="0" rIns="0" bIns="0" rtlCol="0" anchor="ctr"/>
+          <a:lstStyle/>
+          <a:p>
+            <a:pPr indent="0" marL="0">
+              <a:buNone/>
+            </a:pPr>
+            <a:r>
+              <a:rPr lang="en-US" sz="1700" b="1" dirty="0">
+                <a:solidFill>
+                  <a:srgbClr val="4FB0C6"/>
+                </a:solidFill>
+                <a:latin typeface="Courier New" pitchFamily="34" charset="0"/>
+                <a:ea typeface="Courier New" pitchFamily="34" charset="-122"/>
+                <a:cs typeface="Courier New" pitchFamily="34" charset="-120"/>
+              </a:rPr>
+              <a:t>세션 2</a:t>
+            </a:r>
+            <a:endParaRPr lang="en-US" sz="1700" dirty="0"/>
+          </a:p>
+        </p:txBody>
+      </p:sp>
+      <p:sp>
+        <p:nvSpPr>
+          <p:cNvPr id="10" name="Text 8"/>
+          <p:cNvSpPr/>
+          <p:nvPr/>
+        </p:nvSpPr>
+        <p:spPr>
+          <a:xfrm>
+            <a:off x="2468880" y="2587752"/>
+            <a:ext cx="4206240" cy="603504"/>
+          </a:xfrm>
+          <a:prstGeom prst="rect">
+            <a:avLst/>
+          </a:prstGeom>
+          <a:noFill/>
+          <a:ln/>
+        </p:spPr>
+        <p:txBody>
+          <a:bodyPr wrap="square" lIns="0" tIns="0" rIns="0" bIns="0" rtlCol="0" anchor="ctr"/>
+          <a:lstStyle/>
+          <a:p>
+            <a:pPr indent="0" marL="0">
+              <a:buNone/>
+            </a:pPr>
+            <a:r>
+              <a:rPr lang="en-US" sz="1600" b="1" dirty="0">
+                <a:solidFill>
+                  <a:srgbClr val="E8EDF2"/>
+                </a:solidFill>
+                <a:latin typeface="Malgun Gothic" pitchFamily="34" charset="0"/>
+                <a:ea typeface="Malgun Gothic" pitchFamily="34" charset="-122"/>
+                <a:cs typeface="Malgun Gothic" pitchFamily="34" charset="-120"/>
+              </a:rPr>
+              <a:t>메모리 모델 · 데이터 이동</a:t>
+            </a:r>
+            <a:endParaRPr lang="en-US" sz="1600" dirty="0"/>
+          </a:p>
+        </p:txBody>
+      </p:sp>
+      <p:sp>
+        <p:nvSpPr>
+          <p:cNvPr id="11" name="Text 9"/>
+          <p:cNvSpPr/>
+          <p:nvPr/>
+        </p:nvSpPr>
+        <p:spPr>
+          <a:xfrm>
+            <a:off x="6858000" y="2587752"/>
+            <a:ext cx="4480560" cy="603504"/>
+          </a:xfrm>
+          <a:prstGeom prst="rect">
+            <a:avLst/>
+          </a:prstGeom>
+          <a:noFill/>
+          <a:ln/>
+        </p:spPr>
+        <p:txBody>
+          <a:bodyPr wrap="square" lIns="0" tIns="0" rIns="0" bIns="0" rtlCol="0" anchor="ctr"/>
+          <a:lstStyle/>
+          <a:p>
+            <a:pPr indent="0" marL="0">
+              <a:buNone/>
+            </a:pPr>
+            <a:r>
+              <a:rPr lang="en-US" sz="1300" dirty="0">
+                <a:solidFill>
+                  <a:srgbClr val="9AA6B2"/>
+                </a:solidFill>
+                <a:latin typeface="Courier New" pitchFamily="34" charset="0"/>
+                <a:ea typeface="Courier New" pitchFamily="34" charset="-122"/>
+                <a:cs typeface="Courier New" pitchFamily="34" charset="-120"/>
+              </a:rPr>
+              <a:t>cudaMalloc/Memcpy, 쓰기-종료-읽기</a:t>
+            </a:r>
+            <a:endParaRPr lang="en-US" sz="1300" dirty="0"/>
+          </a:p>
+        </p:txBody>
+      </p:sp>
+      <p:sp>
+        <p:nvSpPr>
+          <p:cNvPr id="12" name="Shape 10"/>
+          <p:cNvSpPr/>
+          <p:nvPr/>
+        </p:nvSpPr>
+        <p:spPr>
+          <a:xfrm>
+            <a:off x="548640" y="3392424"/>
+            <a:ext cx="11064240" cy="786384"/>
+          </a:xfrm>
+          <a:prstGeom prst="roundRect">
+            <a:avLst>
+              <a:gd name="adj" fmla="val 8140"/>
+            </a:avLst>
+          </a:prstGeom>
+          <a:solidFill>
+            <a:srgbClr val="1E232C"/>
+          </a:solidFill>
+          <a:ln/>
+        </p:spPr>
+      </p:sp>
+      <p:sp>
+        <p:nvSpPr>
+          <p:cNvPr id="13" name="Text 11"/>
+          <p:cNvSpPr/>
+          <p:nvPr/>
+        </p:nvSpPr>
+        <p:spPr>
+          <a:xfrm>
+            <a:off x="804672" y="3483864"/>
+            <a:ext cx="1554480" cy="603504"/>
+          </a:xfrm>
+          <a:prstGeom prst="rect">
+            <a:avLst/>
+          </a:prstGeom>
+          <a:noFill/>
+          <a:ln/>
+        </p:spPr>
+        <p:txBody>
+          <a:bodyPr wrap="square" lIns="0" tIns="0" rIns="0" bIns="0" rtlCol="0" anchor="ctr"/>
+          <a:lstStyle/>
+          <a:p>
+            <a:pPr indent="0" marL="0">
+              <a:buNone/>
+            </a:pPr>
+            <a:r>
+              <a:rPr lang="en-US" sz="1700" b="1" dirty="0">
+                <a:solidFill>
+                  <a:srgbClr val="E0A458"/>
+                </a:solidFill>
+                <a:latin typeface="Courier New" pitchFamily="34" charset="0"/>
+                <a:ea typeface="Courier New" pitchFamily="34" charset="-122"/>
+                <a:cs typeface="Courier New" pitchFamily="34" charset="-120"/>
+              </a:rPr>
+              <a:t>세션 3</a:t>
+            </a:r>
+            <a:endParaRPr lang="en-US" sz="1700" dirty="0"/>
+          </a:p>
+        </p:txBody>
+      </p:sp>
+      <p:sp>
+        <p:nvSpPr>
+          <p:cNvPr id="14" name="Text 12"/>
+          <p:cNvSpPr/>
+          <p:nvPr/>
+        </p:nvSpPr>
+        <p:spPr>
+          <a:xfrm>
+            <a:off x="2468880" y="3483864"/>
+            <a:ext cx="4206240" cy="603504"/>
+          </a:xfrm>
+          <a:prstGeom prst="rect">
+            <a:avLst/>
+          </a:prstGeom>
+          <a:noFill/>
+          <a:ln/>
+        </p:spPr>
+        <p:txBody>
+          <a:bodyPr wrap="square" lIns="0" tIns="0" rIns="0" bIns="0" rtlCol="0" anchor="ctr"/>
+          <a:lstStyle/>
+          <a:p>
+            <a:pPr indent="0" marL="0">
+              <a:buNone/>
+            </a:pPr>
+            <a:r>
+              <a:rPr lang="en-US" sz="1600" b="1" dirty="0">
+                <a:solidFill>
+                  <a:srgbClr val="E8EDF2"/>
+                </a:solidFill>
+                <a:latin typeface="Malgun Gothic" pitchFamily="34" charset="0"/>
+                <a:ea typeface="Malgun Gothic" pitchFamily="34" charset="-122"/>
+                <a:cs typeface="Malgun Gothic" pitchFamily="34" charset="-120"/>
+              </a:rPr>
+              <a:t>병렬성 · 성능</a:t>
+            </a:r>
+            <a:endParaRPr lang="en-US" sz="1600" dirty="0"/>
+          </a:p>
+        </p:txBody>
+      </p:sp>
+      <p:sp>
+        <p:nvSpPr>
+          <p:cNvPr id="15" name="Text 13"/>
+          <p:cNvSpPr/>
+          <p:nvPr/>
+        </p:nvSpPr>
+        <p:spPr>
+          <a:xfrm>
+            <a:off x="6858000" y="3483864"/>
+            <a:ext cx="4480560" cy="603504"/>
+          </a:xfrm>
+          <a:prstGeom prst="rect">
+            <a:avLst/>
+          </a:prstGeom>
+          <a:noFill/>
+          <a:ln/>
+        </p:spPr>
+        <p:txBody>
+          <a:bodyPr wrap="square" lIns="0" tIns="0" rIns="0" bIns="0" rtlCol="0" anchor="ctr"/>
+          <a:lstStyle/>
+          <a:p>
+            <a:pPr indent="0" marL="0">
+              <a:buNone/>
+            </a:pPr>
+            <a:r>
+              <a:rPr lang="en-US" sz="1300" dirty="0">
+                <a:solidFill>
+                  <a:srgbClr val="9AA6B2"/>
+                </a:solidFill>
+                <a:latin typeface="Courier New" pitchFamily="34" charset="0"/>
+                <a:ea typeface="Courier New" pitchFamily="34" charset="-122"/>
+                <a:cs typeface="Courier New" pitchFamily="34" charset="-120"/>
+              </a:rPr>
+              <a:t>threadIdx, 병합, 이벤트로 대역폭</a:t>
+            </a:r>
+            <a:endParaRPr lang="en-US" sz="1300" dirty="0"/>
+          </a:p>
+        </p:txBody>
+      </p:sp>
+      <p:sp>
+        <p:nvSpPr>
+          <p:cNvPr id="16" name="Shape 14"/>
+          <p:cNvSpPr/>
+          <p:nvPr/>
+        </p:nvSpPr>
+        <p:spPr>
+          <a:xfrm>
+            <a:off x="548640" y="4288536"/>
+            <a:ext cx="11064240" cy="786384"/>
+          </a:xfrm>
+          <a:prstGeom prst="roundRect">
+            <a:avLst>
+              <a:gd name="adj" fmla="val 8140"/>
+            </a:avLst>
+          </a:prstGeom>
+          <a:solidFill>
+            <a:srgbClr val="1E232C"/>
+          </a:solidFill>
+          <a:ln/>
+        </p:spPr>
+      </p:sp>
+      <p:sp>
+        <p:nvSpPr>
+          <p:cNvPr id="17" name="Text 15"/>
+          <p:cNvSpPr/>
+          <p:nvPr/>
+        </p:nvSpPr>
+        <p:spPr>
+          <a:xfrm>
+            <a:off x="804672" y="4379976"/>
+            <a:ext cx="1554480" cy="603504"/>
+          </a:xfrm>
+          <a:prstGeom prst="rect">
+            <a:avLst/>
+          </a:prstGeom>
+          <a:noFill/>
+          <a:ln/>
+        </p:spPr>
+        <p:txBody>
+          <a:bodyPr wrap="square" lIns="0" tIns="0" rIns="0" bIns="0" rtlCol="0" anchor="ctr"/>
+          <a:lstStyle/>
+          <a:p>
+            <a:pPr indent="0" marL="0">
+              <a:buNone/>
+            </a:pPr>
+            <a:r>
+              <a:rPr lang="en-US" sz="1700" b="1" dirty="0">
+                <a:solidFill>
+                  <a:srgbClr val="E0645B"/>
+                </a:solidFill>
+                <a:latin typeface="Courier New" pitchFamily="34" charset="0"/>
+                <a:ea typeface="Courier New" pitchFamily="34" charset="-122"/>
+                <a:cs typeface="Courier New" pitchFamily="34" charset="-120"/>
+              </a:rPr>
+              <a:t>세션 4</a:t>
+            </a:r>
+            <a:endParaRPr lang="en-US" sz="1700" dirty="0"/>
+          </a:p>
+        </p:txBody>
+      </p:sp>
+      <p:sp>
+        <p:nvSpPr>
+          <p:cNvPr id="18" name="Text 16"/>
+          <p:cNvSpPr/>
+          <p:nvPr/>
+        </p:nvSpPr>
+        <p:spPr>
+          <a:xfrm>
+            <a:off x="2468880" y="4379976"/>
+            <a:ext cx="4206240" cy="603504"/>
+          </a:xfrm>
+          <a:prstGeom prst="rect">
+            <a:avLst/>
+          </a:prstGeom>
+          <a:noFill/>
+          <a:ln/>
+        </p:spPr>
+        <p:txBody>
+          <a:bodyPr wrap="square" lIns="0" tIns="0" rIns="0" bIns="0" rtlCol="0" anchor="ctr"/>
+          <a:lstStyle/>
+          <a:p>
+            <a:pPr indent="0" marL="0">
+              <a:buNone/>
+            </a:pPr>
+            <a:r>
+              <a:rPr lang="en-US" sz="1600" b="1" dirty="0">
+                <a:solidFill>
+                  <a:srgbClr val="E8EDF2"/>
+                </a:solidFill>
+                <a:latin typeface="Malgun Gothic" pitchFamily="34" charset="0"/>
+                <a:ea typeface="Malgun Gothic" pitchFamily="34" charset="-122"/>
+                <a:cs typeface="Malgun Gothic" pitchFamily="34" charset="-120"/>
+              </a:rPr>
+              <a:t>원자연산 · 에러</a:t>
+            </a:r>
+            <a:endParaRPr lang="en-US" sz="1600" dirty="0"/>
+          </a:p>
+        </p:txBody>
+      </p:sp>
+      <p:sp>
+        <p:nvSpPr>
+          <p:cNvPr id="19" name="Text 17"/>
+          <p:cNvSpPr/>
+          <p:nvPr/>
+        </p:nvSpPr>
+        <p:spPr>
+          <a:xfrm>
+            <a:off x="6858000" y="4379976"/>
+            <a:ext cx="4480560" cy="603504"/>
+          </a:xfrm>
+          <a:prstGeom prst="rect">
+            <a:avLst/>
+          </a:prstGeom>
+          <a:noFill/>
+          <a:ln/>
+        </p:spPr>
+        <p:txBody>
+          <a:bodyPr wrap="square" lIns="0" tIns="0" rIns="0" bIns="0" rtlCol="0" anchor="ctr"/>
+          <a:lstStyle/>
+          <a:p>
+            <a:pPr indent="0" marL="0">
+              <a:buNone/>
+            </a:pPr>
+            <a:r>
+              <a:rPr lang="en-US" sz="1300" dirty="0">
+                <a:solidFill>
+                  <a:srgbClr val="9AA6B2"/>
+                </a:solidFill>
+                <a:latin typeface="Courier New" pitchFamily="34" charset="0"/>
+                <a:ea typeface="Courier New" pitchFamily="34" charset="-122"/>
+                <a:cs typeface="Courier New" pitchFamily="34" charset="-120"/>
+              </a:rPr>
+              <a:t>atomicAdd, CUERR, 비동기 오류</a:t>
+            </a:r>
+            <a:endParaRPr lang="en-US" sz="1300" dirty="0"/>
+          </a:p>
+        </p:txBody>
+      </p:sp>
+      <p:sp>
+        <p:nvSpPr>
+          <p:cNvPr id="20" name="Shape 18"/>
+          <p:cNvSpPr/>
+          <p:nvPr/>
+        </p:nvSpPr>
+        <p:spPr>
+          <a:xfrm>
+            <a:off x="548640" y="5184648"/>
+            <a:ext cx="11064240" cy="786384"/>
+          </a:xfrm>
+          <a:prstGeom prst="roundRect">
+            <a:avLst>
+              <a:gd name="adj" fmla="val 8140"/>
+            </a:avLst>
+          </a:prstGeom>
+          <a:solidFill>
+            <a:srgbClr val="1E232C"/>
+          </a:solidFill>
+          <a:ln/>
+        </p:spPr>
+      </p:sp>
+      <p:sp>
+        <p:nvSpPr>
+          <p:cNvPr id="21" name="Text 19"/>
+          <p:cNvSpPr/>
+          <p:nvPr/>
+        </p:nvSpPr>
+        <p:spPr>
+          <a:xfrm>
+            <a:off x="804672" y="5276088"/>
+            <a:ext cx="1554480" cy="603504"/>
+          </a:xfrm>
+          <a:prstGeom prst="rect">
+            <a:avLst/>
+          </a:prstGeom>
+          <a:noFill/>
+          <a:ln/>
+        </p:spPr>
+        <p:txBody>
+          <a:bodyPr wrap="square" lIns="0" tIns="0" rIns="0" bIns="0" rtlCol="0" anchor="ctr"/>
+          <a:lstStyle/>
+          <a:p>
+            <a:pPr indent="0" marL="0">
+              <a:buNone/>
+            </a:pPr>
+            <a:r>
+              <a:rPr lang="en-US" sz="1700" b="1" dirty="0">
+                <a:solidFill>
+                  <a:srgbClr val="8CC63F"/>
+                </a:solidFill>
+                <a:latin typeface="Courier New" pitchFamily="34" charset="0"/>
+                <a:ea typeface="Courier New" pitchFamily="34" charset="-122"/>
+                <a:cs typeface="Courier New" pitchFamily="34" charset="-120"/>
+              </a:rPr>
+              <a:t>세션 5</a:t>
+            </a:r>
+            <a:endParaRPr lang="en-US" sz="1700" dirty="0"/>
+          </a:p>
+        </p:txBody>
+      </p:sp>
+      <p:sp>
+        <p:nvSpPr>
+          <p:cNvPr id="22" name="Text 20"/>
+          <p:cNvSpPr/>
+          <p:nvPr/>
+        </p:nvSpPr>
+        <p:spPr>
+          <a:xfrm>
+            <a:off x="2468880" y="5276088"/>
+            <a:ext cx="4206240" cy="603504"/>
+          </a:xfrm>
+          <a:prstGeom prst="rect">
+            <a:avLst/>
+          </a:prstGeom>
+          <a:noFill/>
+          <a:ln/>
+        </p:spPr>
+        <p:txBody>
+          <a:bodyPr wrap="square" lIns="0" tIns="0" rIns="0" bIns="0" rtlCol="0" anchor="ctr"/>
+          <a:lstStyle/>
+          <a:p>
+            <a:pPr indent="0" marL="0">
+              <a:buNone/>
+            </a:pPr>
+            <a:r>
+              <a:rPr lang="en-US" sz="1600" b="1" dirty="0">
+                <a:solidFill>
+                  <a:srgbClr val="E8EDF2"/>
+                </a:solidFill>
+                <a:latin typeface="Malgun Gothic" pitchFamily="34" charset="0"/>
+                <a:ea typeface="Malgun Gothic" pitchFamily="34" charset="-122"/>
+                <a:cs typeface="Malgun Gothic" pitchFamily="34" charset="-120"/>
+              </a:rPr>
+              <a:t>멀티 GPU · 이식성 · 프로젝트</a:t>
+            </a:r>
+            <a:endParaRPr lang="en-US" sz="1600" dirty="0"/>
+          </a:p>
+        </p:txBody>
+      </p:sp>
+      <p:sp>
+        <p:nvSpPr>
+          <p:cNvPr id="23" name="Text 21"/>
+          <p:cNvSpPr/>
+          <p:nvPr/>
+        </p:nvSpPr>
+        <p:spPr>
+          <a:xfrm>
+            <a:off x="6858000" y="5276088"/>
+            <a:ext cx="4480560" cy="603504"/>
+          </a:xfrm>
+          <a:prstGeom prst="rect">
+            <a:avLst/>
+          </a:prstGeom>
+          <a:noFill/>
+          <a:ln/>
+        </p:spPr>
+        <p:txBody>
+          <a:bodyPr wrap="square" lIns="0" tIns="0" rIns="0" bIns="0" rtlCol="0" anchor="ctr"/>
+          <a:lstStyle/>
+          <a:p>
+            <a:pPr indent="0" marL="0">
+              <a:buNone/>
+            </a:pPr>
+            <a:r>
+              <a:rPr lang="en-US" sz="1300" dirty="0">
+                <a:solidFill>
+                  <a:srgbClr val="9AA6B2"/>
+                </a:solidFill>
+                <a:latin typeface="Courier New" pitchFamily="34" charset="0"/>
+                <a:ea typeface="Courier New" pitchFamily="34" charset="-122"/>
+                <a:cs typeface="Courier New" pitchFamily="34" charset="-120"/>
+              </a:rPr>
+              <a:t>pthread, HIP, 나만의 커널</a:t>
+            </a:r>
+            <a:endParaRPr lang="en-US" sz="1300" dirty="0"/>
+          </a:p>
+        </p:txBody>
+      </p:sp>
+      <p:sp>
+        <p:nvSpPr>
+          <p:cNvPr id="24" name="Text 22"/>
+          <p:cNvSpPr/>
+          <p:nvPr/>
+        </p:nvSpPr>
+        <p:spPr>
+          <a:xfrm>
+            <a:off x="548640" y="6126480"/>
+            <a:ext cx="11064240" cy="365760"/>
+          </a:xfrm>
+          <a:prstGeom prst="rect">
+            <a:avLst/>
+          </a:prstGeom>
+          <a:noFill/>
+          <a:ln/>
+        </p:spPr>
+        <p:txBody>
+          <a:bodyPr wrap="square" lIns="0" tIns="0" rIns="0" bIns="0" rtlCol="0" anchor="ctr"/>
+          <a:lstStyle/>
+          <a:p>
+            <a:pPr algn="ctr" indent="0" marL="0">
+              <a:buNone/>
+            </a:pPr>
+            <a:r>
+              <a:rPr lang="en-US" sz="1400" i="1" dirty="0">
+                <a:solidFill>
+                  <a:srgbClr val="9AA6B2"/>
+                </a:solidFill>
+                <a:latin typeface="Malgun Gothic" pitchFamily="34" charset="0"/>
+                <a:ea typeface="Malgun Gothic" pitchFamily="34" charset="-122"/>
+                <a:cs typeface="Malgun Gothic" pitchFamily="34" charset="-120"/>
+              </a:rPr>
+              <a:t>장난감 예제가 아니라 500줄 넘는 실제 프로덕션 코드로 CUDA의 핵심을 모두 훑었습니다.</a:t>
+            </a:r>
+            <a:endParaRPr lang="en-US" sz="1400" dirty="0"/>
+          </a:p>
+        </p:txBody>
+      </p:sp>
+    </p:spTree>
+  </p:cSld>
+  <p:clrMapOvr>
+    <a:masterClrMapping/>
+  </p:clrMapOvr>
+</p:sld>
+</file>
+
+<file path=ppt/slides/slide11.xml><?xml version="1.0" encoding="utf-8"?>
+<p:sld xmlns:a="http://schemas.openxmlformats.org/drawingml/2006/main" xmlns:r="http://schemas.openxmlformats.org/officeDocument/2006/relationships" xmlns:p="http://schemas.openxmlformats.org/presentationml/2006/main">
+  <p:cSld name="Slide 11">
+    <p:bg>
+      <p:bgPr>
+        <a:solidFill>
+          <a:srgbClr val="13161C"/>
+        </a:solidFill>
+      </p:bgPr>
+    </p:bg>
+    <p:spTree>
+      <p:nvGrpSpPr>
+        <p:cNvPr id="1" name=""/>
+        <p:cNvGrpSpPr/>
+        <p:nvPr/>
+      </p:nvGrpSpPr>
+      <p:grpSpPr>
+        <a:xfrm>
+          <a:off x="0" y="0"/>
+          <a:ext cx="0" cy="0"/>
+          <a:chOff x="0" y="0"/>
+          <a:chExt cx="0" cy="0"/>
+        </a:xfrm>
+      </p:grpSpPr>
+      <p:sp>
+        <p:nvSpPr>
+          <p:cNvPr id="2" name="Text 0"/>
+          <p:cNvSpPr/>
+          <p:nvPr/>
+        </p:nvSpPr>
+        <p:spPr>
+          <a:xfrm>
             <a:off x="548640" y="1371600"/>
             <a:ext cx="10058400" cy="640080"/>
           </a:xfrm>
@@ -3722,7 +4659,7 @@
                 <a:ea typeface="Courier New" pitchFamily="34" charset="-122"/>
                 <a:cs typeface="Courier New" pitchFamily="34" charset="-120"/>
               </a:rPr>
-              <a:t>3</a:t>
+              <a:t>2</a:t>
             </a:r>
             <a:endParaRPr lang="en-US" sz="2200" dirty="0"/>
           </a:p>
@@ -3761,7 +4698,7 @@
                 <a:ea typeface="Malgun Gothic" pitchFamily="34" charset="-122"/>
                 <a:cs typeface="Malgun Gothic" pitchFamily="34" charset="-120"/>
               </a:rPr>
-              <a:t>스레드 지역 저장소 · __thread gpu_idx</a:t>
+              <a:t>멀티 GPU 시스템 구조 · 병렬 스택</a:t>
             </a:r>
             <a:endParaRPr lang="en-US" sz="3000" dirty="0"/>
           </a:p>
@@ -3769,18 +4706,147 @@
       </p:sp>
       <p:sp>
         <p:nvSpPr>
-          <p:cNvPr id="4" name="Shape 2"/>
-          <p:cNvSpPr/>
-          <p:nvPr/>
-        </p:nvSpPr>
-        <p:spPr>
-          <a:xfrm>
-            <a:off x="548640" y="1554480"/>
-            <a:ext cx="11064240" cy="2377440"/>
+          <p:cNvPr id="4" name="Text 2"/>
+          <p:cNvSpPr/>
+          <p:nvPr/>
+        </p:nvSpPr>
+        <p:spPr>
+          <a:xfrm>
+            <a:off x="548640" y="1325880"/>
+            <a:ext cx="11064240" cy="365760"/>
+          </a:xfrm>
+          <a:prstGeom prst="rect">
+            <a:avLst/>
+          </a:prstGeom>
+          <a:noFill/>
+          <a:ln/>
+        </p:spPr>
+        <p:txBody>
+          <a:bodyPr wrap="square" lIns="0" tIns="0" rIns="0" bIns="0" rtlCol="0" anchor="ctr"/>
+          <a:lstStyle/>
+          <a:p>
+            <a:pPr indent="0" marL="0">
+              <a:buNone/>
+            </a:pPr>
+            <a:r>
+              <a:rPr lang="en-US" sz="1500" dirty="0">
+                <a:solidFill>
+                  <a:srgbClr val="9AA6B2"/>
+                </a:solidFill>
+                <a:latin typeface="Malgun Gothic" pitchFamily="34" charset="0"/>
+                <a:ea typeface="Malgun Gothic" pitchFamily="34" charset="-122"/>
+                <a:cs typeface="Malgun Gothic" pitchFamily="34" charset="-120"/>
+              </a:rPr>
+              <a:t>하나의 프로세스가 GPU마다 독립된 스레드 스택을 띄우고, 모두 동시에 검사를 실행합니다.</a:t>
+            </a:r>
+            <a:endParaRPr lang="en-US" sz="1500" dirty="0"/>
+          </a:p>
+        </p:txBody>
+      </p:sp>
+      <p:sp>
+        <p:nvSpPr>
+          <p:cNvPr id="5" name="Shape 3"/>
+          <p:cNvSpPr/>
+          <p:nvPr/>
+        </p:nvSpPr>
+        <p:spPr>
+          <a:xfrm>
+            <a:off x="548640" y="1783080"/>
+            <a:ext cx="11064240" cy="658368"/>
           </a:xfrm>
           <a:prstGeom prst="roundRect">
             <a:avLst>
-              <a:gd name="adj" fmla="val 2308"/>
+              <a:gd name="adj" fmla="val 8333"/>
+            </a:avLst>
+          </a:prstGeom>
+          <a:solidFill>
+            <a:srgbClr val="25303F"/>
+          </a:solidFill>
+          <a:ln w="19050">
+            <a:solidFill>
+              <a:srgbClr val="9AA6B2"/>
+            </a:solidFill>
+            <a:prstDash val="solid"/>
+          </a:ln>
+        </p:spPr>
+      </p:sp>
+      <p:sp>
+        <p:nvSpPr>
+          <p:cNvPr id="6" name="Text 4"/>
+          <p:cNvSpPr/>
+          <p:nvPr/>
+        </p:nvSpPr>
+        <p:spPr>
+          <a:xfrm>
+            <a:off x="822960" y="1783080"/>
+            <a:ext cx="10515600" cy="658368"/>
+          </a:xfrm>
+          <a:prstGeom prst="rect">
+            <a:avLst/>
+          </a:prstGeom>
+          <a:noFill/>
+          <a:ln/>
+        </p:spPr>
+        <p:txBody>
+          <a:bodyPr wrap="square" lIns="0" tIns="0" rIns="0" bIns="0" rtlCol="0" anchor="ctr"/>
+          <a:lstStyle/>
+          <a:p>
+            <a:pPr indent="0" marL="0">
+              <a:buNone/>
+            </a:pPr>
+            <a:r>
+              <a:rPr lang="en-US" sz="1500" b="1" dirty="0">
+                <a:solidFill>
+                  <a:srgbClr val="E8EDF2"/>
+                </a:solidFill>
+                <a:latin typeface="Malgun Gothic" pitchFamily="34" charset="0"/>
+                <a:ea typeface="Malgun Gothic" pitchFamily="34" charset="-122"/>
+                <a:cs typeface="Malgun Gothic" pitchFamily="34" charset="-120"/>
+              </a:rPr>
+              <a:t>main() 프로세스  ·  GPU 개수만큼 pthread_create (cuda_memtest.cpp:543)</a:t>
+            </a:r>
+            <a:endParaRPr lang="en-US" sz="1500" dirty="0"/>
+          </a:p>
+        </p:txBody>
+      </p:sp>
+      <p:sp>
+        <p:nvSpPr>
+          <p:cNvPr id="7" name="Shape 5"/>
+          <p:cNvSpPr/>
+          <p:nvPr/>
+        </p:nvSpPr>
+        <p:spPr>
+          <a:xfrm>
+            <a:off x="2255520" y="2459736"/>
+            <a:ext cx="0" cy="256032"/>
+          </a:xfrm>
+          <a:prstGeom prst="line">
+            <a:avLst/>
+          </a:prstGeom>
+          <a:noFill/>
+          <a:ln w="31750">
+            <a:solidFill>
+              <a:srgbClr val="8CC63F"/>
+            </a:solidFill>
+            <a:prstDash val="solid"/>
+            <a:tailEnd type="triangle"/>
+          </a:ln>
+        </p:spPr>
+      </p:sp>
+      <p:sp>
+        <p:nvSpPr>
+          <p:cNvPr id="8" name="Shape 6"/>
+          <p:cNvSpPr/>
+          <p:nvPr/>
+        </p:nvSpPr>
+        <p:spPr>
+          <a:xfrm>
+            <a:off x="548640" y="2807208"/>
+            <a:ext cx="3413760" cy="493776"/>
+          </a:xfrm>
+          <a:prstGeom prst="roundRect">
+            <a:avLst>
+              <a:gd name="adj" fmla="val 9259"/>
             </a:avLst>
           </a:prstGeom>
           <a:solidFill>
@@ -3796,288 +4862,1924 @@
       </p:sp>
       <p:sp>
         <p:nvSpPr>
-          <p:cNvPr id="5" name="Text 3"/>
-          <p:cNvSpPr/>
-          <p:nvPr/>
-        </p:nvSpPr>
-        <p:spPr>
-          <a:xfrm>
-            <a:off x="749808" y="1700784"/>
-            <a:ext cx="10661904" cy="2084832"/>
-          </a:xfrm>
-          <a:prstGeom prst="rect">
-            <a:avLst/>
-          </a:prstGeom>
-          <a:noFill/>
-          <a:ln/>
-        </p:spPr>
-        <p:txBody>
-          <a:bodyPr wrap="square" lIns="0" tIns="0" rIns="0" bIns="0" rtlCol="0" anchor="t"/>
-          <a:lstStyle/>
-          <a:p>
-            <a:pPr algn="l" indent="0" marL="0">
-              <a:lnSpc>
-                <a:spcPct val="108000"/>
-              </a:lnSpc>
-              <a:buNone/>
-            </a:pPr>
-            <a:r>
-              <a:rPr lang="en-US" sz="1350" dirty="0">
-                <a:solidFill>
-                  <a:srgbClr val="9AA6B2"/>
+          <p:cNvPr id="9" name="Text 7"/>
+          <p:cNvSpPr/>
+          <p:nvPr/>
+        </p:nvSpPr>
+        <p:spPr>
+          <a:xfrm>
+            <a:off x="713232" y="2862072"/>
+            <a:ext cx="3084576" cy="256032"/>
+          </a:xfrm>
+          <a:prstGeom prst="rect">
+            <a:avLst/>
+          </a:prstGeom>
+          <a:noFill/>
+          <a:ln/>
+        </p:spPr>
+        <p:txBody>
+          <a:bodyPr wrap="square" lIns="0" tIns="0" rIns="0" bIns="0" rtlCol="0" anchor="ctr"/>
+          <a:lstStyle/>
+          <a:p>
+            <a:pPr indent="0" marL="0">
+              <a:buNone/>
+            </a:pPr>
+            <a:r>
+              <a:rPr lang="en-US" sz="1200" b="1" dirty="0">
+                <a:solidFill>
+                  <a:srgbClr val="E8EDF2"/>
                 </a:solidFill>
                 <a:latin typeface="Courier New" pitchFamily="34" charset="0"/>
                 <a:ea typeface="Courier New" pitchFamily="34" charset="-122"/>
                 <a:cs typeface="Courier New" pitchFamily="34" charset="-120"/>
               </a:rPr>
-              <a:t>// cuda_memtest.h:81</a:t>
-            </a:r>
-            <a:endParaRPr lang="en-US" sz="1350" dirty="0"/>
-          </a:p>
-          <a:p>
-            <a:pPr algn="l" indent="0" marL="0">
-              <a:lnSpc>
-                <a:spcPct val="108000"/>
-              </a:lnSpc>
-              <a:buNone/>
-            </a:pPr>
-            <a:r>
-              <a:rPr lang="en-US" sz="1350" dirty="0">
-                <a:solidFill>
-                  <a:srgbClr val="8CC63F"/>
+              <a:t>스레드 0 (pthread)</a:t>
+            </a:r>
+            <a:endParaRPr lang="en-US" sz="1200" dirty="0"/>
+          </a:p>
+        </p:txBody>
+      </p:sp>
+      <p:sp>
+        <p:nvSpPr>
+          <p:cNvPr id="10" name="Text 8"/>
+          <p:cNvSpPr/>
+          <p:nvPr/>
+        </p:nvSpPr>
+        <p:spPr>
+          <a:xfrm>
+            <a:off x="713232" y="3090672"/>
+            <a:ext cx="3084576" cy="192024"/>
+          </a:xfrm>
+          <a:prstGeom prst="rect">
+            <a:avLst/>
+          </a:prstGeom>
+          <a:noFill/>
+          <a:ln/>
+        </p:spPr>
+        <p:txBody>
+          <a:bodyPr wrap="square" lIns="0" tIns="0" rIns="0" bIns="0" rtlCol="0" anchor="ctr"/>
+          <a:lstStyle/>
+          <a:p>
+            <a:pPr indent="0" marL="0">
+              <a:buNone/>
+            </a:pPr>
+            <a:r>
+              <a:rPr lang="en-US" sz="1050" dirty="0">
+                <a:solidFill>
+                  <a:srgbClr val="9AA6B2"/>
+                </a:solidFill>
+                <a:latin typeface="Malgun Gothic" pitchFamily="34" charset="0"/>
+                <a:ea typeface="Malgun Gothic" pitchFamily="34" charset="-122"/>
+                <a:cs typeface="Malgun Gothic" pitchFamily="34" charset="-120"/>
+              </a:rPr>
+              <a:t>pthread_create로 생성</a:t>
+            </a:r>
+            <a:endParaRPr lang="en-US" sz="1050" dirty="0"/>
+          </a:p>
+        </p:txBody>
+      </p:sp>
+      <p:sp>
+        <p:nvSpPr>
+          <p:cNvPr id="11" name="Shape 9"/>
+          <p:cNvSpPr/>
+          <p:nvPr/>
+        </p:nvSpPr>
+        <p:spPr>
+          <a:xfrm>
+            <a:off x="2255520" y="3303727"/>
+            <a:ext cx="0" cy="91440"/>
+          </a:xfrm>
+          <a:prstGeom prst="line">
+            <a:avLst/>
+          </a:prstGeom>
+          <a:noFill/>
+          <a:ln w="19050">
+            <a:solidFill>
+              <a:srgbClr val="2C3440"/>
+            </a:solidFill>
+            <a:prstDash val="solid"/>
+            <a:tailEnd type="triangle"/>
+          </a:ln>
+        </p:spPr>
+      </p:sp>
+      <p:sp>
+        <p:nvSpPr>
+          <p:cNvPr id="12" name="Shape 10"/>
+          <p:cNvSpPr/>
+          <p:nvPr/>
+        </p:nvSpPr>
+        <p:spPr>
+          <a:xfrm>
+            <a:off x="548640" y="3401568"/>
+            <a:ext cx="3413760" cy="493776"/>
+          </a:xfrm>
+          <a:prstGeom prst="roundRect">
+            <a:avLst>
+              <a:gd name="adj" fmla="val 9259"/>
+            </a:avLst>
+          </a:prstGeom>
+          <a:solidFill>
+            <a:srgbClr val="0E1116"/>
+          </a:solidFill>
+          <a:ln w="12700">
+            <a:solidFill>
+              <a:srgbClr val="2C3440"/>
+            </a:solidFill>
+            <a:prstDash val="solid"/>
+          </a:ln>
+        </p:spPr>
+      </p:sp>
+      <p:sp>
+        <p:nvSpPr>
+          <p:cNvPr id="13" name="Text 11"/>
+          <p:cNvSpPr/>
+          <p:nvPr/>
+        </p:nvSpPr>
+        <p:spPr>
+          <a:xfrm>
+            <a:off x="713232" y="3456432"/>
+            <a:ext cx="3084576" cy="256032"/>
+          </a:xfrm>
+          <a:prstGeom prst="rect">
+            <a:avLst/>
+          </a:prstGeom>
+          <a:noFill/>
+          <a:ln/>
+        </p:spPr>
+        <p:txBody>
+          <a:bodyPr wrap="square" lIns="0" tIns="0" rIns="0" bIns="0" rtlCol="0" anchor="ctr"/>
+          <a:lstStyle/>
+          <a:p>
+            <a:pPr indent="0" marL="0">
+              <a:buNone/>
+            </a:pPr>
+            <a:r>
+              <a:rPr lang="en-US" sz="1200" b="1" dirty="0">
+                <a:solidFill>
+                  <a:srgbClr val="E8EDF2"/>
                 </a:solidFill>
                 <a:latin typeface="Courier New" pitchFamily="34" charset="0"/>
                 <a:ea typeface="Courier New" pitchFamily="34" charset="-122"/>
                 <a:cs typeface="Courier New" pitchFamily="34" charset="-120"/>
               </a:rPr>
-              <a:t>extern __thread unsigned int gpu_idx;   // 스레드마다 독립된 복사본</a:t>
-            </a:r>
-            <a:endParaRPr lang="en-US" sz="1350" dirty="0"/>
-          </a:p>
-          <a:p>
-            <a:pPr algn="l" indent="0" marL="0">
-              <a:lnSpc>
-                <a:spcPct val="108000"/>
-              </a:lnSpc>
-              <a:buNone/>
-            </a:pPr>
-            <a:endParaRPr lang="en-US" sz="1350" dirty="0"/>
-          </a:p>
-          <a:p>
-            <a:pPr algn="l" indent="0" marL="0">
-              <a:lnSpc>
-                <a:spcPct val="108000"/>
-              </a:lnSpc>
-              <a:buNone/>
-            </a:pPr>
-            <a:r>
-              <a:rPr lang="en-US" sz="1350" dirty="0">
+              <a:t>cudaSetDevice(i)</a:t>
+            </a:r>
+            <a:endParaRPr lang="en-US" sz="1200" dirty="0"/>
+          </a:p>
+        </p:txBody>
+      </p:sp>
+      <p:sp>
+        <p:nvSpPr>
+          <p:cNvPr id="14" name="Text 12"/>
+          <p:cNvSpPr/>
+          <p:nvPr/>
+        </p:nvSpPr>
+        <p:spPr>
+          <a:xfrm>
+            <a:off x="713232" y="3685032"/>
+            <a:ext cx="3084576" cy="192024"/>
+          </a:xfrm>
+          <a:prstGeom prst="rect">
+            <a:avLst/>
+          </a:prstGeom>
+          <a:noFill/>
+          <a:ln/>
+        </p:spPr>
+        <p:txBody>
+          <a:bodyPr wrap="square" lIns="0" tIns="0" rIns="0" bIns="0" rtlCol="0" anchor="ctr"/>
+          <a:lstStyle/>
+          <a:p>
+            <a:pPr indent="0" marL="0">
+              <a:buNone/>
+            </a:pPr>
+            <a:r>
+              <a:rPr lang="en-US" sz="1050" dirty="0">
                 <a:solidFill>
                   <a:srgbClr val="9AA6B2"/>
+                </a:solidFill>
+                <a:latin typeface="Malgun Gothic" pitchFamily="34" charset="0"/>
+                <a:ea typeface="Malgun Gothic" pitchFamily="34" charset="-122"/>
+                <a:cs typeface="Malgun Gothic" pitchFamily="34" charset="-120"/>
+              </a:rPr>
+              <a:t>gpu_idx = i (thread-local)</a:t>
+            </a:r>
+            <a:endParaRPr lang="en-US" sz="1050" dirty="0"/>
+          </a:p>
+        </p:txBody>
+      </p:sp>
+      <p:sp>
+        <p:nvSpPr>
+          <p:cNvPr id="15" name="Shape 13"/>
+          <p:cNvSpPr/>
+          <p:nvPr/>
+        </p:nvSpPr>
+        <p:spPr>
+          <a:xfrm>
+            <a:off x="2255520" y="3898087"/>
+            <a:ext cx="0" cy="91440"/>
+          </a:xfrm>
+          <a:prstGeom prst="line">
+            <a:avLst/>
+          </a:prstGeom>
+          <a:noFill/>
+          <a:ln w="19050">
+            <a:solidFill>
+              <a:srgbClr val="2C3440"/>
+            </a:solidFill>
+            <a:prstDash val="solid"/>
+            <a:tailEnd type="triangle"/>
+          </a:ln>
+        </p:spPr>
+      </p:sp>
+      <p:sp>
+        <p:nvSpPr>
+          <p:cNvPr id="16" name="Shape 14"/>
+          <p:cNvSpPr/>
+          <p:nvPr/>
+        </p:nvSpPr>
+        <p:spPr>
+          <a:xfrm>
+            <a:off x="548640" y="3995928"/>
+            <a:ext cx="3413760" cy="493776"/>
+          </a:xfrm>
+          <a:prstGeom prst="roundRect">
+            <a:avLst>
+              <a:gd name="adj" fmla="val 9259"/>
+            </a:avLst>
+          </a:prstGeom>
+          <a:solidFill>
+            <a:srgbClr val="0E1116"/>
+          </a:solidFill>
+          <a:ln w="12700">
+            <a:solidFill>
+              <a:srgbClr val="2C3440"/>
+            </a:solidFill>
+            <a:prstDash val="solid"/>
+          </a:ln>
+        </p:spPr>
+      </p:sp>
+      <p:sp>
+        <p:nvSpPr>
+          <p:cNvPr id="17" name="Text 15"/>
+          <p:cNvSpPr/>
+          <p:nvPr/>
+        </p:nvSpPr>
+        <p:spPr>
+          <a:xfrm>
+            <a:off x="713232" y="4050792"/>
+            <a:ext cx="3084576" cy="256032"/>
+          </a:xfrm>
+          <a:prstGeom prst="rect">
+            <a:avLst/>
+          </a:prstGeom>
+          <a:noFill/>
+          <a:ln/>
+        </p:spPr>
+        <p:txBody>
+          <a:bodyPr wrap="square" lIns="0" tIns="0" rIns="0" bIns="0" rtlCol="0" anchor="ctr"/>
+          <a:lstStyle/>
+          <a:p>
+            <a:pPr indent="0" marL="0">
+              <a:buNone/>
+            </a:pPr>
+            <a:r>
+              <a:rPr lang="en-US" sz="1200" b="1" dirty="0">
+                <a:solidFill>
+                  <a:srgbClr val="E8EDF2"/>
                 </a:solidFill>
                 <a:latin typeface="Courier New" pitchFamily="34" charset="0"/>
                 <a:ea typeface="Courier New" pitchFamily="34" charset="-122"/>
                 <a:cs typeface="Courier New" pitchFamily="34" charset="-120"/>
               </a:rPr>
-              <a:t>// thread_func  cuda_memtest.cpp:122</a:t>
-            </a:r>
-            <a:endParaRPr lang="en-US" sz="1350" dirty="0"/>
-          </a:p>
-          <a:p>
-            <a:pPr algn="l" indent="0" marL="0">
-              <a:lnSpc>
-                <a:spcPct val="108000"/>
-              </a:lnSpc>
-              <a:buNone/>
-            </a:pPr>
-            <a:r>
-              <a:rPr lang="en-US" sz="1350" dirty="0">
-                <a:solidFill>
-                  <a:srgbClr val="4FB0C6"/>
+              <a:t>allocate_small_mem</a:t>
+            </a:r>
+            <a:endParaRPr lang="en-US" sz="1200" dirty="0"/>
+          </a:p>
+        </p:txBody>
+      </p:sp>
+      <p:sp>
+        <p:nvSpPr>
+          <p:cNvPr id="18" name="Text 16"/>
+          <p:cNvSpPr/>
+          <p:nvPr/>
+        </p:nvSpPr>
+        <p:spPr>
+          <a:xfrm>
+            <a:off x="713232" y="4279392"/>
+            <a:ext cx="3084576" cy="192024"/>
+          </a:xfrm>
+          <a:prstGeom prst="rect">
+            <a:avLst/>
+          </a:prstGeom>
+          <a:noFill/>
+          <a:ln/>
+        </p:spPr>
+        <p:txBody>
+          <a:bodyPr wrap="square" lIns="0" tIns="0" rIns="0" bIns="0" rtlCol="0" anchor="ctr"/>
+          <a:lstStyle/>
+          <a:p>
+            <a:pPr indent="0" marL="0">
+              <a:buNone/>
+            </a:pPr>
+            <a:r>
+              <a:rPr lang="en-US" sz="1050" dirty="0">
+                <a:solidFill>
+                  <a:srgbClr val="9AA6B2"/>
+                </a:solidFill>
+                <a:latin typeface="Malgun Gothic" pitchFamily="34" charset="0"/>
+                <a:ea typeface="Malgun Gothic" pitchFamily="34" charset="-122"/>
+                <a:cs typeface="Malgun Gothic" pitchFamily="34" charset="-120"/>
+              </a:rPr>
+              <a:t>오류 버퍼 할당 (이 GPU)</a:t>
+            </a:r>
+            <a:endParaRPr lang="en-US" sz="1050" dirty="0"/>
+          </a:p>
+        </p:txBody>
+      </p:sp>
+      <p:sp>
+        <p:nvSpPr>
+          <p:cNvPr id="19" name="Shape 17"/>
+          <p:cNvSpPr/>
+          <p:nvPr/>
+        </p:nvSpPr>
+        <p:spPr>
+          <a:xfrm>
+            <a:off x="2255520" y="4492447"/>
+            <a:ext cx="0" cy="91440"/>
+          </a:xfrm>
+          <a:prstGeom prst="line">
+            <a:avLst/>
+          </a:prstGeom>
+          <a:noFill/>
+          <a:ln w="19050">
+            <a:solidFill>
+              <a:srgbClr val="2C3440"/>
+            </a:solidFill>
+            <a:prstDash val="solid"/>
+            <a:tailEnd type="triangle"/>
+          </a:ln>
+        </p:spPr>
+      </p:sp>
+      <p:sp>
+        <p:nvSpPr>
+          <p:cNvPr id="20" name="Shape 18"/>
+          <p:cNvSpPr/>
+          <p:nvPr/>
+        </p:nvSpPr>
+        <p:spPr>
+          <a:xfrm>
+            <a:off x="548640" y="4590288"/>
+            <a:ext cx="3413760" cy="493776"/>
+          </a:xfrm>
+          <a:prstGeom prst="roundRect">
+            <a:avLst>
+              <a:gd name="adj" fmla="val 9259"/>
+            </a:avLst>
+          </a:prstGeom>
+          <a:solidFill>
+            <a:srgbClr val="0E1116"/>
+          </a:solidFill>
+          <a:ln w="12700">
+            <a:solidFill>
+              <a:srgbClr val="2C3440"/>
+            </a:solidFill>
+            <a:prstDash val="solid"/>
+          </a:ln>
+        </p:spPr>
+      </p:sp>
+      <p:sp>
+        <p:nvSpPr>
+          <p:cNvPr id="21" name="Text 19"/>
+          <p:cNvSpPr/>
+          <p:nvPr/>
+        </p:nvSpPr>
+        <p:spPr>
+          <a:xfrm>
+            <a:off x="713232" y="4645152"/>
+            <a:ext cx="3084576" cy="256032"/>
+          </a:xfrm>
+          <a:prstGeom prst="rect">
+            <a:avLst/>
+          </a:prstGeom>
+          <a:noFill/>
+          <a:ln/>
+        </p:spPr>
+        <p:txBody>
+          <a:bodyPr wrap="square" lIns="0" tIns="0" rIns="0" bIns="0" rtlCol="0" anchor="ctr"/>
+          <a:lstStyle/>
+          <a:p>
+            <a:pPr indent="0" marL="0">
+              <a:buNone/>
+            </a:pPr>
+            <a:r>
+              <a:rPr lang="en-US" sz="1200" b="1" dirty="0">
+                <a:solidFill>
+                  <a:srgbClr val="E8EDF2"/>
                 </a:solidFill>
                 <a:latin typeface="Courier New" pitchFamily="34" charset="0"/>
                 <a:ea typeface="Courier New" pitchFamily="34" charset="-122"/>
                 <a:cs typeface="Courier New" pitchFamily="34" charset="-120"/>
               </a:rPr>
-              <a:t>gpu_idx = device;              // 이 스레드의 GPU 번호</a:t>
-            </a:r>
-            <a:endParaRPr lang="en-US" sz="1350" dirty="0"/>
-          </a:p>
-          <a:p>
-            <a:pPr algn="l" indent="0" marL="0">
-              <a:lnSpc>
-                <a:spcPct val="108000"/>
-              </a:lnSpc>
-              <a:buNone/>
-            </a:pPr>
-            <a:r>
-              <a:rPr lang="en-US" sz="1350" dirty="0">
-                <a:solidFill>
-                  <a:srgbClr val="E8EDF2"/>
+              <a:t>run_tests</a:t>
+            </a:r>
+            <a:endParaRPr lang="en-US" sz="1200" dirty="0"/>
+          </a:p>
+        </p:txBody>
+      </p:sp>
+      <p:sp>
+        <p:nvSpPr>
+          <p:cNvPr id="22" name="Text 20"/>
+          <p:cNvSpPr/>
+          <p:nvPr/>
+        </p:nvSpPr>
+        <p:spPr>
+          <a:xfrm>
+            <a:off x="713232" y="4873752"/>
+            <a:ext cx="3084576" cy="192024"/>
+          </a:xfrm>
+          <a:prstGeom prst="rect">
+            <a:avLst/>
+          </a:prstGeom>
+          <a:noFill/>
+          <a:ln/>
+        </p:spPr>
+        <p:txBody>
+          <a:bodyPr wrap="square" lIns="0" tIns="0" rIns="0" bIns="0" rtlCol="0" anchor="ctr"/>
+          <a:lstStyle/>
+          <a:p>
+            <a:pPr indent="0" marL="0">
+              <a:buNone/>
+            </a:pPr>
+            <a:r>
+              <a:rPr lang="en-US" sz="1050" dirty="0">
+                <a:solidFill>
+                  <a:srgbClr val="9AA6B2"/>
+                </a:solidFill>
+                <a:latin typeface="Malgun Gothic" pitchFamily="34" charset="0"/>
+                <a:ea typeface="Malgun Gothic" pitchFamily="34" charset="-122"/>
+                <a:cs typeface="Malgun Gothic" pitchFamily="34" charset="-120"/>
+              </a:rPr>
+              <a:t>11개 테스트 실행</a:t>
+            </a:r>
+            <a:endParaRPr lang="en-US" sz="1050" dirty="0"/>
+          </a:p>
+        </p:txBody>
+      </p:sp>
+      <p:sp>
+        <p:nvSpPr>
+          <p:cNvPr id="23" name="Shape 21"/>
+          <p:cNvSpPr/>
+          <p:nvPr/>
+        </p:nvSpPr>
+        <p:spPr>
+          <a:xfrm>
+            <a:off x="2255520" y="5086807"/>
+            <a:ext cx="0" cy="91440"/>
+          </a:xfrm>
+          <a:prstGeom prst="line">
+            <a:avLst/>
+          </a:prstGeom>
+          <a:noFill/>
+          <a:ln w="19050">
+            <a:solidFill>
+              <a:srgbClr val="2C3440"/>
+            </a:solidFill>
+            <a:prstDash val="solid"/>
+            <a:tailEnd type="triangle"/>
+          </a:ln>
+        </p:spPr>
+      </p:sp>
+      <p:sp>
+        <p:nvSpPr>
+          <p:cNvPr id="24" name="Shape 22"/>
+          <p:cNvSpPr/>
+          <p:nvPr/>
+        </p:nvSpPr>
+        <p:spPr>
+          <a:xfrm>
+            <a:off x="548640" y="5184648"/>
+            <a:ext cx="3413760" cy="493776"/>
+          </a:xfrm>
+          <a:prstGeom prst="roundRect">
+            <a:avLst>
+              <a:gd name="adj" fmla="val 9259"/>
+            </a:avLst>
+          </a:prstGeom>
+          <a:solidFill>
+            <a:srgbClr val="1A2418"/>
+          </a:solidFill>
+          <a:ln w="19050">
+            <a:solidFill>
+              <a:srgbClr val="8CC63F"/>
+            </a:solidFill>
+            <a:prstDash val="solid"/>
+          </a:ln>
+        </p:spPr>
+      </p:sp>
+      <p:sp>
+        <p:nvSpPr>
+          <p:cNvPr id="25" name="Text 23"/>
+          <p:cNvSpPr/>
+          <p:nvPr/>
+        </p:nvSpPr>
+        <p:spPr>
+          <a:xfrm>
+            <a:off x="713232" y="5239512"/>
+            <a:ext cx="3084576" cy="256032"/>
+          </a:xfrm>
+          <a:prstGeom prst="rect">
+            <a:avLst/>
+          </a:prstGeom>
+          <a:noFill/>
+          <a:ln/>
+        </p:spPr>
+        <p:txBody>
+          <a:bodyPr wrap="square" lIns="0" tIns="0" rIns="0" bIns="0" rtlCol="0" anchor="ctr"/>
+          <a:lstStyle/>
+          <a:p>
+            <a:pPr indent="0" marL="0">
+              <a:buNone/>
+            </a:pPr>
+            <a:r>
+              <a:rPr lang="en-US" sz="1200" b="1" dirty="0">
+                <a:solidFill>
+                  <a:srgbClr val="8CC63F"/>
                 </a:solidFill>
                 <a:latin typeface="Courier New" pitchFamily="34" charset="0"/>
                 <a:ea typeface="Courier New" pitchFamily="34" charset="-122"/>
                 <a:cs typeface="Courier New" pitchFamily="34" charset="-120"/>
               </a:rPr>
-              <a:t>cudaSetDevice(device);         // 이 스레드는 이 GPU 담당</a:t>
-            </a:r>
-            <a:endParaRPr lang="en-US" sz="1350" dirty="0"/>
-          </a:p>
-        </p:txBody>
-      </p:sp>
-      <p:sp>
-        <p:nvSpPr>
-          <p:cNvPr id="6" name="Text 4"/>
-          <p:cNvSpPr/>
-          <p:nvPr/>
-        </p:nvSpPr>
-        <p:spPr>
-          <a:xfrm>
-            <a:off x="548640" y="4114800"/>
-            <a:ext cx="11064240" cy="640080"/>
-          </a:xfrm>
-          <a:prstGeom prst="rect">
-            <a:avLst/>
-          </a:prstGeom>
-          <a:noFill/>
-          <a:ln/>
-        </p:spPr>
-        <p:txBody>
-          <a:bodyPr wrap="square" lIns="0" tIns="0" rIns="0" bIns="0" rtlCol="0" anchor="t"/>
-          <a:lstStyle/>
-          <a:p>
-            <a:pPr indent="0" marL="0">
-              <a:buNone/>
-            </a:pPr>
-            <a:r>
-              <a:rPr lang="en-US" sz="1700" b="1" dirty="0">
-                <a:solidFill>
-                  <a:srgbClr val="8CC63F"/>
+              <a:t>GPU 0 · VRAM</a:t>
+            </a:r>
+            <a:endParaRPr lang="en-US" sz="1200" dirty="0"/>
+          </a:p>
+        </p:txBody>
+      </p:sp>
+      <p:sp>
+        <p:nvSpPr>
+          <p:cNvPr id="26" name="Text 24"/>
+          <p:cNvSpPr/>
+          <p:nvPr/>
+        </p:nvSpPr>
+        <p:spPr>
+          <a:xfrm>
+            <a:off x="713232" y="5468112"/>
+            <a:ext cx="3084576" cy="192024"/>
+          </a:xfrm>
+          <a:prstGeom prst="rect">
+            <a:avLst/>
+          </a:prstGeom>
+          <a:noFill/>
+          <a:ln/>
+        </p:spPr>
+        <p:txBody>
+          <a:bodyPr wrap="square" lIns="0" tIns="0" rIns="0" bIns="0" rtlCol="0" anchor="ctr"/>
+          <a:lstStyle/>
+          <a:p>
+            <a:pPr indent="0" marL="0">
+              <a:buNone/>
+            </a:pPr>
+            <a:r>
+              <a:rPr lang="en-US" sz="1050" dirty="0">
+                <a:solidFill>
+                  <a:srgbClr val="9AA6B2"/>
                 </a:solidFill>
                 <a:latin typeface="Malgun Gothic" pitchFamily="34" charset="0"/>
                 <a:ea typeface="Malgun Gothic" pitchFamily="34" charset="-122"/>
                 <a:cs typeface="Malgun Gothic" pitchFamily="34" charset="-120"/>
               </a:rPr>
-              <a:t>__thread</a:t>
-            </a:r>
-            <a:pPr indent="0" marL="0">
-              <a:buNone/>
-            </a:pPr>
-            <a:r>
-              <a:rPr lang="en-US" sz="1700" dirty="0">
+              <a:t>독립 메모리 (검사 대상)</a:t>
+            </a:r>
+            <a:endParaRPr lang="en-US" sz="1050" dirty="0"/>
+          </a:p>
+        </p:txBody>
+      </p:sp>
+      <p:sp>
+        <p:nvSpPr>
+          <p:cNvPr id="27" name="Shape 25"/>
+          <p:cNvSpPr/>
+          <p:nvPr/>
+        </p:nvSpPr>
+        <p:spPr>
+          <a:xfrm>
+            <a:off x="6080760" y="2459736"/>
+            <a:ext cx="0" cy="256032"/>
+          </a:xfrm>
+          <a:prstGeom prst="line">
+            <a:avLst/>
+          </a:prstGeom>
+          <a:noFill/>
+          <a:ln w="31750">
+            <a:solidFill>
+              <a:srgbClr val="4FB0C6"/>
+            </a:solidFill>
+            <a:prstDash val="solid"/>
+            <a:tailEnd type="triangle"/>
+          </a:ln>
+        </p:spPr>
+      </p:sp>
+      <p:sp>
+        <p:nvSpPr>
+          <p:cNvPr id="28" name="Shape 26"/>
+          <p:cNvSpPr/>
+          <p:nvPr/>
+        </p:nvSpPr>
+        <p:spPr>
+          <a:xfrm>
+            <a:off x="4373880" y="2807208"/>
+            <a:ext cx="3413760" cy="493776"/>
+          </a:xfrm>
+          <a:prstGeom prst="roundRect">
+            <a:avLst>
+              <a:gd name="adj" fmla="val 9259"/>
+            </a:avLst>
+          </a:prstGeom>
+          <a:solidFill>
+            <a:srgbClr val="0E1116"/>
+          </a:solidFill>
+          <a:ln w="12700">
+            <a:solidFill>
+              <a:srgbClr val="2C3440"/>
+            </a:solidFill>
+            <a:prstDash val="solid"/>
+          </a:ln>
+        </p:spPr>
+      </p:sp>
+      <p:sp>
+        <p:nvSpPr>
+          <p:cNvPr id="29" name="Text 27"/>
+          <p:cNvSpPr/>
+          <p:nvPr/>
+        </p:nvSpPr>
+        <p:spPr>
+          <a:xfrm>
+            <a:off x="4538472" y="2862072"/>
+            <a:ext cx="3084576" cy="256032"/>
+          </a:xfrm>
+          <a:prstGeom prst="rect">
+            <a:avLst/>
+          </a:prstGeom>
+          <a:noFill/>
+          <a:ln/>
+        </p:spPr>
+        <p:txBody>
+          <a:bodyPr wrap="square" lIns="0" tIns="0" rIns="0" bIns="0" rtlCol="0" anchor="ctr"/>
+          <a:lstStyle/>
+          <a:p>
+            <a:pPr indent="0" marL="0">
+              <a:buNone/>
+            </a:pPr>
+            <a:r>
+              <a:rPr lang="en-US" sz="1200" b="1" dirty="0">
                 <a:solidFill>
                   <a:srgbClr val="E8EDF2"/>
+                </a:solidFill>
+                <a:latin typeface="Courier New" pitchFamily="34" charset="0"/>
+                <a:ea typeface="Courier New" pitchFamily="34" charset="-122"/>
+                <a:cs typeface="Courier New" pitchFamily="34" charset="-120"/>
+              </a:rPr>
+              <a:t>스레드 1 (pthread)</a:t>
+            </a:r>
+            <a:endParaRPr lang="en-US" sz="1200" dirty="0"/>
+          </a:p>
+        </p:txBody>
+      </p:sp>
+      <p:sp>
+        <p:nvSpPr>
+          <p:cNvPr id="30" name="Text 28"/>
+          <p:cNvSpPr/>
+          <p:nvPr/>
+        </p:nvSpPr>
+        <p:spPr>
+          <a:xfrm>
+            <a:off x="4538472" y="3090672"/>
+            <a:ext cx="3084576" cy="192024"/>
+          </a:xfrm>
+          <a:prstGeom prst="rect">
+            <a:avLst/>
+          </a:prstGeom>
+          <a:noFill/>
+          <a:ln/>
+        </p:spPr>
+        <p:txBody>
+          <a:bodyPr wrap="square" lIns="0" tIns="0" rIns="0" bIns="0" rtlCol="0" anchor="ctr"/>
+          <a:lstStyle/>
+          <a:p>
+            <a:pPr indent="0" marL="0">
+              <a:buNone/>
+            </a:pPr>
+            <a:r>
+              <a:rPr lang="en-US" sz="1050" dirty="0">
+                <a:solidFill>
+                  <a:srgbClr val="9AA6B2"/>
                 </a:solidFill>
                 <a:latin typeface="Malgun Gothic" pitchFamily="34" charset="0"/>
                 <a:ea typeface="Malgun Gothic" pitchFamily="34" charset="-122"/>
                 <a:cs typeface="Malgun Gothic" pitchFamily="34" charset="-120"/>
               </a:rPr>
-              <a:t> (스레드 지역 저장소, TLS)를 붙이면 같은 이름의 변수라도 </a:t>
-            </a:r>
-            <a:pPr indent="0" marL="0">
-              <a:buNone/>
-            </a:pPr>
-            <a:r>
-              <a:rPr lang="en-US" sz="1700" b="1" dirty="0">
-                <a:solidFill>
-                  <a:srgbClr val="4FB0C6"/>
+              <a:t>pthread_create로 생성</a:t>
+            </a:r>
+            <a:endParaRPr lang="en-US" sz="1050" dirty="0"/>
+          </a:p>
+        </p:txBody>
+      </p:sp>
+      <p:sp>
+        <p:nvSpPr>
+          <p:cNvPr id="31" name="Shape 29"/>
+          <p:cNvSpPr/>
+          <p:nvPr/>
+        </p:nvSpPr>
+        <p:spPr>
+          <a:xfrm>
+            <a:off x="6080760" y="3303727"/>
+            <a:ext cx="0" cy="91440"/>
+          </a:xfrm>
+          <a:prstGeom prst="line">
+            <a:avLst/>
+          </a:prstGeom>
+          <a:noFill/>
+          <a:ln w="19050">
+            <a:solidFill>
+              <a:srgbClr val="2C3440"/>
+            </a:solidFill>
+            <a:prstDash val="solid"/>
+            <a:tailEnd type="triangle"/>
+          </a:ln>
+        </p:spPr>
+      </p:sp>
+      <p:sp>
+        <p:nvSpPr>
+          <p:cNvPr id="32" name="Shape 30"/>
+          <p:cNvSpPr/>
+          <p:nvPr/>
+        </p:nvSpPr>
+        <p:spPr>
+          <a:xfrm>
+            <a:off x="4373880" y="3401568"/>
+            <a:ext cx="3413760" cy="493776"/>
+          </a:xfrm>
+          <a:prstGeom prst="roundRect">
+            <a:avLst>
+              <a:gd name="adj" fmla="val 9259"/>
+            </a:avLst>
+          </a:prstGeom>
+          <a:solidFill>
+            <a:srgbClr val="0E1116"/>
+          </a:solidFill>
+          <a:ln w="12700">
+            <a:solidFill>
+              <a:srgbClr val="2C3440"/>
+            </a:solidFill>
+            <a:prstDash val="solid"/>
+          </a:ln>
+        </p:spPr>
+      </p:sp>
+      <p:sp>
+        <p:nvSpPr>
+          <p:cNvPr id="33" name="Text 31"/>
+          <p:cNvSpPr/>
+          <p:nvPr/>
+        </p:nvSpPr>
+        <p:spPr>
+          <a:xfrm>
+            <a:off x="4538472" y="3456432"/>
+            <a:ext cx="3084576" cy="256032"/>
+          </a:xfrm>
+          <a:prstGeom prst="rect">
+            <a:avLst/>
+          </a:prstGeom>
+          <a:noFill/>
+          <a:ln/>
+        </p:spPr>
+        <p:txBody>
+          <a:bodyPr wrap="square" lIns="0" tIns="0" rIns="0" bIns="0" rtlCol="0" anchor="ctr"/>
+          <a:lstStyle/>
+          <a:p>
+            <a:pPr indent="0" marL="0">
+              <a:buNone/>
+            </a:pPr>
+            <a:r>
+              <a:rPr lang="en-US" sz="1200" b="1" dirty="0">
+                <a:solidFill>
+                  <a:srgbClr val="E8EDF2"/>
+                </a:solidFill>
+                <a:latin typeface="Courier New" pitchFamily="34" charset="0"/>
+                <a:ea typeface="Courier New" pitchFamily="34" charset="-122"/>
+                <a:cs typeface="Courier New" pitchFamily="34" charset="-120"/>
+              </a:rPr>
+              <a:t>cudaSetDevice(i)</a:t>
+            </a:r>
+            <a:endParaRPr lang="en-US" sz="1200" dirty="0"/>
+          </a:p>
+        </p:txBody>
+      </p:sp>
+      <p:sp>
+        <p:nvSpPr>
+          <p:cNvPr id="34" name="Text 32"/>
+          <p:cNvSpPr/>
+          <p:nvPr/>
+        </p:nvSpPr>
+        <p:spPr>
+          <a:xfrm>
+            <a:off x="4538472" y="3685032"/>
+            <a:ext cx="3084576" cy="192024"/>
+          </a:xfrm>
+          <a:prstGeom prst="rect">
+            <a:avLst/>
+          </a:prstGeom>
+          <a:noFill/>
+          <a:ln/>
+        </p:spPr>
+        <p:txBody>
+          <a:bodyPr wrap="square" lIns="0" tIns="0" rIns="0" bIns="0" rtlCol="0" anchor="ctr"/>
+          <a:lstStyle/>
+          <a:p>
+            <a:pPr indent="0" marL="0">
+              <a:buNone/>
+            </a:pPr>
+            <a:r>
+              <a:rPr lang="en-US" sz="1050" dirty="0">
+                <a:solidFill>
+                  <a:srgbClr val="9AA6B2"/>
                 </a:solidFill>
                 <a:latin typeface="Malgun Gothic" pitchFamily="34" charset="0"/>
                 <a:ea typeface="Malgun Gothic" pitchFamily="34" charset="-122"/>
                 <a:cs typeface="Malgun Gothic" pitchFamily="34" charset="-120"/>
               </a:rPr>
-              <a:t>스레드마다 별도 값</a:t>
-            </a:r>
-            <a:pPr indent="0" marL="0">
-              <a:buNone/>
-            </a:pPr>
-            <a:r>
-              <a:rPr lang="en-US" sz="1700" dirty="0">
+              <a:t>gpu_idx = i (thread-local)</a:t>
+            </a:r>
+            <a:endParaRPr lang="en-US" sz="1050" dirty="0"/>
+          </a:p>
+        </p:txBody>
+      </p:sp>
+      <p:sp>
+        <p:nvSpPr>
+          <p:cNvPr id="35" name="Shape 33"/>
+          <p:cNvSpPr/>
+          <p:nvPr/>
+        </p:nvSpPr>
+        <p:spPr>
+          <a:xfrm>
+            <a:off x="6080760" y="3898087"/>
+            <a:ext cx="0" cy="91440"/>
+          </a:xfrm>
+          <a:prstGeom prst="line">
+            <a:avLst/>
+          </a:prstGeom>
+          <a:noFill/>
+          <a:ln w="19050">
+            <a:solidFill>
+              <a:srgbClr val="2C3440"/>
+            </a:solidFill>
+            <a:prstDash val="solid"/>
+            <a:tailEnd type="triangle"/>
+          </a:ln>
+        </p:spPr>
+      </p:sp>
+      <p:sp>
+        <p:nvSpPr>
+          <p:cNvPr id="36" name="Shape 34"/>
+          <p:cNvSpPr/>
+          <p:nvPr/>
+        </p:nvSpPr>
+        <p:spPr>
+          <a:xfrm>
+            <a:off x="4373880" y="3995928"/>
+            <a:ext cx="3413760" cy="493776"/>
+          </a:xfrm>
+          <a:prstGeom prst="roundRect">
+            <a:avLst>
+              <a:gd name="adj" fmla="val 9259"/>
+            </a:avLst>
+          </a:prstGeom>
+          <a:solidFill>
+            <a:srgbClr val="0E1116"/>
+          </a:solidFill>
+          <a:ln w="12700">
+            <a:solidFill>
+              <a:srgbClr val="2C3440"/>
+            </a:solidFill>
+            <a:prstDash val="solid"/>
+          </a:ln>
+        </p:spPr>
+      </p:sp>
+      <p:sp>
+        <p:nvSpPr>
+          <p:cNvPr id="37" name="Text 35"/>
+          <p:cNvSpPr/>
+          <p:nvPr/>
+        </p:nvSpPr>
+        <p:spPr>
+          <a:xfrm>
+            <a:off x="4538472" y="4050792"/>
+            <a:ext cx="3084576" cy="256032"/>
+          </a:xfrm>
+          <a:prstGeom prst="rect">
+            <a:avLst/>
+          </a:prstGeom>
+          <a:noFill/>
+          <a:ln/>
+        </p:spPr>
+        <p:txBody>
+          <a:bodyPr wrap="square" lIns="0" tIns="0" rIns="0" bIns="0" rtlCol="0" anchor="ctr"/>
+          <a:lstStyle/>
+          <a:p>
+            <a:pPr indent="0" marL="0">
+              <a:buNone/>
+            </a:pPr>
+            <a:r>
+              <a:rPr lang="en-US" sz="1200" b="1" dirty="0">
                 <a:solidFill>
                   <a:srgbClr val="E8EDF2"/>
+                </a:solidFill>
+                <a:latin typeface="Courier New" pitchFamily="34" charset="0"/>
+                <a:ea typeface="Courier New" pitchFamily="34" charset="-122"/>
+                <a:cs typeface="Courier New" pitchFamily="34" charset="-120"/>
+              </a:rPr>
+              <a:t>allocate_small_mem</a:t>
+            </a:r>
+            <a:endParaRPr lang="en-US" sz="1200" dirty="0"/>
+          </a:p>
+        </p:txBody>
+      </p:sp>
+      <p:sp>
+        <p:nvSpPr>
+          <p:cNvPr id="38" name="Text 36"/>
+          <p:cNvSpPr/>
+          <p:nvPr/>
+        </p:nvSpPr>
+        <p:spPr>
+          <a:xfrm>
+            <a:off x="4538472" y="4279392"/>
+            <a:ext cx="3084576" cy="192024"/>
+          </a:xfrm>
+          <a:prstGeom prst="rect">
+            <a:avLst/>
+          </a:prstGeom>
+          <a:noFill/>
+          <a:ln/>
+        </p:spPr>
+        <p:txBody>
+          <a:bodyPr wrap="square" lIns="0" tIns="0" rIns="0" bIns="0" rtlCol="0" anchor="ctr"/>
+          <a:lstStyle/>
+          <a:p>
+            <a:pPr indent="0" marL="0">
+              <a:buNone/>
+            </a:pPr>
+            <a:r>
+              <a:rPr lang="en-US" sz="1050" dirty="0">
+                <a:solidFill>
+                  <a:srgbClr val="9AA6B2"/>
                 </a:solidFill>
                 <a:latin typeface="Malgun Gothic" pitchFamily="34" charset="0"/>
                 <a:ea typeface="Malgun Gothic" pitchFamily="34" charset="-122"/>
                 <a:cs typeface="Malgun Gothic" pitchFamily="34" charset="-120"/>
               </a:rPr>
-              <a:t>을 가집니다.</a:t>
-            </a:r>
-            <a:endParaRPr lang="en-US" sz="1700" dirty="0"/>
-          </a:p>
-        </p:txBody>
-      </p:sp>
-      <p:sp>
-        <p:nvSpPr>
-          <p:cNvPr id="7" name="Shape 5"/>
-          <p:cNvSpPr/>
-          <p:nvPr/>
-        </p:nvSpPr>
-        <p:spPr>
-          <a:xfrm>
-            <a:off x="548640" y="4846320"/>
-            <a:ext cx="11064240" cy="1005840"/>
+              <a:t>오류 버퍼 할당 (이 GPU)</a:t>
+            </a:r>
+            <a:endParaRPr lang="en-US" sz="1050" dirty="0"/>
+          </a:p>
+        </p:txBody>
+      </p:sp>
+      <p:sp>
+        <p:nvSpPr>
+          <p:cNvPr id="39" name="Shape 37"/>
+          <p:cNvSpPr/>
+          <p:nvPr/>
+        </p:nvSpPr>
+        <p:spPr>
+          <a:xfrm>
+            <a:off x="6080760" y="4492447"/>
+            <a:ext cx="0" cy="91440"/>
+          </a:xfrm>
+          <a:prstGeom prst="line">
+            <a:avLst/>
+          </a:prstGeom>
+          <a:noFill/>
+          <a:ln w="19050">
+            <a:solidFill>
+              <a:srgbClr val="2C3440"/>
+            </a:solidFill>
+            <a:prstDash val="solid"/>
+            <a:tailEnd type="triangle"/>
+          </a:ln>
+        </p:spPr>
+      </p:sp>
+      <p:sp>
+        <p:nvSpPr>
+          <p:cNvPr id="40" name="Shape 38"/>
+          <p:cNvSpPr/>
+          <p:nvPr/>
+        </p:nvSpPr>
+        <p:spPr>
+          <a:xfrm>
+            <a:off x="4373880" y="4590288"/>
+            <a:ext cx="3413760" cy="493776"/>
           </a:xfrm>
           <a:prstGeom prst="roundRect">
             <a:avLst>
-              <a:gd name="adj" fmla="val 7273"/>
+              <a:gd name="adj" fmla="val 9259"/>
             </a:avLst>
           </a:prstGeom>
           <a:solidFill>
-            <a:srgbClr val="1E232C"/>
+            <a:srgbClr val="0E1116"/>
           </a:solidFill>
-          <a:ln/>
-        </p:spPr>
-      </p:sp>
-      <p:sp>
-        <p:nvSpPr>
-          <p:cNvPr id="8" name="Text 6"/>
-          <p:cNvSpPr/>
-          <p:nvPr/>
-        </p:nvSpPr>
-        <p:spPr>
-          <a:xfrm>
-            <a:off x="822960" y="5029200"/>
-            <a:ext cx="10515600" cy="685800"/>
-          </a:xfrm>
-          <a:prstGeom prst="rect">
-            <a:avLst/>
-          </a:prstGeom>
-          <a:noFill/>
-          <a:ln/>
-        </p:spPr>
-        <p:txBody>
-          <a:bodyPr wrap="square" lIns="0" tIns="0" rIns="0" bIns="0" rtlCol="0" anchor="ctr"/>
-          <a:lstStyle/>
-          <a:p>
-            <a:pPr indent="0" marL="0">
-              <a:buNone/>
-            </a:pPr>
-            <a:r>
-              <a:rPr lang="en-US" sz="1500" b="1" dirty="0">
-                <a:solidFill>
-                  <a:srgbClr val="E0A458"/>
+          <a:ln w="12700">
+            <a:solidFill>
+              <a:srgbClr val="2C3440"/>
+            </a:solidFill>
+            <a:prstDash val="solid"/>
+          </a:ln>
+        </p:spPr>
+      </p:sp>
+      <p:sp>
+        <p:nvSpPr>
+          <p:cNvPr id="41" name="Text 39"/>
+          <p:cNvSpPr/>
+          <p:nvPr/>
+        </p:nvSpPr>
+        <p:spPr>
+          <a:xfrm>
+            <a:off x="4538472" y="4645152"/>
+            <a:ext cx="3084576" cy="256032"/>
+          </a:xfrm>
+          <a:prstGeom prst="rect">
+            <a:avLst/>
+          </a:prstGeom>
+          <a:noFill/>
+          <a:ln/>
+        </p:spPr>
+        <p:txBody>
+          <a:bodyPr wrap="square" lIns="0" tIns="0" rIns="0" bIns="0" rtlCol="0" anchor="ctr"/>
+          <a:lstStyle/>
+          <a:p>
+            <a:pPr indent="0" marL="0">
+              <a:buNone/>
+            </a:pPr>
+            <a:r>
+              <a:rPr lang="en-US" sz="1200" b="1" dirty="0">
+                <a:solidFill>
+                  <a:srgbClr val="E8EDF2"/>
+                </a:solidFill>
+                <a:latin typeface="Courier New" pitchFamily="34" charset="0"/>
+                <a:ea typeface="Courier New" pitchFamily="34" charset="-122"/>
+                <a:cs typeface="Courier New" pitchFamily="34" charset="-120"/>
+              </a:rPr>
+              <a:t>run_tests</a:t>
+            </a:r>
+            <a:endParaRPr lang="en-US" sz="1200" dirty="0"/>
+          </a:p>
+        </p:txBody>
+      </p:sp>
+      <p:sp>
+        <p:nvSpPr>
+          <p:cNvPr id="42" name="Text 40"/>
+          <p:cNvSpPr/>
+          <p:nvPr/>
+        </p:nvSpPr>
+        <p:spPr>
+          <a:xfrm>
+            <a:off x="4538472" y="4873752"/>
+            <a:ext cx="3084576" cy="192024"/>
+          </a:xfrm>
+          <a:prstGeom prst="rect">
+            <a:avLst/>
+          </a:prstGeom>
+          <a:noFill/>
+          <a:ln/>
+        </p:spPr>
+        <p:txBody>
+          <a:bodyPr wrap="square" lIns="0" tIns="0" rIns="0" bIns="0" rtlCol="0" anchor="ctr"/>
+          <a:lstStyle/>
+          <a:p>
+            <a:pPr indent="0" marL="0">
+              <a:buNone/>
+            </a:pPr>
+            <a:r>
+              <a:rPr lang="en-US" sz="1050" dirty="0">
+                <a:solidFill>
+                  <a:srgbClr val="9AA6B2"/>
                 </a:solidFill>
                 <a:latin typeface="Malgun Gothic" pitchFamily="34" charset="0"/>
                 <a:ea typeface="Malgun Gothic" pitchFamily="34" charset="-122"/>
                 <a:cs typeface="Malgun Gothic" pitchFamily="34" charset="-120"/>
               </a:rPr>
-              <a:t>만약 일반 전역 변수였다면? </a:t>
-            </a:r>
-            <a:pPr indent="0" marL="0">
-              <a:buNone/>
-            </a:pPr>
-            <a:r>
-              <a:rPr lang="en-US" sz="1500" dirty="0">
-                <a:solidFill>
-                  <a:srgbClr val="E8EDF2"/>
+              <a:t>11개 테스트 실행</a:t>
+            </a:r>
+            <a:endParaRPr lang="en-US" sz="1050" dirty="0"/>
+          </a:p>
+        </p:txBody>
+      </p:sp>
+      <p:sp>
+        <p:nvSpPr>
+          <p:cNvPr id="43" name="Shape 41"/>
+          <p:cNvSpPr/>
+          <p:nvPr/>
+        </p:nvSpPr>
+        <p:spPr>
+          <a:xfrm>
+            <a:off x="6080760" y="5086807"/>
+            <a:ext cx="0" cy="91440"/>
+          </a:xfrm>
+          <a:prstGeom prst="line">
+            <a:avLst/>
+          </a:prstGeom>
+          <a:noFill/>
+          <a:ln w="19050">
+            <a:solidFill>
+              <a:srgbClr val="2C3440"/>
+            </a:solidFill>
+            <a:prstDash val="solid"/>
+            <a:tailEnd type="triangle"/>
+          </a:ln>
+        </p:spPr>
+      </p:sp>
+      <p:sp>
+        <p:nvSpPr>
+          <p:cNvPr id="44" name="Shape 42"/>
+          <p:cNvSpPr/>
+          <p:nvPr/>
+        </p:nvSpPr>
+        <p:spPr>
+          <a:xfrm>
+            <a:off x="4373880" y="5184648"/>
+            <a:ext cx="3413760" cy="493776"/>
+          </a:xfrm>
+          <a:prstGeom prst="roundRect">
+            <a:avLst>
+              <a:gd name="adj" fmla="val 9259"/>
+            </a:avLst>
+          </a:prstGeom>
+          <a:solidFill>
+            <a:srgbClr val="1A2418"/>
+          </a:solidFill>
+          <a:ln w="19050">
+            <a:solidFill>
+              <a:srgbClr val="4FB0C6"/>
+            </a:solidFill>
+            <a:prstDash val="solid"/>
+          </a:ln>
+        </p:spPr>
+      </p:sp>
+      <p:sp>
+        <p:nvSpPr>
+          <p:cNvPr id="45" name="Text 43"/>
+          <p:cNvSpPr/>
+          <p:nvPr/>
+        </p:nvSpPr>
+        <p:spPr>
+          <a:xfrm>
+            <a:off x="4538472" y="5239512"/>
+            <a:ext cx="3084576" cy="256032"/>
+          </a:xfrm>
+          <a:prstGeom prst="rect">
+            <a:avLst/>
+          </a:prstGeom>
+          <a:noFill/>
+          <a:ln/>
+        </p:spPr>
+        <p:txBody>
+          <a:bodyPr wrap="square" lIns="0" tIns="0" rIns="0" bIns="0" rtlCol="0" anchor="ctr"/>
+          <a:lstStyle/>
+          <a:p>
+            <a:pPr indent="0" marL="0">
+              <a:buNone/>
+            </a:pPr>
+            <a:r>
+              <a:rPr lang="en-US" sz="1200" b="1" dirty="0">
+                <a:solidFill>
+                  <a:srgbClr val="4FB0C6"/>
+                </a:solidFill>
+                <a:latin typeface="Courier New" pitchFamily="34" charset="0"/>
+                <a:ea typeface="Courier New" pitchFamily="34" charset="-122"/>
+                <a:cs typeface="Courier New" pitchFamily="34" charset="-120"/>
+              </a:rPr>
+              <a:t>GPU 1 · VRAM</a:t>
+            </a:r>
+            <a:endParaRPr lang="en-US" sz="1200" dirty="0"/>
+          </a:p>
+        </p:txBody>
+      </p:sp>
+      <p:sp>
+        <p:nvSpPr>
+          <p:cNvPr id="46" name="Text 44"/>
+          <p:cNvSpPr/>
+          <p:nvPr/>
+        </p:nvSpPr>
+        <p:spPr>
+          <a:xfrm>
+            <a:off x="4538472" y="5468112"/>
+            <a:ext cx="3084576" cy="192024"/>
+          </a:xfrm>
+          <a:prstGeom prst="rect">
+            <a:avLst/>
+          </a:prstGeom>
+          <a:noFill/>
+          <a:ln/>
+        </p:spPr>
+        <p:txBody>
+          <a:bodyPr wrap="square" lIns="0" tIns="0" rIns="0" bIns="0" rtlCol="0" anchor="ctr"/>
+          <a:lstStyle/>
+          <a:p>
+            <a:pPr indent="0" marL="0">
+              <a:buNone/>
+            </a:pPr>
+            <a:r>
+              <a:rPr lang="en-US" sz="1050" dirty="0">
+                <a:solidFill>
+                  <a:srgbClr val="9AA6B2"/>
                 </a:solidFill>
                 <a:latin typeface="Malgun Gothic" pitchFamily="34" charset="0"/>
                 <a:ea typeface="Malgun Gothic" pitchFamily="34" charset="-122"/>
                 <a:cs typeface="Malgun Gothic" pitchFamily="34" charset="-120"/>
               </a:rPr>
-              <a:t>여러 스레드가 같은 gpu_idx를 덮어써 로그의 GPU 번호가 뒤죽박죽됩니다. TLS가 이를 막습니다.</a:t>
-            </a:r>
-            <a:endParaRPr lang="en-US" sz="1500" dirty="0"/>
+              <a:t>독립 메모리 (검사 대상)</a:t>
+            </a:r>
+            <a:endParaRPr lang="en-US" sz="1050" dirty="0"/>
+          </a:p>
+        </p:txBody>
+      </p:sp>
+      <p:sp>
+        <p:nvSpPr>
+          <p:cNvPr id="47" name="Shape 45"/>
+          <p:cNvSpPr/>
+          <p:nvPr/>
+        </p:nvSpPr>
+        <p:spPr>
+          <a:xfrm>
+            <a:off x="9906000" y="2459736"/>
+            <a:ext cx="0" cy="256032"/>
+          </a:xfrm>
+          <a:prstGeom prst="line">
+            <a:avLst/>
+          </a:prstGeom>
+          <a:noFill/>
+          <a:ln w="31750">
+            <a:solidFill>
+              <a:srgbClr val="E0A458"/>
+            </a:solidFill>
+            <a:prstDash val="solid"/>
+            <a:tailEnd type="triangle"/>
+          </a:ln>
+        </p:spPr>
+      </p:sp>
+      <p:sp>
+        <p:nvSpPr>
+          <p:cNvPr id="48" name="Shape 46"/>
+          <p:cNvSpPr/>
+          <p:nvPr/>
+        </p:nvSpPr>
+        <p:spPr>
+          <a:xfrm>
+            <a:off x="8199120" y="2807208"/>
+            <a:ext cx="3413760" cy="493776"/>
+          </a:xfrm>
+          <a:prstGeom prst="roundRect">
+            <a:avLst>
+              <a:gd name="adj" fmla="val 9259"/>
+            </a:avLst>
+          </a:prstGeom>
+          <a:solidFill>
+            <a:srgbClr val="0E1116"/>
+          </a:solidFill>
+          <a:ln w="12700">
+            <a:solidFill>
+              <a:srgbClr val="2C3440"/>
+            </a:solidFill>
+            <a:prstDash val="solid"/>
+          </a:ln>
+        </p:spPr>
+      </p:sp>
+      <p:sp>
+        <p:nvSpPr>
+          <p:cNvPr id="49" name="Text 47"/>
+          <p:cNvSpPr/>
+          <p:nvPr/>
+        </p:nvSpPr>
+        <p:spPr>
+          <a:xfrm>
+            <a:off x="8363712" y="2862072"/>
+            <a:ext cx="3084576" cy="256032"/>
+          </a:xfrm>
+          <a:prstGeom prst="rect">
+            <a:avLst/>
+          </a:prstGeom>
+          <a:noFill/>
+          <a:ln/>
+        </p:spPr>
+        <p:txBody>
+          <a:bodyPr wrap="square" lIns="0" tIns="0" rIns="0" bIns="0" rtlCol="0" anchor="ctr"/>
+          <a:lstStyle/>
+          <a:p>
+            <a:pPr indent="0" marL="0">
+              <a:buNone/>
+            </a:pPr>
+            <a:r>
+              <a:rPr lang="en-US" sz="1200" b="1" dirty="0">
+                <a:solidFill>
+                  <a:srgbClr val="E8EDF2"/>
+                </a:solidFill>
+                <a:latin typeface="Courier New" pitchFamily="34" charset="0"/>
+                <a:ea typeface="Courier New" pitchFamily="34" charset="-122"/>
+                <a:cs typeface="Courier New" pitchFamily="34" charset="-120"/>
+              </a:rPr>
+              <a:t>스레드 2 (pthread)</a:t>
+            </a:r>
+            <a:endParaRPr lang="en-US" sz="1200" dirty="0"/>
+          </a:p>
+        </p:txBody>
+      </p:sp>
+      <p:sp>
+        <p:nvSpPr>
+          <p:cNvPr id="50" name="Text 48"/>
+          <p:cNvSpPr/>
+          <p:nvPr/>
+        </p:nvSpPr>
+        <p:spPr>
+          <a:xfrm>
+            <a:off x="8363712" y="3090672"/>
+            <a:ext cx="3084576" cy="192024"/>
+          </a:xfrm>
+          <a:prstGeom prst="rect">
+            <a:avLst/>
+          </a:prstGeom>
+          <a:noFill/>
+          <a:ln/>
+        </p:spPr>
+        <p:txBody>
+          <a:bodyPr wrap="square" lIns="0" tIns="0" rIns="0" bIns="0" rtlCol="0" anchor="ctr"/>
+          <a:lstStyle/>
+          <a:p>
+            <a:pPr indent="0" marL="0">
+              <a:buNone/>
+            </a:pPr>
+            <a:r>
+              <a:rPr lang="en-US" sz="1050" dirty="0">
+                <a:solidFill>
+                  <a:srgbClr val="9AA6B2"/>
+                </a:solidFill>
+                <a:latin typeface="Malgun Gothic" pitchFamily="34" charset="0"/>
+                <a:ea typeface="Malgun Gothic" pitchFamily="34" charset="-122"/>
+                <a:cs typeface="Malgun Gothic" pitchFamily="34" charset="-120"/>
+              </a:rPr>
+              <a:t>pthread_create로 생성</a:t>
+            </a:r>
+            <a:endParaRPr lang="en-US" sz="1050" dirty="0"/>
+          </a:p>
+        </p:txBody>
+      </p:sp>
+      <p:sp>
+        <p:nvSpPr>
+          <p:cNvPr id="51" name="Shape 49"/>
+          <p:cNvSpPr/>
+          <p:nvPr/>
+        </p:nvSpPr>
+        <p:spPr>
+          <a:xfrm>
+            <a:off x="9906000" y="3303727"/>
+            <a:ext cx="0" cy="91440"/>
+          </a:xfrm>
+          <a:prstGeom prst="line">
+            <a:avLst/>
+          </a:prstGeom>
+          <a:noFill/>
+          <a:ln w="19050">
+            <a:solidFill>
+              <a:srgbClr val="2C3440"/>
+            </a:solidFill>
+            <a:prstDash val="solid"/>
+            <a:tailEnd type="triangle"/>
+          </a:ln>
+        </p:spPr>
+      </p:sp>
+      <p:sp>
+        <p:nvSpPr>
+          <p:cNvPr id="52" name="Shape 50"/>
+          <p:cNvSpPr/>
+          <p:nvPr/>
+        </p:nvSpPr>
+        <p:spPr>
+          <a:xfrm>
+            <a:off x="8199120" y="3401568"/>
+            <a:ext cx="3413760" cy="493776"/>
+          </a:xfrm>
+          <a:prstGeom prst="roundRect">
+            <a:avLst>
+              <a:gd name="adj" fmla="val 9259"/>
+            </a:avLst>
+          </a:prstGeom>
+          <a:solidFill>
+            <a:srgbClr val="0E1116"/>
+          </a:solidFill>
+          <a:ln w="12700">
+            <a:solidFill>
+              <a:srgbClr val="2C3440"/>
+            </a:solidFill>
+            <a:prstDash val="solid"/>
+          </a:ln>
+        </p:spPr>
+      </p:sp>
+      <p:sp>
+        <p:nvSpPr>
+          <p:cNvPr id="53" name="Text 51"/>
+          <p:cNvSpPr/>
+          <p:nvPr/>
+        </p:nvSpPr>
+        <p:spPr>
+          <a:xfrm>
+            <a:off x="8363712" y="3456432"/>
+            <a:ext cx="3084576" cy="256032"/>
+          </a:xfrm>
+          <a:prstGeom prst="rect">
+            <a:avLst/>
+          </a:prstGeom>
+          <a:noFill/>
+          <a:ln/>
+        </p:spPr>
+        <p:txBody>
+          <a:bodyPr wrap="square" lIns="0" tIns="0" rIns="0" bIns="0" rtlCol="0" anchor="ctr"/>
+          <a:lstStyle/>
+          <a:p>
+            <a:pPr indent="0" marL="0">
+              <a:buNone/>
+            </a:pPr>
+            <a:r>
+              <a:rPr lang="en-US" sz="1200" b="1" dirty="0">
+                <a:solidFill>
+                  <a:srgbClr val="E8EDF2"/>
+                </a:solidFill>
+                <a:latin typeface="Courier New" pitchFamily="34" charset="0"/>
+                <a:ea typeface="Courier New" pitchFamily="34" charset="-122"/>
+                <a:cs typeface="Courier New" pitchFamily="34" charset="-120"/>
+              </a:rPr>
+              <a:t>cudaSetDevice(i)</a:t>
+            </a:r>
+            <a:endParaRPr lang="en-US" sz="1200" dirty="0"/>
+          </a:p>
+        </p:txBody>
+      </p:sp>
+      <p:sp>
+        <p:nvSpPr>
+          <p:cNvPr id="54" name="Text 52"/>
+          <p:cNvSpPr/>
+          <p:nvPr/>
+        </p:nvSpPr>
+        <p:spPr>
+          <a:xfrm>
+            <a:off x="8363712" y="3685032"/>
+            <a:ext cx="3084576" cy="192024"/>
+          </a:xfrm>
+          <a:prstGeom prst="rect">
+            <a:avLst/>
+          </a:prstGeom>
+          <a:noFill/>
+          <a:ln/>
+        </p:spPr>
+        <p:txBody>
+          <a:bodyPr wrap="square" lIns="0" tIns="0" rIns="0" bIns="0" rtlCol="0" anchor="ctr"/>
+          <a:lstStyle/>
+          <a:p>
+            <a:pPr indent="0" marL="0">
+              <a:buNone/>
+            </a:pPr>
+            <a:r>
+              <a:rPr lang="en-US" sz="1050" dirty="0">
+                <a:solidFill>
+                  <a:srgbClr val="9AA6B2"/>
+                </a:solidFill>
+                <a:latin typeface="Malgun Gothic" pitchFamily="34" charset="0"/>
+                <a:ea typeface="Malgun Gothic" pitchFamily="34" charset="-122"/>
+                <a:cs typeface="Malgun Gothic" pitchFamily="34" charset="-120"/>
+              </a:rPr>
+              <a:t>gpu_idx = i (thread-local)</a:t>
+            </a:r>
+            <a:endParaRPr lang="en-US" sz="1050" dirty="0"/>
+          </a:p>
+        </p:txBody>
+      </p:sp>
+      <p:sp>
+        <p:nvSpPr>
+          <p:cNvPr id="55" name="Shape 53"/>
+          <p:cNvSpPr/>
+          <p:nvPr/>
+        </p:nvSpPr>
+        <p:spPr>
+          <a:xfrm>
+            <a:off x="9906000" y="3898087"/>
+            <a:ext cx="0" cy="91440"/>
+          </a:xfrm>
+          <a:prstGeom prst="line">
+            <a:avLst/>
+          </a:prstGeom>
+          <a:noFill/>
+          <a:ln w="19050">
+            <a:solidFill>
+              <a:srgbClr val="2C3440"/>
+            </a:solidFill>
+            <a:prstDash val="solid"/>
+            <a:tailEnd type="triangle"/>
+          </a:ln>
+        </p:spPr>
+      </p:sp>
+      <p:sp>
+        <p:nvSpPr>
+          <p:cNvPr id="56" name="Shape 54"/>
+          <p:cNvSpPr/>
+          <p:nvPr/>
+        </p:nvSpPr>
+        <p:spPr>
+          <a:xfrm>
+            <a:off x="8199120" y="3995928"/>
+            <a:ext cx="3413760" cy="493776"/>
+          </a:xfrm>
+          <a:prstGeom prst="roundRect">
+            <a:avLst>
+              <a:gd name="adj" fmla="val 9259"/>
+            </a:avLst>
+          </a:prstGeom>
+          <a:solidFill>
+            <a:srgbClr val="0E1116"/>
+          </a:solidFill>
+          <a:ln w="12700">
+            <a:solidFill>
+              <a:srgbClr val="2C3440"/>
+            </a:solidFill>
+            <a:prstDash val="solid"/>
+          </a:ln>
+        </p:spPr>
+      </p:sp>
+      <p:sp>
+        <p:nvSpPr>
+          <p:cNvPr id="57" name="Text 55"/>
+          <p:cNvSpPr/>
+          <p:nvPr/>
+        </p:nvSpPr>
+        <p:spPr>
+          <a:xfrm>
+            <a:off x="8363712" y="4050792"/>
+            <a:ext cx="3084576" cy="256032"/>
+          </a:xfrm>
+          <a:prstGeom prst="rect">
+            <a:avLst/>
+          </a:prstGeom>
+          <a:noFill/>
+          <a:ln/>
+        </p:spPr>
+        <p:txBody>
+          <a:bodyPr wrap="square" lIns="0" tIns="0" rIns="0" bIns="0" rtlCol="0" anchor="ctr"/>
+          <a:lstStyle/>
+          <a:p>
+            <a:pPr indent="0" marL="0">
+              <a:buNone/>
+            </a:pPr>
+            <a:r>
+              <a:rPr lang="en-US" sz="1200" b="1" dirty="0">
+                <a:solidFill>
+                  <a:srgbClr val="E8EDF2"/>
+                </a:solidFill>
+                <a:latin typeface="Courier New" pitchFamily="34" charset="0"/>
+                <a:ea typeface="Courier New" pitchFamily="34" charset="-122"/>
+                <a:cs typeface="Courier New" pitchFamily="34" charset="-120"/>
+              </a:rPr>
+              <a:t>allocate_small_mem</a:t>
+            </a:r>
+            <a:endParaRPr lang="en-US" sz="1200" dirty="0"/>
+          </a:p>
+        </p:txBody>
+      </p:sp>
+      <p:sp>
+        <p:nvSpPr>
+          <p:cNvPr id="58" name="Text 56"/>
+          <p:cNvSpPr/>
+          <p:nvPr/>
+        </p:nvSpPr>
+        <p:spPr>
+          <a:xfrm>
+            <a:off x="8363712" y="4279392"/>
+            <a:ext cx="3084576" cy="192024"/>
+          </a:xfrm>
+          <a:prstGeom prst="rect">
+            <a:avLst/>
+          </a:prstGeom>
+          <a:noFill/>
+          <a:ln/>
+        </p:spPr>
+        <p:txBody>
+          <a:bodyPr wrap="square" lIns="0" tIns="0" rIns="0" bIns="0" rtlCol="0" anchor="ctr"/>
+          <a:lstStyle/>
+          <a:p>
+            <a:pPr indent="0" marL="0">
+              <a:buNone/>
+            </a:pPr>
+            <a:r>
+              <a:rPr lang="en-US" sz="1050" dirty="0">
+                <a:solidFill>
+                  <a:srgbClr val="9AA6B2"/>
+                </a:solidFill>
+                <a:latin typeface="Malgun Gothic" pitchFamily="34" charset="0"/>
+                <a:ea typeface="Malgun Gothic" pitchFamily="34" charset="-122"/>
+                <a:cs typeface="Malgun Gothic" pitchFamily="34" charset="-120"/>
+              </a:rPr>
+              <a:t>오류 버퍼 할당 (이 GPU)</a:t>
+            </a:r>
+            <a:endParaRPr lang="en-US" sz="1050" dirty="0"/>
+          </a:p>
+        </p:txBody>
+      </p:sp>
+      <p:sp>
+        <p:nvSpPr>
+          <p:cNvPr id="59" name="Shape 57"/>
+          <p:cNvSpPr/>
+          <p:nvPr/>
+        </p:nvSpPr>
+        <p:spPr>
+          <a:xfrm>
+            <a:off x="9906000" y="4492447"/>
+            <a:ext cx="0" cy="91440"/>
+          </a:xfrm>
+          <a:prstGeom prst="line">
+            <a:avLst/>
+          </a:prstGeom>
+          <a:noFill/>
+          <a:ln w="19050">
+            <a:solidFill>
+              <a:srgbClr val="2C3440"/>
+            </a:solidFill>
+            <a:prstDash val="solid"/>
+            <a:tailEnd type="triangle"/>
+          </a:ln>
+        </p:spPr>
+      </p:sp>
+      <p:sp>
+        <p:nvSpPr>
+          <p:cNvPr id="60" name="Shape 58"/>
+          <p:cNvSpPr/>
+          <p:nvPr/>
+        </p:nvSpPr>
+        <p:spPr>
+          <a:xfrm>
+            <a:off x="8199120" y="4590288"/>
+            <a:ext cx="3413760" cy="493776"/>
+          </a:xfrm>
+          <a:prstGeom prst="roundRect">
+            <a:avLst>
+              <a:gd name="adj" fmla="val 9259"/>
+            </a:avLst>
+          </a:prstGeom>
+          <a:solidFill>
+            <a:srgbClr val="0E1116"/>
+          </a:solidFill>
+          <a:ln w="12700">
+            <a:solidFill>
+              <a:srgbClr val="2C3440"/>
+            </a:solidFill>
+            <a:prstDash val="solid"/>
+          </a:ln>
+        </p:spPr>
+      </p:sp>
+      <p:sp>
+        <p:nvSpPr>
+          <p:cNvPr id="61" name="Text 59"/>
+          <p:cNvSpPr/>
+          <p:nvPr/>
+        </p:nvSpPr>
+        <p:spPr>
+          <a:xfrm>
+            <a:off x="8363712" y="4645152"/>
+            <a:ext cx="3084576" cy="256032"/>
+          </a:xfrm>
+          <a:prstGeom prst="rect">
+            <a:avLst/>
+          </a:prstGeom>
+          <a:noFill/>
+          <a:ln/>
+        </p:spPr>
+        <p:txBody>
+          <a:bodyPr wrap="square" lIns="0" tIns="0" rIns="0" bIns="0" rtlCol="0" anchor="ctr"/>
+          <a:lstStyle/>
+          <a:p>
+            <a:pPr indent="0" marL="0">
+              <a:buNone/>
+            </a:pPr>
+            <a:r>
+              <a:rPr lang="en-US" sz="1200" b="1" dirty="0">
+                <a:solidFill>
+                  <a:srgbClr val="E8EDF2"/>
+                </a:solidFill>
+                <a:latin typeface="Courier New" pitchFamily="34" charset="0"/>
+                <a:ea typeface="Courier New" pitchFamily="34" charset="-122"/>
+                <a:cs typeface="Courier New" pitchFamily="34" charset="-120"/>
+              </a:rPr>
+              <a:t>run_tests</a:t>
+            </a:r>
+            <a:endParaRPr lang="en-US" sz="1200" dirty="0"/>
+          </a:p>
+        </p:txBody>
+      </p:sp>
+      <p:sp>
+        <p:nvSpPr>
+          <p:cNvPr id="62" name="Text 60"/>
+          <p:cNvSpPr/>
+          <p:nvPr/>
+        </p:nvSpPr>
+        <p:spPr>
+          <a:xfrm>
+            <a:off x="8363712" y="4873752"/>
+            <a:ext cx="3084576" cy="192024"/>
+          </a:xfrm>
+          <a:prstGeom prst="rect">
+            <a:avLst/>
+          </a:prstGeom>
+          <a:noFill/>
+          <a:ln/>
+        </p:spPr>
+        <p:txBody>
+          <a:bodyPr wrap="square" lIns="0" tIns="0" rIns="0" bIns="0" rtlCol="0" anchor="ctr"/>
+          <a:lstStyle/>
+          <a:p>
+            <a:pPr indent="0" marL="0">
+              <a:buNone/>
+            </a:pPr>
+            <a:r>
+              <a:rPr lang="en-US" sz="1050" dirty="0">
+                <a:solidFill>
+                  <a:srgbClr val="9AA6B2"/>
+                </a:solidFill>
+                <a:latin typeface="Malgun Gothic" pitchFamily="34" charset="0"/>
+                <a:ea typeface="Malgun Gothic" pitchFamily="34" charset="-122"/>
+                <a:cs typeface="Malgun Gothic" pitchFamily="34" charset="-120"/>
+              </a:rPr>
+              <a:t>11개 테스트 실행</a:t>
+            </a:r>
+            <a:endParaRPr lang="en-US" sz="1050" dirty="0"/>
+          </a:p>
+        </p:txBody>
+      </p:sp>
+      <p:sp>
+        <p:nvSpPr>
+          <p:cNvPr id="63" name="Shape 61"/>
+          <p:cNvSpPr/>
+          <p:nvPr/>
+        </p:nvSpPr>
+        <p:spPr>
+          <a:xfrm>
+            <a:off x="9906000" y="5086807"/>
+            <a:ext cx="0" cy="91440"/>
+          </a:xfrm>
+          <a:prstGeom prst="line">
+            <a:avLst/>
+          </a:prstGeom>
+          <a:noFill/>
+          <a:ln w="19050">
+            <a:solidFill>
+              <a:srgbClr val="2C3440"/>
+            </a:solidFill>
+            <a:prstDash val="solid"/>
+            <a:tailEnd type="triangle"/>
+          </a:ln>
+        </p:spPr>
+      </p:sp>
+      <p:sp>
+        <p:nvSpPr>
+          <p:cNvPr id="64" name="Shape 62"/>
+          <p:cNvSpPr/>
+          <p:nvPr/>
+        </p:nvSpPr>
+        <p:spPr>
+          <a:xfrm>
+            <a:off x="8199120" y="5184648"/>
+            <a:ext cx="3413760" cy="493776"/>
+          </a:xfrm>
+          <a:prstGeom prst="roundRect">
+            <a:avLst>
+              <a:gd name="adj" fmla="val 9259"/>
+            </a:avLst>
+          </a:prstGeom>
+          <a:solidFill>
+            <a:srgbClr val="1A2418"/>
+          </a:solidFill>
+          <a:ln w="19050">
+            <a:solidFill>
+              <a:srgbClr val="E0A458"/>
+            </a:solidFill>
+            <a:prstDash val="solid"/>
+          </a:ln>
+        </p:spPr>
+      </p:sp>
+      <p:sp>
+        <p:nvSpPr>
+          <p:cNvPr id="65" name="Text 63"/>
+          <p:cNvSpPr/>
+          <p:nvPr/>
+        </p:nvSpPr>
+        <p:spPr>
+          <a:xfrm>
+            <a:off x="8363712" y="5239512"/>
+            <a:ext cx="3084576" cy="256032"/>
+          </a:xfrm>
+          <a:prstGeom prst="rect">
+            <a:avLst/>
+          </a:prstGeom>
+          <a:noFill/>
+          <a:ln/>
+        </p:spPr>
+        <p:txBody>
+          <a:bodyPr wrap="square" lIns="0" tIns="0" rIns="0" bIns="0" rtlCol="0" anchor="ctr"/>
+          <a:lstStyle/>
+          <a:p>
+            <a:pPr indent="0" marL="0">
+              <a:buNone/>
+            </a:pPr>
+            <a:r>
+              <a:rPr lang="en-US" sz="1200" b="1" dirty="0">
+                <a:solidFill>
+                  <a:srgbClr val="E0A458"/>
+                </a:solidFill>
+                <a:latin typeface="Courier New" pitchFamily="34" charset="0"/>
+                <a:ea typeface="Courier New" pitchFamily="34" charset="-122"/>
+                <a:cs typeface="Courier New" pitchFamily="34" charset="-120"/>
+              </a:rPr>
+              <a:t>GPU 2 · VRAM</a:t>
+            </a:r>
+            <a:endParaRPr lang="en-US" sz="1200" dirty="0"/>
+          </a:p>
+        </p:txBody>
+      </p:sp>
+      <p:sp>
+        <p:nvSpPr>
+          <p:cNvPr id="66" name="Text 64"/>
+          <p:cNvSpPr/>
+          <p:nvPr/>
+        </p:nvSpPr>
+        <p:spPr>
+          <a:xfrm>
+            <a:off x="8363712" y="5468112"/>
+            <a:ext cx="3084576" cy="192024"/>
+          </a:xfrm>
+          <a:prstGeom prst="rect">
+            <a:avLst/>
+          </a:prstGeom>
+          <a:noFill/>
+          <a:ln/>
+        </p:spPr>
+        <p:txBody>
+          <a:bodyPr wrap="square" lIns="0" tIns="0" rIns="0" bIns="0" rtlCol="0" anchor="ctr"/>
+          <a:lstStyle/>
+          <a:p>
+            <a:pPr indent="0" marL="0">
+              <a:buNone/>
+            </a:pPr>
+            <a:r>
+              <a:rPr lang="en-US" sz="1050" dirty="0">
+                <a:solidFill>
+                  <a:srgbClr val="9AA6B2"/>
+                </a:solidFill>
+                <a:latin typeface="Malgun Gothic" pitchFamily="34" charset="0"/>
+                <a:ea typeface="Malgun Gothic" pitchFamily="34" charset="-122"/>
+                <a:cs typeface="Malgun Gothic" pitchFamily="34" charset="-120"/>
+              </a:rPr>
+              <a:t>독립 메모리 (검사 대상)</a:t>
+            </a:r>
+            <a:endParaRPr lang="en-US" sz="1050" dirty="0"/>
+          </a:p>
+        </p:txBody>
+      </p:sp>
+      <p:sp>
+        <p:nvSpPr>
+          <p:cNvPr id="67" name="Text 65"/>
+          <p:cNvSpPr/>
+          <p:nvPr/>
+        </p:nvSpPr>
+        <p:spPr>
+          <a:xfrm>
+            <a:off x="548640" y="6053328"/>
+            <a:ext cx="11064240" cy="365760"/>
+          </a:xfrm>
+          <a:prstGeom prst="rect">
+            <a:avLst/>
+          </a:prstGeom>
+          <a:noFill/>
+          <a:ln/>
+        </p:spPr>
+        <p:txBody>
+          <a:bodyPr wrap="square" lIns="0" tIns="0" rIns="0" bIns="0" rtlCol="0" anchor="ctr"/>
+          <a:lstStyle/>
+          <a:p>
+            <a:pPr algn="ctr" indent="0" marL="0">
+              <a:buNone/>
+            </a:pPr>
+            <a:r>
+              <a:rPr lang="en-US" sz="1300" i="1" dirty="0">
+                <a:solidFill>
+                  <a:srgbClr val="9AA6B2"/>
+                </a:solidFill>
+                <a:latin typeface="Malgun Gothic" pitchFamily="34" charset="0"/>
+                <a:ea typeface="Malgun Gothic" pitchFamily="34" charset="-122"/>
+                <a:cs typeface="Malgun Gothic" pitchFamily="34" charset="-120"/>
+              </a:rPr>
+              <a:t>각 열은 완전히 독립·병렬 — 한 GPU의 오류가 다른 GPU를 멈추지 않습니다. (예: S1070 = 노드당 4 GPU)</a:t>
+            </a:r>
+            <a:endParaRPr lang="en-US" sz="1300" dirty="0"/>
           </a:p>
         </p:txBody>
       </p:sp>
@@ -4150,7 +6852,7 @@
                 <a:ea typeface="Courier New" pitchFamily="34" charset="-122"/>
                 <a:cs typeface="Courier New" pitchFamily="34" charset="-120"/>
               </a:rPr>
-              <a:t>4</a:t>
+              <a:t>3</a:t>
             </a:r>
             <a:endParaRPr lang="en-US" sz="2200" dirty="0"/>
           </a:p>
@@ -4189,7 +6891,7 @@
                 <a:ea typeface="Malgun Gothic" pitchFamily="34" charset="-122"/>
                 <a:cs typeface="Malgun Gothic" pitchFamily="34" charset="-120"/>
               </a:rPr>
-              <a:t>이식성 · 하나의 코드, 두 백엔드</a:t>
+              <a:t>스레드 지역 저장소 · __thread gpu_idx</a:t>
             </a:r>
             <a:endParaRPr lang="en-US" sz="3000" dirty="0"/>
           </a:p>
@@ -4204,11 +6906,11 @@
         <p:spPr>
           <a:xfrm>
             <a:off x="548640" y="1554480"/>
-            <a:ext cx="11064240" cy="2651760"/>
+            <a:ext cx="11064240" cy="2377440"/>
           </a:xfrm>
           <a:prstGeom prst="roundRect">
             <a:avLst>
-              <a:gd name="adj" fmla="val 2069"/>
+              <a:gd name="adj" fmla="val 2308"/>
             </a:avLst>
           </a:prstGeom>
           <a:solidFill>
@@ -4231,7 +6933,7 @@
         <p:spPr>
           <a:xfrm>
             <a:off x="749808" y="1700784"/>
-            <a:ext cx="10661904" cy="2359152"/>
+            <a:ext cx="10661904" cy="2084832"/>
           </a:xfrm>
           <a:prstGeom prst="rect">
             <a:avLst/>
@@ -4258,7 +6960,7 @@
                 <a:ea typeface="Courier New" pitchFamily="34" charset="-122"/>
                 <a:cs typeface="Courier New" pitchFamily="34" charset="-120"/>
               </a:rPr>
-              <a:t>// cuda_memtest.h:53                    // 토큰 붙이기(##)로 이름 생성</a:t>
+              <a:t>// cuda_memtest.h:81</a:t>
             </a:r>
             <a:endParaRPr lang="en-US" sz="1350" dirty="0"/>
           </a:p>
@@ -4272,13 +6974,13 @@
             <a:r>
               <a:rPr lang="en-US" sz="1350" dirty="0">
                 <a:solidFill>
-                  <a:srgbClr val="E8EDF2"/>
+                  <a:srgbClr val="8CC63F"/>
                 </a:solidFill>
                 <a:latin typeface="Courier New" pitchFamily="34" charset="0"/>
                 <a:ea typeface="Courier New" pitchFamily="34" charset="-122"/>
                 <a:cs typeface="Courier New" pitchFamily="34" charset="-120"/>
               </a:rPr>
-              <a:t>#if defined(__CUDACC__)                  // NVIDIA CUDA 컴파일러</a:t>
+              <a:t>extern __thread unsigned int gpu_idx;   // 스레드마다 독립된 복사본</a:t>
             </a:r>
             <a:endParaRPr lang="en-US" sz="1350" dirty="0"/>
           </a:p>
@@ -4289,17 +6991,6 @@
               </a:lnSpc>
               <a:buNone/>
             </a:pPr>
-            <a:r>
-              <a:rPr lang="en-US" sz="1350" dirty="0">
-                <a:solidFill>
-                  <a:srgbClr val="8CC63F"/>
-                </a:solidFill>
-                <a:latin typeface="Courier New" pitchFamily="34" charset="0"/>
-                <a:ea typeface="Courier New" pitchFamily="34" charset="-122"/>
-                <a:cs typeface="Courier New" pitchFamily="34" charset="-120"/>
-              </a:rPr>
-              <a:t>#  define MEMTEST_API_PREFIX(name) cuda##name   // Malloc → cudaMalloc</a:t>
-            </a:r>
             <a:endParaRPr lang="en-US" sz="1350" dirty="0"/>
           </a:p>
           <a:p>
@@ -4312,13 +7003,13 @@
             <a:r>
               <a:rPr lang="en-US" sz="1350" dirty="0">
                 <a:solidFill>
-                  <a:srgbClr val="E8EDF2"/>
+                  <a:srgbClr val="9AA6B2"/>
                 </a:solidFill>
                 <a:latin typeface="Courier New" pitchFamily="34" charset="0"/>
                 <a:ea typeface="Courier New" pitchFamily="34" charset="-122"/>
                 <a:cs typeface="Courier New" pitchFamily="34" charset="-120"/>
               </a:rPr>
-              <a:t>#elif defined(__HIP__)                   // AMD HIP 컴파일러</a:t>
+              <a:t>// thread_func  cuda_memtest.cpp:122</a:t>
             </a:r>
             <a:endParaRPr lang="en-US" sz="1350" dirty="0"/>
           </a:p>
@@ -4338,7 +7029,7 @@
                 <a:ea typeface="Courier New" pitchFamily="34" charset="-122"/>
                 <a:cs typeface="Courier New" pitchFamily="34" charset="-120"/>
               </a:rPr>
-              <a:t>#  define MEMTEST_API_PREFIX(name) hip##name    // Malloc → hipMalloc</a:t>
+              <a:t>gpu_idx = device;              // 이 스레드의 GPU 번호</a:t>
             </a:r>
             <a:endParaRPr lang="en-US" sz="1350" dirty="0"/>
           </a:p>
@@ -4358,7 +7049,7 @@
                 <a:ea typeface="Courier New" pitchFamily="34" charset="-122"/>
                 <a:cs typeface="Courier New" pitchFamily="34" charset="-120"/>
               </a:rPr>
-              <a:t>#endif</a:t>
+              <a:t>cudaSetDevice(device);         // 이 스레드는 이 GPU 담당</a:t>
             </a:r>
             <a:endParaRPr lang="en-US" sz="1350" dirty="0"/>
           </a:p>
@@ -4366,18 +7057,99 @@
       </p:sp>
       <p:sp>
         <p:nvSpPr>
-          <p:cNvPr id="6" name="Shape 4"/>
-          <p:cNvSpPr/>
-          <p:nvPr/>
-        </p:nvSpPr>
-        <p:spPr>
-          <a:xfrm>
-            <a:off x="548640" y="4434840"/>
-            <a:ext cx="5349240" cy="1371600"/>
+          <p:cNvPr id="6" name="Text 4"/>
+          <p:cNvSpPr/>
+          <p:nvPr/>
+        </p:nvSpPr>
+        <p:spPr>
+          <a:xfrm>
+            <a:off x="548640" y="4114800"/>
+            <a:ext cx="11064240" cy="640080"/>
+          </a:xfrm>
+          <a:prstGeom prst="rect">
+            <a:avLst/>
+          </a:prstGeom>
+          <a:noFill/>
+          <a:ln/>
+        </p:spPr>
+        <p:txBody>
+          <a:bodyPr wrap="square" lIns="0" tIns="0" rIns="0" bIns="0" rtlCol="0" anchor="t"/>
+          <a:lstStyle/>
+          <a:p>
+            <a:pPr indent="0" marL="0">
+              <a:buNone/>
+            </a:pPr>
+            <a:r>
+              <a:rPr lang="en-US" sz="1700" b="1" dirty="0">
+                <a:solidFill>
+                  <a:srgbClr val="8CC63F"/>
+                </a:solidFill>
+                <a:latin typeface="Malgun Gothic" pitchFamily="34" charset="0"/>
+                <a:ea typeface="Malgun Gothic" pitchFamily="34" charset="-122"/>
+                <a:cs typeface="Malgun Gothic" pitchFamily="34" charset="-120"/>
+              </a:rPr>
+              <a:t>__thread</a:t>
+            </a:r>
+            <a:pPr indent="0" marL="0">
+              <a:buNone/>
+            </a:pPr>
+            <a:r>
+              <a:rPr lang="en-US" sz="1700" dirty="0">
+                <a:solidFill>
+                  <a:srgbClr val="E8EDF2"/>
+                </a:solidFill>
+                <a:latin typeface="Malgun Gothic" pitchFamily="34" charset="0"/>
+                <a:ea typeface="Malgun Gothic" pitchFamily="34" charset="-122"/>
+                <a:cs typeface="Malgun Gothic" pitchFamily="34" charset="-120"/>
+              </a:rPr>
+              <a:t> (스레드 지역 저장소, TLS)를 붙이면 같은 이름의 변수라도 </a:t>
+            </a:r>
+            <a:pPr indent="0" marL="0">
+              <a:buNone/>
+            </a:pPr>
+            <a:r>
+              <a:rPr lang="en-US" sz="1700" b="1" dirty="0">
+                <a:solidFill>
+                  <a:srgbClr val="4FB0C6"/>
+                </a:solidFill>
+                <a:latin typeface="Malgun Gothic" pitchFamily="34" charset="0"/>
+                <a:ea typeface="Malgun Gothic" pitchFamily="34" charset="-122"/>
+                <a:cs typeface="Malgun Gothic" pitchFamily="34" charset="-120"/>
+              </a:rPr>
+              <a:t>스레드마다 별도 값</a:t>
+            </a:r>
+            <a:pPr indent="0" marL="0">
+              <a:buNone/>
+            </a:pPr>
+            <a:r>
+              <a:rPr lang="en-US" sz="1700" dirty="0">
+                <a:solidFill>
+                  <a:srgbClr val="E8EDF2"/>
+                </a:solidFill>
+                <a:latin typeface="Malgun Gothic" pitchFamily="34" charset="0"/>
+                <a:ea typeface="Malgun Gothic" pitchFamily="34" charset="-122"/>
+                <a:cs typeface="Malgun Gothic" pitchFamily="34" charset="-120"/>
+              </a:rPr>
+              <a:t>을 가집니다.</a:t>
+            </a:r>
+            <a:endParaRPr lang="en-US" sz="1700" dirty="0"/>
+          </a:p>
+        </p:txBody>
+      </p:sp>
+      <p:sp>
+        <p:nvSpPr>
+          <p:cNvPr id="7" name="Shape 5"/>
+          <p:cNvSpPr/>
+          <p:nvPr/>
+        </p:nvSpPr>
+        <p:spPr>
+          <a:xfrm>
+            <a:off x="548640" y="4846320"/>
+            <a:ext cx="11064240" cy="1005840"/>
           </a:xfrm>
           <a:prstGeom prst="roundRect">
             <a:avLst>
-              <a:gd name="adj" fmla="val 5333"/>
+              <a:gd name="adj" fmla="val 7273"/>
             </a:avLst>
           </a:prstGeom>
           <a:solidFill>
@@ -4388,14 +7160,14 @@
       </p:sp>
       <p:sp>
         <p:nvSpPr>
-          <p:cNvPr id="7" name="Text 5"/>
-          <p:cNvSpPr/>
-          <p:nvPr/>
-        </p:nvSpPr>
-        <p:spPr>
-          <a:xfrm>
-            <a:off x="777240" y="4572000"/>
-            <a:ext cx="4892040" cy="365760"/>
+          <p:cNvPr id="8" name="Text 6"/>
+          <p:cNvSpPr/>
+          <p:nvPr/>
+        </p:nvSpPr>
+        <p:spPr>
+          <a:xfrm>
+            <a:off x="822960" y="5029200"/>
+            <a:ext cx="10515600" cy="685800"/>
           </a:xfrm>
           <a:prstGeom prst="rect">
             <a:avLst/>
@@ -4413,216 +7185,29 @@
             <a:r>
               <a:rPr lang="en-US" sz="1500" b="1" dirty="0">
                 <a:solidFill>
-                  <a:srgbClr val="8CC63F"/>
+                  <a:srgbClr val="E0A458"/>
                 </a:solidFill>
                 <a:latin typeface="Malgun Gothic" pitchFamily="34" charset="0"/>
                 <a:ea typeface="Malgun Gothic" pitchFamily="34" charset="-122"/>
                 <a:cs typeface="Malgun Gothic" pitchFamily="34" charset="-120"/>
               </a:rPr>
-              <a:t>코드는 이렇게 한 벌만</a:t>
-            </a:r>
-            <a:endParaRPr lang="en-US" sz="1500" dirty="0"/>
-          </a:p>
-        </p:txBody>
-      </p:sp>
-      <p:sp>
-        <p:nvSpPr>
-          <p:cNvPr id="8" name="Text 6"/>
-          <p:cNvSpPr/>
-          <p:nvPr/>
-        </p:nvSpPr>
-        <p:spPr>
-          <a:xfrm>
-            <a:off x="777240" y="4983480"/>
-            <a:ext cx="4892040" cy="457200"/>
-          </a:xfrm>
-          <a:prstGeom prst="rect">
-            <a:avLst/>
-          </a:prstGeom>
-          <a:noFill/>
-          <a:ln/>
-        </p:spPr>
-        <p:txBody>
-          <a:bodyPr wrap="square" lIns="0" tIns="0" rIns="0" bIns="0" rtlCol="0" anchor="ctr"/>
-          <a:lstStyle/>
-          <a:p>
-            <a:pPr indent="0" marL="0">
-              <a:buNone/>
-            </a:pPr>
-            <a:r>
-              <a:rPr lang="en-US" sz="1250" dirty="0">
+              <a:t>만약 일반 전역 변수였다면? </a:t>
+            </a:r>
+            <a:pPr indent="0" marL="0">
+              <a:buNone/>
+            </a:pPr>
+            <a:r>
+              <a:rPr lang="en-US" sz="1500" dirty="0">
                 <a:solidFill>
                   <a:srgbClr val="E8EDF2"/>
-                </a:solidFill>
-                <a:latin typeface="Courier New" pitchFamily="34" charset="0"/>
-                <a:ea typeface="Courier New" pitchFamily="34" charset="-122"/>
-                <a:cs typeface="Courier New" pitchFamily="34" charset="-120"/>
-              </a:rPr>
-              <a:t>MEMTEST_API_PREFIX(Malloc)(&amp;ptr, n);</a:t>
-            </a:r>
-            <a:endParaRPr lang="en-US" sz="1250" dirty="0"/>
-          </a:p>
-        </p:txBody>
-      </p:sp>
-      <p:sp>
-        <p:nvSpPr>
-          <p:cNvPr id="9" name="Text 7"/>
-          <p:cNvSpPr/>
-          <p:nvPr/>
-        </p:nvSpPr>
-        <p:spPr>
-          <a:xfrm>
-            <a:off x="777240" y="5394960"/>
-            <a:ext cx="4892040" cy="365760"/>
-          </a:xfrm>
-          <a:prstGeom prst="rect">
-            <a:avLst/>
-          </a:prstGeom>
-          <a:noFill/>
-          <a:ln/>
-        </p:spPr>
-        <p:txBody>
-          <a:bodyPr wrap="square" lIns="0" tIns="0" rIns="0" bIns="0" rtlCol="0" anchor="ctr"/>
-          <a:lstStyle/>
-          <a:p>
-            <a:pPr indent="0" marL="0">
-              <a:buNone/>
-            </a:pPr>
-            <a:r>
-              <a:rPr lang="en-US" sz="1300" dirty="0">
-                <a:solidFill>
-                  <a:srgbClr val="9AA6B2"/>
                 </a:solidFill>
                 <a:latin typeface="Malgun Gothic" pitchFamily="34" charset="0"/>
                 <a:ea typeface="Malgun Gothic" pitchFamily="34" charset="-122"/>
                 <a:cs typeface="Malgun Gothic" pitchFamily="34" charset="-120"/>
               </a:rPr>
-              <a:t>cudaMalloc을 직접 쓴 곳은 거의 없습니다.</a:t>
-            </a:r>
-            <a:endParaRPr lang="en-US" sz="1300" dirty="0"/>
-          </a:p>
-        </p:txBody>
-      </p:sp>
-      <p:sp>
-        <p:nvSpPr>
-          <p:cNvPr id="10" name="Shape 8"/>
-          <p:cNvSpPr/>
-          <p:nvPr/>
-        </p:nvSpPr>
-        <p:spPr>
-          <a:xfrm>
-            <a:off x="6263640" y="4434840"/>
-            <a:ext cx="5349240" cy="1371600"/>
-          </a:xfrm>
-          <a:prstGeom prst="roundRect">
-            <a:avLst>
-              <a:gd name="adj" fmla="val 5333"/>
-            </a:avLst>
-          </a:prstGeom>
-          <a:solidFill>
-            <a:srgbClr val="1E232C"/>
-          </a:solidFill>
-          <a:ln/>
-        </p:spPr>
-      </p:sp>
-      <p:sp>
-        <p:nvSpPr>
-          <p:cNvPr id="11" name="Text 9"/>
-          <p:cNvSpPr/>
-          <p:nvPr/>
-        </p:nvSpPr>
-        <p:spPr>
-          <a:xfrm>
-            <a:off x="6492240" y="4572000"/>
-            <a:ext cx="4892040" cy="365760"/>
-          </a:xfrm>
-          <a:prstGeom prst="rect">
-            <a:avLst/>
-          </a:prstGeom>
-          <a:noFill/>
-          <a:ln/>
-        </p:spPr>
-        <p:txBody>
-          <a:bodyPr wrap="square" lIns="0" tIns="0" rIns="0" bIns="0" rtlCol="0" anchor="ctr"/>
-          <a:lstStyle/>
-          <a:p>
-            <a:pPr indent="0" marL="0">
-              <a:buNone/>
-            </a:pPr>
-            <a:r>
-              <a:rPr lang="en-US" sz="1500" b="1" dirty="0">
-                <a:solidFill>
-                  <a:srgbClr val="4FB0C6"/>
-                </a:solidFill>
-                <a:latin typeface="Malgun Gothic" pitchFamily="34" charset="0"/>
-                <a:ea typeface="Malgun Gothic" pitchFamily="34" charset="-122"/>
-                <a:cs typeface="Malgun Gothic" pitchFamily="34" charset="-120"/>
-              </a:rPr>
-              <a:t>컴파일러가 결정</a:t>
+              <a:t>여러 스레드가 같은 gpu_idx를 덮어써 로그의 GPU 번호가 뒤죽박죽됩니다. TLS가 이를 막습니다.</a:t>
             </a:r>
             <a:endParaRPr lang="en-US" sz="1500" dirty="0"/>
-          </a:p>
-        </p:txBody>
-      </p:sp>
-      <p:sp>
-        <p:nvSpPr>
-          <p:cNvPr id="12" name="Text 10"/>
-          <p:cNvSpPr/>
-          <p:nvPr/>
-        </p:nvSpPr>
-        <p:spPr>
-          <a:xfrm>
-            <a:off x="6492240" y="4983480"/>
-            <a:ext cx="4892040" cy="731520"/>
-          </a:xfrm>
-          <a:prstGeom prst="rect">
-            <a:avLst/>
-          </a:prstGeom>
-          <a:noFill/>
-          <a:ln/>
-        </p:spPr>
-        <p:txBody>
-          <a:bodyPr wrap="square" lIns="0" tIns="0" rIns="0" bIns="0" rtlCol="0" anchor="t"/>
-          <a:lstStyle/>
-          <a:p>
-            <a:pPr indent="0" marL="0">
-              <a:lnSpc>
-                <a:spcPct val="120000"/>
-              </a:lnSpc>
-              <a:buNone/>
-            </a:pPr>
-            <a:r>
-              <a:rPr lang="en-US" sz="1300" dirty="0">
-                <a:solidFill>
-                  <a:srgbClr val="E8EDF2"/>
-                </a:solidFill>
-                <a:latin typeface="Courier New" pitchFamily="34" charset="0"/>
-                <a:ea typeface="Courier New" pitchFamily="34" charset="-122"/>
-                <a:cs typeface="Courier New" pitchFamily="34" charset="-120"/>
-              </a:rPr>
-              <a:t>NVIDIA → cudaMalloc</a:t>
-            </a:r>
-            <a:endParaRPr lang="en-US" sz="1300" dirty="0"/>
-          </a:p>
-          <a:p>
-            <a:pPr indent="0" marL="0">
-              <a:lnSpc>
-                <a:spcPct val="120000"/>
-              </a:lnSpc>
-              <a:buNone/>
-            </a:pPr>
-            <a:r>
-              <a:rPr lang="en-US" sz="1300" dirty="0">
-                <a:solidFill>
-                  <a:srgbClr val="E8EDF2"/>
-                </a:solidFill>
-                <a:latin typeface="Courier New" pitchFamily="34" charset="0"/>
-                <a:ea typeface="Courier New" pitchFamily="34" charset="-122"/>
-                <a:cs typeface="Courier New" pitchFamily="34" charset="-120"/>
-              </a:rPr>
-              <a:t>AMD → hipMalloc</a:t>
-            </a:r>
-            <a:endParaRPr lang="en-US" sz="1300" dirty="0"/>
           </a:p>
         </p:txBody>
       </p:sp>
@@ -4695,7 +7280,7 @@
                 <a:ea typeface="Courier New" pitchFamily="34" charset="-122"/>
                 <a:cs typeface="Courier New" pitchFamily="34" charset="-120"/>
               </a:rPr>
-              <a:t>5</a:t>
+              <a:t>4</a:t>
             </a:r>
             <a:endParaRPr lang="en-US" sz="2200" dirty="0"/>
           </a:p>
@@ -4734,7 +7319,7 @@
                 <a:ea typeface="Malgun Gothic" pitchFamily="34" charset="-122"/>
                 <a:cs typeface="Malgun Gothic" pitchFamily="34" charset="-120"/>
               </a:rPr>
-              <a:t>캡스톤 · 나만의 테스트 추가</a:t>
+              <a:t>이식성 · 하나의 코드, 두 백엔드</a:t>
             </a:r>
             <a:endParaRPr lang="en-US" sz="3000" dirty="0"/>
           </a:p>
@@ -4742,57 +7327,326 @@
       </p:sp>
       <p:sp>
         <p:nvSpPr>
-          <p:cNvPr id="4" name="Text 2"/>
-          <p:cNvSpPr/>
-          <p:nvPr/>
-        </p:nvSpPr>
-        <p:spPr>
-          <a:xfrm>
-            <a:off x="548640" y="1463040"/>
-            <a:ext cx="11064240" cy="457200"/>
-          </a:xfrm>
-          <a:prstGeom prst="rect">
-            <a:avLst/>
-          </a:prstGeom>
-          <a:noFill/>
-          <a:ln/>
-        </p:spPr>
-        <p:txBody>
-          <a:bodyPr wrap="square" lIns="0" tIns="0" rIns="0" bIns="0" rtlCol="0" anchor="ctr"/>
-          <a:lstStyle/>
-          <a:p>
-            <a:pPr indent="0" marL="0">
-              <a:buNone/>
-            </a:pPr>
-            <a:r>
-              <a:rPr lang="en-US" sz="1600" dirty="0">
+          <p:cNvPr id="4" name="Shape 2"/>
+          <p:cNvSpPr/>
+          <p:nvPr/>
+        </p:nvSpPr>
+        <p:spPr>
+          <a:xfrm>
+            <a:off x="548640" y="1554480"/>
+            <a:ext cx="11064240" cy="2651760"/>
+          </a:xfrm>
+          <a:prstGeom prst="roundRect">
+            <a:avLst>
+              <a:gd name="adj" fmla="val 2069"/>
+            </a:avLst>
+          </a:prstGeom>
+          <a:solidFill>
+            <a:srgbClr val="0E1116"/>
+          </a:solidFill>
+          <a:ln w="12700">
+            <a:solidFill>
+              <a:srgbClr val="2C3440"/>
+            </a:solidFill>
+            <a:prstDash val="solid"/>
+          </a:ln>
+        </p:spPr>
+      </p:sp>
+      <p:sp>
+        <p:nvSpPr>
+          <p:cNvPr id="5" name="Text 3"/>
+          <p:cNvSpPr/>
+          <p:nvPr/>
+        </p:nvSpPr>
+        <p:spPr>
+          <a:xfrm>
+            <a:off x="749808" y="1700784"/>
+            <a:ext cx="10661904" cy="2359152"/>
+          </a:xfrm>
+          <a:prstGeom prst="rect">
+            <a:avLst/>
+          </a:prstGeom>
+          <a:noFill/>
+          <a:ln/>
+        </p:spPr>
+        <p:txBody>
+          <a:bodyPr wrap="square" lIns="0" tIns="0" rIns="0" bIns="0" rtlCol="0" anchor="t"/>
+          <a:lstStyle/>
+          <a:p>
+            <a:pPr algn="l" indent="0" marL="0">
+              <a:lnSpc>
+                <a:spcPct val="108000"/>
+              </a:lnSpc>
+              <a:buNone/>
+            </a:pPr>
+            <a:r>
+              <a:rPr lang="en-US" sz="1350" dirty="0">
                 <a:solidFill>
                   <a:srgbClr val="9AA6B2"/>
+                </a:solidFill>
+                <a:latin typeface="Courier New" pitchFamily="34" charset="0"/>
+                <a:ea typeface="Courier New" pitchFamily="34" charset="-122"/>
+                <a:cs typeface="Courier New" pitchFamily="34" charset="-120"/>
+              </a:rPr>
+              <a:t>// cuda_memtest.h:53                    // 토큰 붙이기(##)로 이름 생성</a:t>
+            </a:r>
+            <a:endParaRPr lang="en-US" sz="1350" dirty="0"/>
+          </a:p>
+          <a:p>
+            <a:pPr algn="l" indent="0" marL="0">
+              <a:lnSpc>
+                <a:spcPct val="108000"/>
+              </a:lnSpc>
+              <a:buNone/>
+            </a:pPr>
+            <a:r>
+              <a:rPr lang="en-US" sz="1350" dirty="0">
+                <a:solidFill>
+                  <a:srgbClr val="E8EDF2"/>
+                </a:solidFill>
+                <a:latin typeface="Courier New" pitchFamily="34" charset="0"/>
+                <a:ea typeface="Courier New" pitchFamily="34" charset="-122"/>
+                <a:cs typeface="Courier New" pitchFamily="34" charset="-120"/>
+              </a:rPr>
+              <a:t>#if defined(__CUDACC__)                  // NVIDIA CUDA 컴파일러</a:t>
+            </a:r>
+            <a:endParaRPr lang="en-US" sz="1350" dirty="0"/>
+          </a:p>
+          <a:p>
+            <a:pPr algn="l" indent="0" marL="0">
+              <a:lnSpc>
+                <a:spcPct val="108000"/>
+              </a:lnSpc>
+              <a:buNone/>
+            </a:pPr>
+            <a:r>
+              <a:rPr lang="en-US" sz="1350" dirty="0">
+                <a:solidFill>
+                  <a:srgbClr val="8CC63F"/>
+                </a:solidFill>
+                <a:latin typeface="Courier New" pitchFamily="34" charset="0"/>
+                <a:ea typeface="Courier New" pitchFamily="34" charset="-122"/>
+                <a:cs typeface="Courier New" pitchFamily="34" charset="-120"/>
+              </a:rPr>
+              <a:t>#  define MEMTEST_API_PREFIX(name) cuda##name   // Malloc → cudaMalloc</a:t>
+            </a:r>
+            <a:endParaRPr lang="en-US" sz="1350" dirty="0"/>
+          </a:p>
+          <a:p>
+            <a:pPr algn="l" indent="0" marL="0">
+              <a:lnSpc>
+                <a:spcPct val="108000"/>
+              </a:lnSpc>
+              <a:buNone/>
+            </a:pPr>
+            <a:r>
+              <a:rPr lang="en-US" sz="1350" dirty="0">
+                <a:solidFill>
+                  <a:srgbClr val="E8EDF2"/>
+                </a:solidFill>
+                <a:latin typeface="Courier New" pitchFamily="34" charset="0"/>
+                <a:ea typeface="Courier New" pitchFamily="34" charset="-122"/>
+                <a:cs typeface="Courier New" pitchFamily="34" charset="-120"/>
+              </a:rPr>
+              <a:t>#elif defined(__HIP__)                   // AMD HIP 컴파일러</a:t>
+            </a:r>
+            <a:endParaRPr lang="en-US" sz="1350" dirty="0"/>
+          </a:p>
+          <a:p>
+            <a:pPr algn="l" indent="0" marL="0">
+              <a:lnSpc>
+                <a:spcPct val="108000"/>
+              </a:lnSpc>
+              <a:buNone/>
+            </a:pPr>
+            <a:r>
+              <a:rPr lang="en-US" sz="1350" dirty="0">
+                <a:solidFill>
+                  <a:srgbClr val="4FB0C6"/>
+                </a:solidFill>
+                <a:latin typeface="Courier New" pitchFamily="34" charset="0"/>
+                <a:ea typeface="Courier New" pitchFamily="34" charset="-122"/>
+                <a:cs typeface="Courier New" pitchFamily="34" charset="-120"/>
+              </a:rPr>
+              <a:t>#  define MEMTEST_API_PREFIX(name) hip##name    // Malloc → hipMalloc</a:t>
+            </a:r>
+            <a:endParaRPr lang="en-US" sz="1350" dirty="0"/>
+          </a:p>
+          <a:p>
+            <a:pPr algn="l" indent="0" marL="0">
+              <a:lnSpc>
+                <a:spcPct val="108000"/>
+              </a:lnSpc>
+              <a:buNone/>
+            </a:pPr>
+            <a:r>
+              <a:rPr lang="en-US" sz="1350" dirty="0">
+                <a:solidFill>
+                  <a:srgbClr val="E8EDF2"/>
+                </a:solidFill>
+                <a:latin typeface="Courier New" pitchFamily="34" charset="0"/>
+                <a:ea typeface="Courier New" pitchFamily="34" charset="-122"/>
+                <a:cs typeface="Courier New" pitchFamily="34" charset="-120"/>
+              </a:rPr>
+              <a:t>#endif</a:t>
+            </a:r>
+            <a:endParaRPr lang="en-US" sz="1350" dirty="0"/>
+          </a:p>
+        </p:txBody>
+      </p:sp>
+      <p:sp>
+        <p:nvSpPr>
+          <p:cNvPr id="6" name="Shape 4"/>
+          <p:cNvSpPr/>
+          <p:nvPr/>
+        </p:nvSpPr>
+        <p:spPr>
+          <a:xfrm>
+            <a:off x="548640" y="4434840"/>
+            <a:ext cx="5349240" cy="1371600"/>
+          </a:xfrm>
+          <a:prstGeom prst="roundRect">
+            <a:avLst>
+              <a:gd name="adj" fmla="val 5333"/>
+            </a:avLst>
+          </a:prstGeom>
+          <a:solidFill>
+            <a:srgbClr val="1E232C"/>
+          </a:solidFill>
+          <a:ln/>
+        </p:spPr>
+      </p:sp>
+      <p:sp>
+        <p:nvSpPr>
+          <p:cNvPr id="7" name="Text 5"/>
+          <p:cNvSpPr/>
+          <p:nvPr/>
+        </p:nvSpPr>
+        <p:spPr>
+          <a:xfrm>
+            <a:off x="777240" y="4572000"/>
+            <a:ext cx="4892040" cy="365760"/>
+          </a:xfrm>
+          <a:prstGeom prst="rect">
+            <a:avLst/>
+          </a:prstGeom>
+          <a:noFill/>
+          <a:ln/>
+        </p:spPr>
+        <p:txBody>
+          <a:bodyPr wrap="square" lIns="0" tIns="0" rIns="0" bIns="0" rtlCol="0" anchor="ctr"/>
+          <a:lstStyle/>
+          <a:p>
+            <a:pPr indent="0" marL="0">
+              <a:buNone/>
+            </a:pPr>
+            <a:r>
+              <a:rPr lang="en-US" sz="1500" b="1" dirty="0">
+                <a:solidFill>
+                  <a:srgbClr val="8CC63F"/>
                 </a:solidFill>
                 <a:latin typeface="Malgun Gothic" pitchFamily="34" charset="0"/>
                 <a:ea typeface="Malgun Gothic" pitchFamily="34" charset="-122"/>
                 <a:cs typeface="Malgun Gothic" pitchFamily="34" charset="-120"/>
               </a:rPr>
-              <a:t>배운 것을 종합해 새 메모리 테스트를 구현합니다. 세 옵션 중 하나를 골라 발표하세요.</a:t>
-            </a:r>
-            <a:endParaRPr lang="en-US" sz="1600" dirty="0"/>
-          </a:p>
-        </p:txBody>
-      </p:sp>
-      <p:sp>
-        <p:nvSpPr>
-          <p:cNvPr id="5" name="Shape 3"/>
-          <p:cNvSpPr/>
-          <p:nvPr/>
-        </p:nvSpPr>
-        <p:spPr>
-          <a:xfrm>
-            <a:off x="548640" y="2148840"/>
-            <a:ext cx="3444240" cy="3566160"/>
+              <a:t>코드는 이렇게 한 벌만</a:t>
+            </a:r>
+            <a:endParaRPr lang="en-US" sz="1500" dirty="0"/>
+          </a:p>
+        </p:txBody>
+      </p:sp>
+      <p:sp>
+        <p:nvSpPr>
+          <p:cNvPr id="8" name="Text 6"/>
+          <p:cNvSpPr/>
+          <p:nvPr/>
+        </p:nvSpPr>
+        <p:spPr>
+          <a:xfrm>
+            <a:off x="777240" y="4983480"/>
+            <a:ext cx="4892040" cy="457200"/>
+          </a:xfrm>
+          <a:prstGeom prst="rect">
+            <a:avLst/>
+          </a:prstGeom>
+          <a:noFill/>
+          <a:ln/>
+        </p:spPr>
+        <p:txBody>
+          <a:bodyPr wrap="square" lIns="0" tIns="0" rIns="0" bIns="0" rtlCol="0" anchor="ctr"/>
+          <a:lstStyle/>
+          <a:p>
+            <a:pPr indent="0" marL="0">
+              <a:buNone/>
+            </a:pPr>
+            <a:r>
+              <a:rPr lang="en-US" sz="1250" dirty="0">
+                <a:solidFill>
+                  <a:srgbClr val="E8EDF2"/>
+                </a:solidFill>
+                <a:latin typeface="Courier New" pitchFamily="34" charset="0"/>
+                <a:ea typeface="Courier New" pitchFamily="34" charset="-122"/>
+                <a:cs typeface="Courier New" pitchFamily="34" charset="-120"/>
+              </a:rPr>
+              <a:t>MEMTEST_API_PREFIX(Malloc)(&amp;ptr, n);</a:t>
+            </a:r>
+            <a:endParaRPr lang="en-US" sz="1250" dirty="0"/>
+          </a:p>
+        </p:txBody>
+      </p:sp>
+      <p:sp>
+        <p:nvSpPr>
+          <p:cNvPr id="9" name="Text 7"/>
+          <p:cNvSpPr/>
+          <p:nvPr/>
+        </p:nvSpPr>
+        <p:spPr>
+          <a:xfrm>
+            <a:off x="777240" y="5394960"/>
+            <a:ext cx="4892040" cy="365760"/>
+          </a:xfrm>
+          <a:prstGeom prst="rect">
+            <a:avLst/>
+          </a:prstGeom>
+          <a:noFill/>
+          <a:ln/>
+        </p:spPr>
+        <p:txBody>
+          <a:bodyPr wrap="square" lIns="0" tIns="0" rIns="0" bIns="0" rtlCol="0" anchor="ctr"/>
+          <a:lstStyle/>
+          <a:p>
+            <a:pPr indent="0" marL="0">
+              <a:buNone/>
+            </a:pPr>
+            <a:r>
+              <a:rPr lang="en-US" sz="1300" dirty="0">
+                <a:solidFill>
+                  <a:srgbClr val="9AA6B2"/>
+                </a:solidFill>
+                <a:latin typeface="Malgun Gothic" pitchFamily="34" charset="0"/>
+                <a:ea typeface="Malgun Gothic" pitchFamily="34" charset="-122"/>
+                <a:cs typeface="Malgun Gothic" pitchFamily="34" charset="-120"/>
+              </a:rPr>
+              <a:t>cudaMalloc을 직접 쓴 곳은 거의 없습니다.</a:t>
+            </a:r>
+            <a:endParaRPr lang="en-US" sz="1300" dirty="0"/>
+          </a:p>
+        </p:txBody>
+      </p:sp>
+      <p:sp>
+        <p:nvSpPr>
+          <p:cNvPr id="10" name="Shape 8"/>
+          <p:cNvSpPr/>
+          <p:nvPr/>
+        </p:nvSpPr>
+        <p:spPr>
+          <a:xfrm>
+            <a:off x="6263640" y="4434840"/>
+            <a:ext cx="5349240" cy="1371600"/>
           </a:xfrm>
           <a:prstGeom prst="roundRect">
             <a:avLst>
-              <a:gd name="adj" fmla="val 2124"/>
+              <a:gd name="adj" fmla="val 5333"/>
             </a:avLst>
           </a:prstGeom>
           <a:solidFill>
@@ -4803,688 +7657,100 @@
       </p:sp>
       <p:sp>
         <p:nvSpPr>
-          <p:cNvPr id="6" name="Text 4"/>
-          <p:cNvSpPr/>
-          <p:nvPr/>
-        </p:nvSpPr>
-        <p:spPr>
-          <a:xfrm>
-            <a:off x="804672" y="2377440"/>
-            <a:ext cx="822960" cy="731520"/>
-          </a:xfrm>
-          <a:prstGeom prst="roundRect">
-            <a:avLst>
-              <a:gd name="adj" fmla="val 12500"/>
-            </a:avLst>
-          </a:prstGeom>
-          <a:solidFill>
-            <a:srgbClr val="8CC63F"/>
-          </a:solidFill>
-          <a:ln/>
-        </p:spPr>
-        <p:txBody>
-          <a:bodyPr wrap="square" rtlCol="0" anchor="ctr"/>
-          <a:lstStyle/>
-          <a:p>
-            <a:pPr algn="ctr" indent="0" marL="0">
-              <a:buNone/>
-            </a:pPr>
-            <a:r>
-              <a:rPr lang="en-US" sz="2600" b="1" dirty="0">
-                <a:solidFill>
-                  <a:srgbClr val="13161C"/>
+          <p:cNvPr id="11" name="Text 9"/>
+          <p:cNvSpPr/>
+          <p:nvPr/>
+        </p:nvSpPr>
+        <p:spPr>
+          <a:xfrm>
+            <a:off x="6492240" y="4572000"/>
+            <a:ext cx="4892040" cy="365760"/>
+          </a:xfrm>
+          <a:prstGeom prst="rect">
+            <a:avLst/>
+          </a:prstGeom>
+          <a:noFill/>
+          <a:ln/>
+        </p:spPr>
+        <p:txBody>
+          <a:bodyPr wrap="square" lIns="0" tIns="0" rIns="0" bIns="0" rtlCol="0" anchor="ctr"/>
+          <a:lstStyle/>
+          <a:p>
+            <a:pPr indent="0" marL="0">
+              <a:buNone/>
+            </a:pPr>
+            <a:r>
+              <a:rPr lang="en-US" sz="1500" b="1" dirty="0">
+                <a:solidFill>
+                  <a:srgbClr val="4FB0C6"/>
+                </a:solidFill>
+                <a:latin typeface="Malgun Gothic" pitchFamily="34" charset="0"/>
+                <a:ea typeface="Malgun Gothic" pitchFamily="34" charset="-122"/>
+                <a:cs typeface="Malgun Gothic" pitchFamily="34" charset="-120"/>
+              </a:rPr>
+              <a:t>컴파일러가 결정</a:t>
+            </a:r>
+            <a:endParaRPr lang="en-US" sz="1500" dirty="0"/>
+          </a:p>
+        </p:txBody>
+      </p:sp>
+      <p:sp>
+        <p:nvSpPr>
+          <p:cNvPr id="12" name="Text 10"/>
+          <p:cNvSpPr/>
+          <p:nvPr/>
+        </p:nvSpPr>
+        <p:spPr>
+          <a:xfrm>
+            <a:off x="6492240" y="4983480"/>
+            <a:ext cx="4892040" cy="731520"/>
+          </a:xfrm>
+          <a:prstGeom prst="rect">
+            <a:avLst/>
+          </a:prstGeom>
+          <a:noFill/>
+          <a:ln/>
+        </p:spPr>
+        <p:txBody>
+          <a:bodyPr wrap="square" lIns="0" tIns="0" rIns="0" bIns="0" rtlCol="0" anchor="t"/>
+          <a:lstStyle/>
+          <a:p>
+            <a:pPr indent="0" marL="0">
+              <a:lnSpc>
+                <a:spcPct val="120000"/>
+              </a:lnSpc>
+              <a:buNone/>
+            </a:pPr>
+            <a:r>
+              <a:rPr lang="en-US" sz="1300" dirty="0">
+                <a:solidFill>
+                  <a:srgbClr val="E8EDF2"/>
                 </a:solidFill>
                 <a:latin typeface="Courier New" pitchFamily="34" charset="0"/>
                 <a:ea typeface="Courier New" pitchFamily="34" charset="-122"/>
                 <a:cs typeface="Courier New" pitchFamily="34" charset="-120"/>
               </a:rPr>
-              <a:t>A</a:t>
-            </a:r>
-            <a:endParaRPr lang="en-US" sz="2600" dirty="0"/>
-          </a:p>
-        </p:txBody>
-      </p:sp>
-      <p:sp>
-        <p:nvSpPr>
-          <p:cNvPr id="7" name="Text 5"/>
-          <p:cNvSpPr/>
-          <p:nvPr/>
-        </p:nvSpPr>
-        <p:spPr>
-          <a:xfrm>
-            <a:off x="2529840" y="2377440"/>
-            <a:ext cx="1234440" cy="731520"/>
-          </a:xfrm>
-          <a:prstGeom prst="rect">
-            <a:avLst/>
-          </a:prstGeom>
-          <a:noFill/>
-          <a:ln/>
-        </p:spPr>
-        <p:txBody>
-          <a:bodyPr wrap="square" lIns="0" tIns="0" rIns="0" bIns="0" rtlCol="0" anchor="ctr"/>
-          <a:lstStyle/>
-          <a:p>
-            <a:pPr algn="r" indent="0" marL="0">
-              <a:buNone/>
-            </a:pPr>
-            <a:r>
-              <a:rPr lang="en-US" sz="1600" dirty="0">
-                <a:solidFill>
-                  <a:srgbClr val="8CC63F"/>
-                </a:solidFill>
-                <a:latin typeface="Malgun Gothic" pitchFamily="34" charset="0"/>
-                <a:ea typeface="Malgun Gothic" pitchFamily="34" charset="-122"/>
-                <a:cs typeface="Malgun Gothic" pitchFamily="34" charset="-120"/>
-              </a:rPr>
-              <a:t>★☆☆</a:t>
-            </a:r>
-            <a:endParaRPr lang="en-US" sz="1600" dirty="0"/>
-          </a:p>
-        </p:txBody>
-      </p:sp>
-      <p:sp>
-        <p:nvSpPr>
-          <p:cNvPr id="8" name="Text 6"/>
-          <p:cNvSpPr/>
-          <p:nvPr/>
-        </p:nvSpPr>
-        <p:spPr>
-          <a:xfrm>
-            <a:off x="804672" y="3246120"/>
-            <a:ext cx="2987040" cy="731520"/>
-          </a:xfrm>
-          <a:prstGeom prst="rect">
-            <a:avLst/>
-          </a:prstGeom>
-          <a:noFill/>
-          <a:ln/>
-        </p:spPr>
-        <p:txBody>
-          <a:bodyPr wrap="square" lIns="0" tIns="0" rIns="0" bIns="0" rtlCol="0" anchor="t"/>
-          <a:lstStyle/>
-          <a:p>
-            <a:pPr indent="0" marL="0">
-              <a:buNone/>
-            </a:pPr>
-            <a:r>
-              <a:rPr lang="en-US" sz="1800" b="1" dirty="0">
+              <a:t>NVIDIA → cudaMalloc</a:t>
+            </a:r>
+            <a:endParaRPr lang="en-US" sz="1300" dirty="0"/>
+          </a:p>
+          <a:p>
+            <a:pPr indent="0" marL="0">
+              <a:lnSpc>
+                <a:spcPct val="120000"/>
+              </a:lnSpc>
+              <a:buNone/>
+            </a:pPr>
+            <a:r>
+              <a:rPr lang="en-US" sz="1300" dirty="0">
                 <a:solidFill>
                   <a:srgbClr val="E8EDF2"/>
-                </a:solidFill>
-                <a:latin typeface="Malgun Gothic" pitchFamily="34" charset="0"/>
-                <a:ea typeface="Malgun Gothic" pitchFamily="34" charset="-122"/>
-                <a:cs typeface="Malgun Gothic" pitchFamily="34" charset="-120"/>
-              </a:rPr>
-              <a:t>체커보드 패턴 테스트</a:t>
-            </a:r>
-            <a:endParaRPr lang="en-US" sz="1800" dirty="0"/>
-          </a:p>
-        </p:txBody>
-      </p:sp>
-      <p:sp>
-        <p:nvSpPr>
-          <p:cNvPr id="9" name="Text 7"/>
-          <p:cNvSpPr/>
-          <p:nvPr/>
-        </p:nvSpPr>
-        <p:spPr>
-          <a:xfrm>
-            <a:off x="804672" y="3977640"/>
-            <a:ext cx="2987040" cy="1097280"/>
-          </a:xfrm>
-          <a:prstGeom prst="rect">
-            <a:avLst/>
-          </a:prstGeom>
-          <a:noFill/>
-          <a:ln/>
-        </p:spPr>
-        <p:txBody>
-          <a:bodyPr wrap="square" lIns="0" tIns="0" rIns="0" bIns="0" rtlCol="0" anchor="t"/>
-          <a:lstStyle/>
-          <a:p>
-            <a:pPr indent="0" marL="0">
-              <a:lnSpc>
-                <a:spcPct val="115000"/>
-              </a:lnSpc>
-              <a:buNone/>
-            </a:pPr>
-            <a:r>
-              <a:rPr lang="en-US" sz="1400" dirty="0">
-                <a:solidFill>
-                  <a:srgbClr val="9AA6B2"/>
-                </a:solidFill>
-                <a:latin typeface="Malgun Gothic" pitchFamily="34" charset="0"/>
-                <a:ea typeface="Malgun Gothic" pitchFamily="34" charset="-122"/>
-                <a:cs typeface="Malgun Gothic" pitchFamily="34" charset="-120"/>
-              </a:rPr>
-              <a:t>0xAAAA / 0x5555 교차 패턴 새 테스트 추가</a:t>
-            </a:r>
-            <a:endParaRPr lang="en-US" sz="1400" dirty="0"/>
-          </a:p>
-        </p:txBody>
-      </p:sp>
-      <p:sp>
-        <p:nvSpPr>
-          <p:cNvPr id="10" name="Text 8"/>
-          <p:cNvSpPr/>
-          <p:nvPr/>
-        </p:nvSpPr>
-        <p:spPr>
-          <a:xfrm>
-            <a:off x="804672" y="5212080"/>
-            <a:ext cx="2987040" cy="365760"/>
-          </a:xfrm>
-          <a:prstGeom prst="rect">
-            <a:avLst/>
-          </a:prstGeom>
-          <a:noFill/>
-          <a:ln/>
-        </p:spPr>
-        <p:txBody>
-          <a:bodyPr wrap="square" lIns="0" tIns="0" rIns="0" bIns="0" rtlCol="0" anchor="ctr"/>
-          <a:lstStyle/>
-          <a:p>
-            <a:pPr indent="0" marL="0">
-              <a:buNone/>
-            </a:pPr>
-            <a:r>
-              <a:rPr lang="en-US" sz="1300" b="1" dirty="0">
-                <a:solidFill>
-                  <a:srgbClr val="8CC63F"/>
-                </a:solidFill>
-                <a:latin typeface="Malgun Gothic" pitchFamily="34" charset="0"/>
-                <a:ea typeface="Malgun Gothic" pitchFamily="34" charset="-122"/>
-                <a:cs typeface="Malgun Gothic" pitchFamily="34" charset="-120"/>
-              </a:rPr>
-              <a:t>세션 1·2 활용</a:t>
-            </a:r>
-            <a:endParaRPr lang="en-US" sz="1300" dirty="0"/>
-          </a:p>
-        </p:txBody>
-      </p:sp>
-      <p:sp>
-        <p:nvSpPr>
-          <p:cNvPr id="11" name="Shape 9"/>
-          <p:cNvSpPr/>
-          <p:nvPr/>
-        </p:nvSpPr>
-        <p:spPr>
-          <a:xfrm>
-            <a:off x="4358640" y="2148840"/>
-            <a:ext cx="3444240" cy="3566160"/>
-          </a:xfrm>
-          <a:prstGeom prst="roundRect">
-            <a:avLst>
-              <a:gd name="adj" fmla="val 2124"/>
-            </a:avLst>
-          </a:prstGeom>
-          <a:solidFill>
-            <a:srgbClr val="1E232C"/>
-          </a:solidFill>
-          <a:ln/>
-        </p:spPr>
-      </p:sp>
-      <p:sp>
-        <p:nvSpPr>
-          <p:cNvPr id="12" name="Text 10"/>
-          <p:cNvSpPr/>
-          <p:nvPr/>
-        </p:nvSpPr>
-        <p:spPr>
-          <a:xfrm>
-            <a:off x="4614672" y="2377440"/>
-            <a:ext cx="822960" cy="731520"/>
-          </a:xfrm>
-          <a:prstGeom prst="roundRect">
-            <a:avLst>
-              <a:gd name="adj" fmla="val 12500"/>
-            </a:avLst>
-          </a:prstGeom>
-          <a:solidFill>
-            <a:srgbClr val="4FB0C6"/>
-          </a:solidFill>
-          <a:ln/>
-        </p:spPr>
-        <p:txBody>
-          <a:bodyPr wrap="square" rtlCol="0" anchor="ctr"/>
-          <a:lstStyle/>
-          <a:p>
-            <a:pPr algn="ctr" indent="0" marL="0">
-              <a:buNone/>
-            </a:pPr>
-            <a:r>
-              <a:rPr lang="en-US" sz="2600" b="1" dirty="0">
-                <a:solidFill>
-                  <a:srgbClr val="13161C"/>
                 </a:solidFill>
                 <a:latin typeface="Courier New" pitchFamily="34" charset="0"/>
                 <a:ea typeface="Courier New" pitchFamily="34" charset="-122"/>
                 <a:cs typeface="Courier New" pitchFamily="34" charset="-120"/>
               </a:rPr>
-              <a:t>B</a:t>
-            </a:r>
-            <a:endParaRPr lang="en-US" sz="2600" dirty="0"/>
-          </a:p>
-        </p:txBody>
-      </p:sp>
-      <p:sp>
-        <p:nvSpPr>
-          <p:cNvPr id="13" name="Text 11"/>
-          <p:cNvSpPr/>
-          <p:nvPr/>
-        </p:nvSpPr>
-        <p:spPr>
-          <a:xfrm>
-            <a:off x="6339840" y="2377440"/>
-            <a:ext cx="1234440" cy="731520"/>
-          </a:xfrm>
-          <a:prstGeom prst="rect">
-            <a:avLst/>
-          </a:prstGeom>
-          <a:noFill/>
-          <a:ln/>
-        </p:spPr>
-        <p:txBody>
-          <a:bodyPr wrap="square" lIns="0" tIns="0" rIns="0" bIns="0" rtlCol="0" anchor="ctr"/>
-          <a:lstStyle/>
-          <a:p>
-            <a:pPr algn="r" indent="0" marL="0">
-              <a:buNone/>
-            </a:pPr>
-            <a:r>
-              <a:rPr lang="en-US" sz="1600" dirty="0">
-                <a:solidFill>
-                  <a:srgbClr val="4FB0C6"/>
-                </a:solidFill>
-                <a:latin typeface="Malgun Gothic" pitchFamily="34" charset="0"/>
-                <a:ea typeface="Malgun Gothic" pitchFamily="34" charset="-122"/>
-                <a:cs typeface="Malgun Gothic" pitchFamily="34" charset="-120"/>
-              </a:rPr>
-              <a:t>★★☆</a:t>
-            </a:r>
-            <a:endParaRPr lang="en-US" sz="1600" dirty="0"/>
-          </a:p>
-        </p:txBody>
-      </p:sp>
-      <p:sp>
-        <p:nvSpPr>
-          <p:cNvPr id="14" name="Text 12"/>
-          <p:cNvSpPr/>
-          <p:nvPr/>
-        </p:nvSpPr>
-        <p:spPr>
-          <a:xfrm>
-            <a:off x="4614672" y="3246120"/>
-            <a:ext cx="2987040" cy="731520"/>
-          </a:xfrm>
-          <a:prstGeom prst="rect">
-            <a:avLst/>
-          </a:prstGeom>
-          <a:noFill/>
-          <a:ln/>
-        </p:spPr>
-        <p:txBody>
-          <a:bodyPr wrap="square" lIns="0" tIns="0" rIns="0" bIns="0" rtlCol="0" anchor="t"/>
-          <a:lstStyle/>
-          <a:p>
-            <a:pPr indent="0" marL="0">
-              <a:buNone/>
-            </a:pPr>
-            <a:r>
-              <a:rPr lang="en-US" sz="1800" b="1" dirty="0">
-                <a:solidFill>
-                  <a:srgbClr val="E8EDF2"/>
-                </a:solidFill>
-                <a:latin typeface="Malgun Gothic" pitchFamily="34" charset="0"/>
-                <a:ea typeface="Malgun Gothic" pitchFamily="34" charset="-122"/>
-                <a:cs typeface="Malgun Gothic" pitchFamily="34" charset="-120"/>
-              </a:rPr>
-              <a:t>Test 3 성능 개선</a:t>
-            </a:r>
-            <a:endParaRPr lang="en-US" sz="1800" dirty="0"/>
-          </a:p>
-        </p:txBody>
-      </p:sp>
-      <p:sp>
-        <p:nvSpPr>
-          <p:cNvPr id="15" name="Text 13"/>
-          <p:cNvSpPr/>
-          <p:nvPr/>
-        </p:nvSpPr>
-        <p:spPr>
-          <a:xfrm>
-            <a:off x="4614672" y="3977640"/>
-            <a:ext cx="2987040" cy="1097280"/>
-          </a:xfrm>
-          <a:prstGeom prst="rect">
-            <a:avLst/>
-          </a:prstGeom>
-          <a:noFill/>
-          <a:ln/>
-        </p:spPr>
-        <p:txBody>
-          <a:bodyPr wrap="square" lIns="0" tIns="0" rIns="0" bIns="0" rtlCol="0" anchor="t"/>
-          <a:lstStyle/>
-          <a:p>
-            <a:pPr indent="0" marL="0">
-              <a:lnSpc>
-                <a:spcPct val="115000"/>
-              </a:lnSpc>
-              <a:buNone/>
-            </a:pPr>
-            <a:r>
-              <a:rPr lang="en-US" sz="1400" dirty="0">
-                <a:solidFill>
-                  <a:srgbClr val="9AA6B2"/>
-                </a:solidFill>
-                <a:latin typeface="Malgun Gothic" pitchFamily="34" charset="0"/>
-                <a:ea typeface="Malgun Gothic" pitchFamily="34" charset="-122"/>
-                <a:cs typeface="Malgun Gothic" pitchFamily="34" charset="-120"/>
-              </a:rPr>
-              <a:t>느린 Test 3을 Test 10 스타일로 재작성·대역폭 비교</a:t>
-            </a:r>
-            <a:endParaRPr lang="en-US" sz="1400" dirty="0"/>
-          </a:p>
-        </p:txBody>
-      </p:sp>
-      <p:sp>
-        <p:nvSpPr>
-          <p:cNvPr id="16" name="Text 14"/>
-          <p:cNvSpPr/>
-          <p:nvPr/>
-        </p:nvSpPr>
-        <p:spPr>
-          <a:xfrm>
-            <a:off x="4614672" y="5212080"/>
-            <a:ext cx="2987040" cy="365760"/>
-          </a:xfrm>
-          <a:prstGeom prst="rect">
-            <a:avLst/>
-          </a:prstGeom>
-          <a:noFill/>
-          <a:ln/>
-        </p:spPr>
-        <p:txBody>
-          <a:bodyPr wrap="square" lIns="0" tIns="0" rIns="0" bIns="0" rtlCol="0" anchor="ctr"/>
-          <a:lstStyle/>
-          <a:p>
-            <a:pPr indent="0" marL="0">
-              <a:buNone/>
-            </a:pPr>
-            <a:r>
-              <a:rPr lang="en-US" sz="1300" b="1" dirty="0">
-                <a:solidFill>
-                  <a:srgbClr val="4FB0C6"/>
-                </a:solidFill>
-                <a:latin typeface="Malgun Gothic" pitchFamily="34" charset="0"/>
-                <a:ea typeface="Malgun Gothic" pitchFamily="34" charset="-122"/>
-                <a:cs typeface="Malgun Gothic" pitchFamily="34" charset="-120"/>
-              </a:rPr>
-              <a:t>세션 3 활용</a:t>
-            </a:r>
-            <a:endParaRPr lang="en-US" sz="1300" dirty="0"/>
-          </a:p>
-        </p:txBody>
-      </p:sp>
-      <p:sp>
-        <p:nvSpPr>
-          <p:cNvPr id="17" name="Shape 15"/>
-          <p:cNvSpPr/>
-          <p:nvPr/>
-        </p:nvSpPr>
-        <p:spPr>
-          <a:xfrm>
-            <a:off x="8168640" y="2148840"/>
-            <a:ext cx="3444240" cy="3566160"/>
-          </a:xfrm>
-          <a:prstGeom prst="roundRect">
-            <a:avLst>
-              <a:gd name="adj" fmla="val 2124"/>
-            </a:avLst>
-          </a:prstGeom>
-          <a:solidFill>
-            <a:srgbClr val="1E232C"/>
-          </a:solidFill>
-          <a:ln/>
-        </p:spPr>
-      </p:sp>
-      <p:sp>
-        <p:nvSpPr>
-          <p:cNvPr id="18" name="Text 16"/>
-          <p:cNvSpPr/>
-          <p:nvPr/>
-        </p:nvSpPr>
-        <p:spPr>
-          <a:xfrm>
-            <a:off x="8424672" y="2377440"/>
-            <a:ext cx="822960" cy="731520"/>
-          </a:xfrm>
-          <a:prstGeom prst="roundRect">
-            <a:avLst>
-              <a:gd name="adj" fmla="val 12500"/>
-            </a:avLst>
-          </a:prstGeom>
-          <a:solidFill>
-            <a:srgbClr val="E0A458"/>
-          </a:solidFill>
-          <a:ln/>
-        </p:spPr>
-        <p:txBody>
-          <a:bodyPr wrap="square" rtlCol="0" anchor="ctr"/>
-          <a:lstStyle/>
-          <a:p>
-            <a:pPr algn="ctr" indent="0" marL="0">
-              <a:buNone/>
-            </a:pPr>
-            <a:r>
-              <a:rPr lang="en-US" sz="2600" b="1" dirty="0">
-                <a:solidFill>
-                  <a:srgbClr val="13161C"/>
-                </a:solidFill>
-                <a:latin typeface="Courier New" pitchFamily="34" charset="0"/>
-                <a:ea typeface="Courier New" pitchFamily="34" charset="-122"/>
-                <a:cs typeface="Courier New" pitchFamily="34" charset="-120"/>
-              </a:rPr>
-              <a:t>C</a:t>
-            </a:r>
-            <a:endParaRPr lang="en-US" sz="2600" dirty="0"/>
-          </a:p>
-        </p:txBody>
-      </p:sp>
-      <p:sp>
-        <p:nvSpPr>
-          <p:cNvPr id="19" name="Text 17"/>
-          <p:cNvSpPr/>
-          <p:nvPr/>
-        </p:nvSpPr>
-        <p:spPr>
-          <a:xfrm>
-            <a:off x="10149840" y="2377440"/>
-            <a:ext cx="1234440" cy="731520"/>
-          </a:xfrm>
-          <a:prstGeom prst="rect">
-            <a:avLst/>
-          </a:prstGeom>
-          <a:noFill/>
-          <a:ln/>
-        </p:spPr>
-        <p:txBody>
-          <a:bodyPr wrap="square" lIns="0" tIns="0" rIns="0" bIns="0" rtlCol="0" anchor="ctr"/>
-          <a:lstStyle/>
-          <a:p>
-            <a:pPr algn="r" indent="0" marL="0">
-              <a:buNone/>
-            </a:pPr>
-            <a:r>
-              <a:rPr lang="en-US" sz="1600" dirty="0">
-                <a:solidFill>
-                  <a:srgbClr val="E0A458"/>
-                </a:solidFill>
-                <a:latin typeface="Malgun Gothic" pitchFamily="34" charset="0"/>
-                <a:ea typeface="Malgun Gothic" pitchFamily="34" charset="-122"/>
-                <a:cs typeface="Malgun Gothic" pitchFamily="34" charset="-120"/>
-              </a:rPr>
-              <a:t>★★★</a:t>
-            </a:r>
-            <a:endParaRPr lang="en-US" sz="1600" dirty="0"/>
-          </a:p>
-        </p:txBody>
-      </p:sp>
-      <p:sp>
-        <p:nvSpPr>
-          <p:cNvPr id="20" name="Text 18"/>
-          <p:cNvSpPr/>
-          <p:nvPr/>
-        </p:nvSpPr>
-        <p:spPr>
-          <a:xfrm>
-            <a:off x="8424672" y="3246120"/>
-            <a:ext cx="2987040" cy="731520"/>
-          </a:xfrm>
-          <a:prstGeom prst="rect">
-            <a:avLst/>
-          </a:prstGeom>
-          <a:noFill/>
-          <a:ln/>
-        </p:spPr>
-        <p:txBody>
-          <a:bodyPr wrap="square" lIns="0" tIns="0" rIns="0" bIns="0" rtlCol="0" anchor="t"/>
-          <a:lstStyle/>
-          <a:p>
-            <a:pPr indent="0" marL="0">
-              <a:buNone/>
-            </a:pPr>
-            <a:r>
-              <a:rPr lang="en-US" sz="1800" b="1" dirty="0">
-                <a:solidFill>
-                  <a:srgbClr val="E8EDF2"/>
-                </a:solidFill>
-                <a:latin typeface="Malgun Gothic" pitchFamily="34" charset="0"/>
-                <a:ea typeface="Malgun Gothic" pitchFamily="34" charset="-122"/>
-                <a:cs typeface="Malgun Gothic" pitchFamily="34" charset="-120"/>
-              </a:rPr>
-              <a:t>오류 히스토그램</a:t>
-            </a:r>
-            <a:endParaRPr lang="en-US" sz="1800" dirty="0"/>
-          </a:p>
-        </p:txBody>
-      </p:sp>
-      <p:sp>
-        <p:nvSpPr>
-          <p:cNvPr id="21" name="Text 19"/>
-          <p:cNvSpPr/>
-          <p:nvPr/>
-        </p:nvSpPr>
-        <p:spPr>
-          <a:xfrm>
-            <a:off x="8424672" y="3977640"/>
-            <a:ext cx="2987040" cy="1097280"/>
-          </a:xfrm>
-          <a:prstGeom prst="rect">
-            <a:avLst/>
-          </a:prstGeom>
-          <a:noFill/>
-          <a:ln/>
-        </p:spPr>
-        <p:txBody>
-          <a:bodyPr wrap="square" lIns="0" tIns="0" rIns="0" bIns="0" rtlCol="0" anchor="t"/>
-          <a:lstStyle/>
-          <a:p>
-            <a:pPr indent="0" marL="0">
-              <a:lnSpc>
-                <a:spcPct val="115000"/>
-              </a:lnSpc>
-              <a:buNone/>
-            </a:pPr>
-            <a:r>
-              <a:rPr lang="en-US" sz="1400" dirty="0">
-                <a:solidFill>
-                  <a:srgbClr val="9AA6B2"/>
-                </a:solidFill>
-                <a:latin typeface="Malgun Gothic" pitchFamily="34" charset="0"/>
-                <a:ea typeface="Malgun Gothic" pitchFamily="34" charset="-122"/>
-                <a:cs typeface="Malgun Gothic" pitchFamily="34" charset="-120"/>
-              </a:rPr>
-              <a:t>오류 주소의 비트 패턴을 집계해 출력</a:t>
-            </a:r>
-            <a:endParaRPr lang="en-US" sz="1400" dirty="0"/>
-          </a:p>
-        </p:txBody>
-      </p:sp>
-      <p:sp>
-        <p:nvSpPr>
-          <p:cNvPr id="22" name="Text 20"/>
-          <p:cNvSpPr/>
-          <p:nvPr/>
-        </p:nvSpPr>
-        <p:spPr>
-          <a:xfrm>
-            <a:off x="8424672" y="5212080"/>
-            <a:ext cx="2987040" cy="365760"/>
-          </a:xfrm>
-          <a:prstGeom prst="rect">
-            <a:avLst/>
-          </a:prstGeom>
-          <a:noFill/>
-          <a:ln/>
-        </p:spPr>
-        <p:txBody>
-          <a:bodyPr wrap="square" lIns="0" tIns="0" rIns="0" bIns="0" rtlCol="0" anchor="ctr"/>
-          <a:lstStyle/>
-          <a:p>
-            <a:pPr indent="0" marL="0">
-              <a:buNone/>
-            </a:pPr>
-            <a:r>
-              <a:rPr lang="en-US" sz="1300" b="1" dirty="0">
-                <a:solidFill>
-                  <a:srgbClr val="E0A458"/>
-                </a:solidFill>
-                <a:latin typeface="Malgun Gothic" pitchFamily="34" charset="0"/>
-                <a:ea typeface="Malgun Gothic" pitchFamily="34" charset="-122"/>
-                <a:cs typeface="Malgun Gothic" pitchFamily="34" charset="-120"/>
-              </a:rPr>
-              <a:t>세션 4 활용</a:t>
-            </a:r>
-            <a:endParaRPr lang="en-US" sz="1300" dirty="0"/>
-          </a:p>
-        </p:txBody>
-      </p:sp>
-      <p:sp>
-        <p:nvSpPr>
-          <p:cNvPr id="23" name="Text 21"/>
-          <p:cNvSpPr/>
-          <p:nvPr/>
-        </p:nvSpPr>
-        <p:spPr>
-          <a:xfrm>
-            <a:off x="548640" y="5897880"/>
-            <a:ext cx="11064240" cy="457200"/>
-          </a:xfrm>
-          <a:prstGeom prst="rect">
-            <a:avLst/>
-          </a:prstGeom>
-          <a:noFill/>
-          <a:ln/>
-        </p:spPr>
-        <p:txBody>
-          <a:bodyPr wrap="square" lIns="0" tIns="0" rIns="0" bIns="0" rtlCol="0" anchor="ctr"/>
-          <a:lstStyle/>
-          <a:p>
-            <a:pPr algn="ctr" indent="0" marL="0">
-              <a:buNone/>
-            </a:pPr>
-            <a:r>
-              <a:rPr lang="en-US" sz="1300" i="1" dirty="0">
-                <a:solidFill>
-                  <a:srgbClr val="9AA6B2"/>
-                </a:solidFill>
-                <a:latin typeface="Malgun Gothic" pitchFamily="34" charset="0"/>
-                <a:ea typeface="Malgun Gothic" pitchFamily="34" charset="-122"/>
-                <a:cs typeface="Malgun Gothic" pitchFamily="34" charset="-120"/>
-              </a:rPr>
-              <a:t>실습 가이드는 가장 쉬운 옵션 A(체커보드)를 단계별로 제공합니다 — move_inv_test를 재사용합니다.</a:t>
+              <a:t>AMD → hipMalloc</a:t>
             </a:r>
             <a:endParaRPr lang="en-US" sz="1300" dirty="0"/>
           </a:p>
@@ -5559,7 +7825,7 @@
                 <a:ea typeface="Courier New" pitchFamily="34" charset="-122"/>
                 <a:cs typeface="Courier New" pitchFamily="34" charset="-120"/>
               </a:rPr>
-              <a:t>6</a:t>
+              <a:t>5</a:t>
             </a:r>
             <a:endParaRPr lang="en-US" sz="2200" dirty="0"/>
           </a:p>
@@ -5598,7 +7864,7 @@
                 <a:ea typeface="Malgun Gothic" pitchFamily="34" charset="-122"/>
                 <a:cs typeface="Malgun Gothic" pitchFamily="34" charset="-120"/>
               </a:rPr>
-              <a:t>옵션 A · 체커보드 테스트 4단계</a:t>
+              <a:t>캡스톤 · 나만의 테스트 추가</a:t>
             </a:r>
             <a:endParaRPr lang="en-US" sz="3000" dirty="0"/>
           </a:p>
@@ -5606,18 +7872,57 @@
       </p:sp>
       <p:sp>
         <p:nvSpPr>
-          <p:cNvPr id="4" name="Shape 2"/>
-          <p:cNvSpPr/>
-          <p:nvPr/>
-        </p:nvSpPr>
-        <p:spPr>
-          <a:xfrm>
-            <a:off x="548640" y="1600200"/>
-            <a:ext cx="11064240" cy="932688"/>
+          <p:cNvPr id="4" name="Text 2"/>
+          <p:cNvSpPr/>
+          <p:nvPr/>
+        </p:nvSpPr>
+        <p:spPr>
+          <a:xfrm>
+            <a:off x="548640" y="1463040"/>
+            <a:ext cx="11064240" cy="457200"/>
+          </a:xfrm>
+          <a:prstGeom prst="rect">
+            <a:avLst/>
+          </a:prstGeom>
+          <a:noFill/>
+          <a:ln/>
+        </p:spPr>
+        <p:txBody>
+          <a:bodyPr wrap="square" lIns="0" tIns="0" rIns="0" bIns="0" rtlCol="0" anchor="ctr"/>
+          <a:lstStyle/>
+          <a:p>
+            <a:pPr indent="0" marL="0">
+              <a:buNone/>
+            </a:pPr>
+            <a:r>
+              <a:rPr lang="en-US" sz="1600" dirty="0">
+                <a:solidFill>
+                  <a:srgbClr val="9AA6B2"/>
+                </a:solidFill>
+                <a:latin typeface="Malgun Gothic" pitchFamily="34" charset="0"/>
+                <a:ea typeface="Malgun Gothic" pitchFamily="34" charset="-122"/>
+                <a:cs typeface="Malgun Gothic" pitchFamily="34" charset="-120"/>
+              </a:rPr>
+              <a:t>배운 것을 종합해 새 메모리 테스트를 구현합니다. 세 옵션 중 하나를 골라 발표하세요.</a:t>
+            </a:r>
+            <a:endParaRPr lang="en-US" sz="1600" dirty="0"/>
+          </a:p>
+        </p:txBody>
+      </p:sp>
+      <p:sp>
+        <p:nvSpPr>
+          <p:cNvPr id="5" name="Shape 3"/>
+          <p:cNvSpPr/>
+          <p:nvPr/>
+        </p:nvSpPr>
+        <p:spPr>
+          <a:xfrm>
+            <a:off x="548640" y="2148840"/>
+            <a:ext cx="3444240" cy="3566160"/>
           </a:xfrm>
           <a:prstGeom prst="roundRect">
             <a:avLst>
-              <a:gd name="adj" fmla="val 7843"/>
+              <a:gd name="adj" fmla="val 2124"/>
             </a:avLst>
           </a:prstGeom>
           <a:solidFill>
@@ -5628,18 +7933,18 @@
       </p:sp>
       <p:sp>
         <p:nvSpPr>
-          <p:cNvPr id="5" name="Text 3"/>
-          <p:cNvSpPr/>
-          <p:nvPr/>
-        </p:nvSpPr>
-        <p:spPr>
-          <a:xfrm>
-            <a:off x="777240" y="1773936"/>
-            <a:ext cx="585216" cy="585216"/>
+          <p:cNvPr id="6" name="Text 4"/>
+          <p:cNvSpPr/>
+          <p:nvPr/>
+        </p:nvSpPr>
+        <p:spPr>
+          <a:xfrm>
+            <a:off x="804672" y="2377440"/>
+            <a:ext cx="822960" cy="731520"/>
           </a:xfrm>
           <a:prstGeom prst="roundRect">
             <a:avLst>
-              <a:gd name="adj" fmla="val 15625"/>
+              <a:gd name="adj" fmla="val 12500"/>
             </a:avLst>
           </a:prstGeom>
           <a:solidFill>
@@ -5655,7 +7960,7 @@
               <a:buNone/>
             </a:pPr>
             <a:r>
-              <a:rPr lang="en-US" sz="2200" b="1" dirty="0">
+              <a:rPr lang="en-US" sz="2600" b="1" dirty="0">
                 <a:solidFill>
                   <a:srgbClr val="13161C"/>
                 </a:solidFill>
@@ -5663,85 +7968,127 @@
                 <a:ea typeface="Courier New" pitchFamily="34" charset="-122"/>
                 <a:cs typeface="Courier New" pitchFamily="34" charset="-120"/>
               </a:rPr>
-              <a:t>1</a:t>
-            </a:r>
-            <a:endParaRPr lang="en-US" sz="2200" dirty="0"/>
-          </a:p>
-        </p:txBody>
-      </p:sp>
-      <p:sp>
-        <p:nvSpPr>
-          <p:cNvPr id="6" name="Text 4"/>
-          <p:cNvSpPr/>
-          <p:nvPr/>
-        </p:nvSpPr>
-        <p:spPr>
-          <a:xfrm>
-            <a:off x="1600200" y="1709928"/>
-            <a:ext cx="9784080" cy="402336"/>
-          </a:xfrm>
-          <a:prstGeom prst="rect">
-            <a:avLst/>
-          </a:prstGeom>
-          <a:noFill/>
-          <a:ln/>
-        </p:spPr>
-        <p:txBody>
-          <a:bodyPr wrap="square" lIns="0" tIns="0" rIns="0" bIns="0" rtlCol="0" anchor="ctr"/>
-          <a:lstStyle/>
-          <a:p>
-            <a:pPr indent="0" marL="0">
-              <a:buNone/>
-            </a:pPr>
-            <a:r>
-              <a:rPr lang="en-US" sz="1800" b="1" dirty="0">
-                <a:solidFill>
-                  <a:srgbClr val="E8EDF2"/>
+              <a:t>A</a:t>
+            </a:r>
+            <a:endParaRPr lang="en-US" sz="2600" dirty="0"/>
+          </a:p>
+        </p:txBody>
+      </p:sp>
+      <p:sp>
+        <p:nvSpPr>
+          <p:cNvPr id="7" name="Text 5"/>
+          <p:cNvSpPr/>
+          <p:nvPr/>
+        </p:nvSpPr>
+        <p:spPr>
+          <a:xfrm>
+            <a:off x="2529840" y="2377440"/>
+            <a:ext cx="1234440" cy="731520"/>
+          </a:xfrm>
+          <a:prstGeom prst="rect">
+            <a:avLst/>
+          </a:prstGeom>
+          <a:noFill/>
+          <a:ln/>
+        </p:spPr>
+        <p:txBody>
+          <a:bodyPr wrap="square" lIns="0" tIns="0" rIns="0" bIns="0" rtlCol="0" anchor="ctr"/>
+          <a:lstStyle/>
+          <a:p>
+            <a:pPr algn="r" indent="0" marL="0">
+              <a:buNone/>
+            </a:pPr>
+            <a:r>
+              <a:rPr lang="en-US" sz="1600" dirty="0">
+                <a:solidFill>
+                  <a:srgbClr val="8CC63F"/>
                 </a:solidFill>
                 <a:latin typeface="Malgun Gothic" pitchFamily="34" charset="0"/>
                 <a:ea typeface="Malgun Gothic" pitchFamily="34" charset="-122"/>
                 <a:cs typeface="Malgun Gothic" pitchFamily="34" charset="-120"/>
               </a:rPr>
-              <a:t>새 테스트 함수 작성</a:t>
-            </a:r>
-            <a:endParaRPr lang="en-US" sz="1800" dirty="0"/>
-          </a:p>
-        </p:txBody>
-      </p:sp>
-      <p:sp>
-        <p:nvSpPr>
-          <p:cNvPr id="7" name="Text 5"/>
-          <p:cNvSpPr/>
-          <p:nvPr/>
-        </p:nvSpPr>
-        <p:spPr>
-          <a:xfrm>
-            <a:off x="1600200" y="2093976"/>
-            <a:ext cx="9784080" cy="384048"/>
-          </a:xfrm>
-          <a:prstGeom prst="rect">
-            <a:avLst/>
-          </a:prstGeom>
-          <a:noFill/>
-          <a:ln/>
-        </p:spPr>
-        <p:txBody>
-          <a:bodyPr wrap="square" lIns="0" tIns="0" rIns="0" bIns="0" rtlCol="0" anchor="ctr"/>
-          <a:lstStyle/>
-          <a:p>
-            <a:pPr indent="0" marL="0">
-              <a:buNone/>
-            </a:pPr>
-            <a:r>
-              <a:rPr lang="en-US" sz="1400" dirty="0">
-                <a:solidFill>
-                  <a:srgbClr val="9AA6B2"/>
+              <a:t>★☆☆</a:t>
+            </a:r>
+            <a:endParaRPr lang="en-US" sz="1600" dirty="0"/>
+          </a:p>
+        </p:txBody>
+      </p:sp>
+      <p:sp>
+        <p:nvSpPr>
+          <p:cNvPr id="8" name="Text 6"/>
+          <p:cNvSpPr/>
+          <p:nvPr/>
+        </p:nvSpPr>
+        <p:spPr>
+          <a:xfrm>
+            <a:off x="804672" y="3246120"/>
+            <a:ext cx="2987040" cy="731520"/>
+          </a:xfrm>
+          <a:prstGeom prst="rect">
+            <a:avLst/>
+          </a:prstGeom>
+          <a:noFill/>
+          <a:ln/>
+        </p:spPr>
+        <p:txBody>
+          <a:bodyPr wrap="square" lIns="0" tIns="0" rIns="0" bIns="0" rtlCol="0" anchor="t"/>
+          <a:lstStyle/>
+          <a:p>
+            <a:pPr indent="0" marL="0">
+              <a:buNone/>
+            </a:pPr>
+            <a:r>
+              <a:rPr lang="en-US" sz="1800" b="1" dirty="0">
+                <a:solidFill>
+                  <a:srgbClr val="E8EDF2"/>
                 </a:solidFill>
                 <a:latin typeface="Malgun Gothic" pitchFamily="34" charset="0"/>
                 <a:ea typeface="Malgun Gothic" pitchFamily="34" charset="-122"/>
                 <a:cs typeface="Malgun Gothic" pitchFamily="34" charset="-120"/>
               </a:rPr>
-              <a:t>move_inv_test에 p1=0xAAAAAAAA, p2=0x55555555 전달 (tests.cpp)</a:t>
+              <a:t>체커보드 패턴 테스트</a:t>
+            </a:r>
+            <a:endParaRPr lang="en-US" sz="1800" dirty="0"/>
+          </a:p>
+        </p:txBody>
+      </p:sp>
+      <p:sp>
+        <p:nvSpPr>
+          <p:cNvPr id="9" name="Text 7"/>
+          <p:cNvSpPr/>
+          <p:nvPr/>
+        </p:nvSpPr>
+        <p:spPr>
+          <a:xfrm>
+            <a:off x="804672" y="3977640"/>
+            <a:ext cx="2987040" cy="1097280"/>
+          </a:xfrm>
+          <a:prstGeom prst="rect">
+            <a:avLst/>
+          </a:prstGeom>
+          <a:noFill/>
+          <a:ln/>
+        </p:spPr>
+        <p:txBody>
+          <a:bodyPr wrap="square" lIns="0" tIns="0" rIns="0" bIns="0" rtlCol="0" anchor="t"/>
+          <a:lstStyle/>
+          <a:p>
+            <a:pPr indent="0" marL="0">
+              <a:lnSpc>
+                <a:spcPct val="115000"/>
+              </a:lnSpc>
+              <a:buNone/>
+            </a:pPr>
+            <a:r>
+              <a:rPr lang="en-US" sz="1400" dirty="0">
+                <a:solidFill>
+                  <a:srgbClr val="9AA6B2"/>
+                </a:solidFill>
+                <a:latin typeface="Malgun Gothic" pitchFamily="34" charset="0"/>
+                <a:ea typeface="Malgun Gothic" pitchFamily="34" charset="-122"/>
+                <a:cs typeface="Malgun Gothic" pitchFamily="34" charset="-120"/>
+              </a:rPr>
+              <a:t>0xAAAA / 0x5555 교차 패턴 새 테스트 추가</a:t>
             </a:r>
             <a:endParaRPr lang="en-US" sz="1400" dirty="0"/>
           </a:p>
@@ -5749,18 +8096,57 @@
       </p:sp>
       <p:sp>
         <p:nvSpPr>
-          <p:cNvPr id="8" name="Shape 6"/>
-          <p:cNvSpPr/>
-          <p:nvPr/>
-        </p:nvSpPr>
-        <p:spPr>
-          <a:xfrm>
-            <a:off x="548640" y="2660904"/>
-            <a:ext cx="11064240" cy="932688"/>
+          <p:cNvPr id="10" name="Text 8"/>
+          <p:cNvSpPr/>
+          <p:nvPr/>
+        </p:nvSpPr>
+        <p:spPr>
+          <a:xfrm>
+            <a:off x="804672" y="5212080"/>
+            <a:ext cx="2987040" cy="365760"/>
+          </a:xfrm>
+          <a:prstGeom prst="rect">
+            <a:avLst/>
+          </a:prstGeom>
+          <a:noFill/>
+          <a:ln/>
+        </p:spPr>
+        <p:txBody>
+          <a:bodyPr wrap="square" lIns="0" tIns="0" rIns="0" bIns="0" rtlCol="0" anchor="ctr"/>
+          <a:lstStyle/>
+          <a:p>
+            <a:pPr indent="0" marL="0">
+              <a:buNone/>
+            </a:pPr>
+            <a:r>
+              <a:rPr lang="en-US" sz="1300" b="1" dirty="0">
+                <a:solidFill>
+                  <a:srgbClr val="8CC63F"/>
+                </a:solidFill>
+                <a:latin typeface="Malgun Gothic" pitchFamily="34" charset="0"/>
+                <a:ea typeface="Malgun Gothic" pitchFamily="34" charset="-122"/>
+                <a:cs typeface="Malgun Gothic" pitchFamily="34" charset="-120"/>
+              </a:rPr>
+              <a:t>세션 1·2 활용</a:t>
+            </a:r>
+            <a:endParaRPr lang="en-US" sz="1300" dirty="0"/>
+          </a:p>
+        </p:txBody>
+      </p:sp>
+      <p:sp>
+        <p:nvSpPr>
+          <p:cNvPr id="11" name="Shape 9"/>
+          <p:cNvSpPr/>
+          <p:nvPr/>
+        </p:nvSpPr>
+        <p:spPr>
+          <a:xfrm>
+            <a:off x="4358640" y="2148840"/>
+            <a:ext cx="3444240" cy="3566160"/>
           </a:xfrm>
           <a:prstGeom prst="roundRect">
             <a:avLst>
-              <a:gd name="adj" fmla="val 7843"/>
+              <a:gd name="adj" fmla="val 2124"/>
             </a:avLst>
           </a:prstGeom>
           <a:solidFill>
@@ -5771,18 +8157,18 @@
       </p:sp>
       <p:sp>
         <p:nvSpPr>
-          <p:cNvPr id="9" name="Text 7"/>
-          <p:cNvSpPr/>
-          <p:nvPr/>
-        </p:nvSpPr>
-        <p:spPr>
-          <a:xfrm>
-            <a:off x="777240" y="2834640"/>
-            <a:ext cx="585216" cy="585216"/>
+          <p:cNvPr id="12" name="Text 10"/>
+          <p:cNvSpPr/>
+          <p:nvPr/>
+        </p:nvSpPr>
+        <p:spPr>
+          <a:xfrm>
+            <a:off x="4614672" y="2377440"/>
+            <a:ext cx="822960" cy="731520"/>
           </a:xfrm>
           <a:prstGeom prst="roundRect">
             <a:avLst>
-              <a:gd name="adj" fmla="val 15625"/>
+              <a:gd name="adj" fmla="val 12500"/>
             </a:avLst>
           </a:prstGeom>
           <a:solidFill>
@@ -5798,7 +8184,7 @@
               <a:buNone/>
             </a:pPr>
             <a:r>
-              <a:rPr lang="en-US" sz="2200" b="1" dirty="0">
+              <a:rPr lang="en-US" sz="2600" b="1" dirty="0">
                 <a:solidFill>
                   <a:srgbClr val="13161C"/>
                 </a:solidFill>
@@ -5806,85 +8192,127 @@
                 <a:ea typeface="Courier New" pitchFamily="34" charset="-122"/>
                 <a:cs typeface="Courier New" pitchFamily="34" charset="-120"/>
               </a:rPr>
-              <a:t>2</a:t>
-            </a:r>
-            <a:endParaRPr lang="en-US" sz="2200" dirty="0"/>
-          </a:p>
-        </p:txBody>
-      </p:sp>
-      <p:sp>
-        <p:nvSpPr>
-          <p:cNvPr id="10" name="Text 8"/>
-          <p:cNvSpPr/>
-          <p:nvPr/>
-        </p:nvSpPr>
-        <p:spPr>
-          <a:xfrm>
-            <a:off x="1600200" y="2770632"/>
-            <a:ext cx="9784080" cy="402336"/>
-          </a:xfrm>
-          <a:prstGeom prst="rect">
-            <a:avLst/>
-          </a:prstGeom>
-          <a:noFill/>
-          <a:ln/>
-        </p:spPr>
-        <p:txBody>
-          <a:bodyPr wrap="square" lIns="0" tIns="0" rIns="0" bIns="0" rtlCol="0" anchor="ctr"/>
-          <a:lstStyle/>
-          <a:p>
-            <a:pPr indent="0" marL="0">
-              <a:buNone/>
-            </a:pPr>
-            <a:r>
-              <a:rPr lang="en-US" sz="1800" b="1" dirty="0">
-                <a:solidFill>
-                  <a:srgbClr val="E8EDF2"/>
+              <a:t>B</a:t>
+            </a:r>
+            <a:endParaRPr lang="en-US" sz="2600" dirty="0"/>
+          </a:p>
+        </p:txBody>
+      </p:sp>
+      <p:sp>
+        <p:nvSpPr>
+          <p:cNvPr id="13" name="Text 11"/>
+          <p:cNvSpPr/>
+          <p:nvPr/>
+        </p:nvSpPr>
+        <p:spPr>
+          <a:xfrm>
+            <a:off x="6339840" y="2377440"/>
+            <a:ext cx="1234440" cy="731520"/>
+          </a:xfrm>
+          <a:prstGeom prst="rect">
+            <a:avLst/>
+          </a:prstGeom>
+          <a:noFill/>
+          <a:ln/>
+        </p:spPr>
+        <p:txBody>
+          <a:bodyPr wrap="square" lIns="0" tIns="0" rIns="0" bIns="0" rtlCol="0" anchor="ctr"/>
+          <a:lstStyle/>
+          <a:p>
+            <a:pPr algn="r" indent="0" marL="0">
+              <a:buNone/>
+            </a:pPr>
+            <a:r>
+              <a:rPr lang="en-US" sz="1600" dirty="0">
+                <a:solidFill>
+                  <a:srgbClr val="4FB0C6"/>
                 </a:solidFill>
                 <a:latin typeface="Malgun Gothic" pitchFamily="34" charset="0"/>
                 <a:ea typeface="Malgun Gothic" pitchFamily="34" charset="-122"/>
                 <a:cs typeface="Malgun Gothic" pitchFamily="34" charset="-120"/>
               </a:rPr>
-              <a:t>테스트 등록</a:t>
-            </a:r>
-            <a:endParaRPr lang="en-US" sz="1800" dirty="0"/>
-          </a:p>
-        </p:txBody>
-      </p:sp>
-      <p:sp>
-        <p:nvSpPr>
-          <p:cNvPr id="11" name="Text 9"/>
-          <p:cNvSpPr/>
-          <p:nvPr/>
-        </p:nvSpPr>
-        <p:spPr>
-          <a:xfrm>
-            <a:off x="1600200" y="3154680"/>
-            <a:ext cx="9784080" cy="384048"/>
-          </a:xfrm>
-          <a:prstGeom prst="rect">
-            <a:avLst/>
-          </a:prstGeom>
-          <a:noFill/>
-          <a:ln/>
-        </p:spPr>
-        <p:txBody>
-          <a:bodyPr wrap="square" lIns="0" tIns="0" rIns="0" bIns="0" rtlCol="0" anchor="ctr"/>
-          <a:lstStyle/>
-          <a:p>
-            <a:pPr indent="0" marL="0">
-              <a:buNone/>
-            </a:pPr>
-            <a:r>
-              <a:rPr lang="en-US" sz="1400" dirty="0">
-                <a:solidFill>
-                  <a:srgbClr val="9AA6B2"/>
+              <a:t>★★☆</a:t>
+            </a:r>
+            <a:endParaRPr lang="en-US" sz="1600" dirty="0"/>
+          </a:p>
+        </p:txBody>
+      </p:sp>
+      <p:sp>
+        <p:nvSpPr>
+          <p:cNvPr id="14" name="Text 12"/>
+          <p:cNvSpPr/>
+          <p:nvPr/>
+        </p:nvSpPr>
+        <p:spPr>
+          <a:xfrm>
+            <a:off x="4614672" y="3246120"/>
+            <a:ext cx="2987040" cy="731520"/>
+          </a:xfrm>
+          <a:prstGeom prst="rect">
+            <a:avLst/>
+          </a:prstGeom>
+          <a:noFill/>
+          <a:ln/>
+        </p:spPr>
+        <p:txBody>
+          <a:bodyPr wrap="square" lIns="0" tIns="0" rIns="0" bIns="0" rtlCol="0" anchor="t"/>
+          <a:lstStyle/>
+          <a:p>
+            <a:pPr indent="0" marL="0">
+              <a:buNone/>
+            </a:pPr>
+            <a:r>
+              <a:rPr lang="en-US" sz="1800" b="1" dirty="0">
+                <a:solidFill>
+                  <a:srgbClr val="E8EDF2"/>
                 </a:solidFill>
                 <a:latin typeface="Malgun Gothic" pitchFamily="34" charset="0"/>
                 <a:ea typeface="Malgun Gothic" pitchFamily="34" charset="-122"/>
                 <a:cs typeface="Malgun Gothic" pitchFamily="34" charset="-120"/>
               </a:rPr>
-              <a:t>cuda_memtests[] 배열 끝에 {함수, 설명, 1} 추가 (tests.cpp:1555)</a:t>
+              <a:t>Test 3 성능 개선</a:t>
+            </a:r>
+            <a:endParaRPr lang="en-US" sz="1800" dirty="0"/>
+          </a:p>
+        </p:txBody>
+      </p:sp>
+      <p:sp>
+        <p:nvSpPr>
+          <p:cNvPr id="15" name="Text 13"/>
+          <p:cNvSpPr/>
+          <p:nvPr/>
+        </p:nvSpPr>
+        <p:spPr>
+          <a:xfrm>
+            <a:off x="4614672" y="3977640"/>
+            <a:ext cx="2987040" cy="1097280"/>
+          </a:xfrm>
+          <a:prstGeom prst="rect">
+            <a:avLst/>
+          </a:prstGeom>
+          <a:noFill/>
+          <a:ln/>
+        </p:spPr>
+        <p:txBody>
+          <a:bodyPr wrap="square" lIns="0" tIns="0" rIns="0" bIns="0" rtlCol="0" anchor="t"/>
+          <a:lstStyle/>
+          <a:p>
+            <a:pPr indent="0" marL="0">
+              <a:lnSpc>
+                <a:spcPct val="115000"/>
+              </a:lnSpc>
+              <a:buNone/>
+            </a:pPr>
+            <a:r>
+              <a:rPr lang="en-US" sz="1400" dirty="0">
+                <a:solidFill>
+                  <a:srgbClr val="9AA6B2"/>
+                </a:solidFill>
+                <a:latin typeface="Malgun Gothic" pitchFamily="34" charset="0"/>
+                <a:ea typeface="Malgun Gothic" pitchFamily="34" charset="-122"/>
+                <a:cs typeface="Malgun Gothic" pitchFamily="34" charset="-120"/>
+              </a:rPr>
+              <a:t>느린 Test 3을 Test 10 스타일로 재작성·대역폭 비교</a:t>
             </a:r>
             <a:endParaRPr lang="en-US" sz="1400" dirty="0"/>
           </a:p>
@@ -5892,18 +8320,57 @@
       </p:sp>
       <p:sp>
         <p:nvSpPr>
-          <p:cNvPr id="12" name="Shape 10"/>
-          <p:cNvSpPr/>
-          <p:nvPr/>
-        </p:nvSpPr>
-        <p:spPr>
-          <a:xfrm>
-            <a:off x="548640" y="3721608"/>
-            <a:ext cx="11064240" cy="932688"/>
+          <p:cNvPr id="16" name="Text 14"/>
+          <p:cNvSpPr/>
+          <p:nvPr/>
+        </p:nvSpPr>
+        <p:spPr>
+          <a:xfrm>
+            <a:off x="4614672" y="5212080"/>
+            <a:ext cx="2987040" cy="365760"/>
+          </a:xfrm>
+          <a:prstGeom prst="rect">
+            <a:avLst/>
+          </a:prstGeom>
+          <a:noFill/>
+          <a:ln/>
+        </p:spPr>
+        <p:txBody>
+          <a:bodyPr wrap="square" lIns="0" tIns="0" rIns="0" bIns="0" rtlCol="0" anchor="ctr"/>
+          <a:lstStyle/>
+          <a:p>
+            <a:pPr indent="0" marL="0">
+              <a:buNone/>
+            </a:pPr>
+            <a:r>
+              <a:rPr lang="en-US" sz="1300" b="1" dirty="0">
+                <a:solidFill>
+                  <a:srgbClr val="4FB0C6"/>
+                </a:solidFill>
+                <a:latin typeface="Malgun Gothic" pitchFamily="34" charset="0"/>
+                <a:ea typeface="Malgun Gothic" pitchFamily="34" charset="-122"/>
+                <a:cs typeface="Malgun Gothic" pitchFamily="34" charset="-120"/>
+              </a:rPr>
+              <a:t>세션 3 활용</a:t>
+            </a:r>
+            <a:endParaRPr lang="en-US" sz="1300" dirty="0"/>
+          </a:p>
+        </p:txBody>
+      </p:sp>
+      <p:sp>
+        <p:nvSpPr>
+          <p:cNvPr id="17" name="Shape 15"/>
+          <p:cNvSpPr/>
+          <p:nvPr/>
+        </p:nvSpPr>
+        <p:spPr>
+          <a:xfrm>
+            <a:off x="8168640" y="2148840"/>
+            <a:ext cx="3444240" cy="3566160"/>
           </a:xfrm>
           <a:prstGeom prst="roundRect">
             <a:avLst>
-              <a:gd name="adj" fmla="val 7843"/>
+              <a:gd name="adj" fmla="val 2124"/>
             </a:avLst>
           </a:prstGeom>
           <a:solidFill>
@@ -5914,22 +8381,22 @@
       </p:sp>
       <p:sp>
         <p:nvSpPr>
-          <p:cNvPr id="13" name="Text 11"/>
-          <p:cNvSpPr/>
-          <p:nvPr/>
-        </p:nvSpPr>
-        <p:spPr>
-          <a:xfrm>
-            <a:off x="777240" y="3895344"/>
-            <a:ext cx="585216" cy="585216"/>
+          <p:cNvPr id="18" name="Text 16"/>
+          <p:cNvSpPr/>
+          <p:nvPr/>
+        </p:nvSpPr>
+        <p:spPr>
+          <a:xfrm>
+            <a:off x="8424672" y="2377440"/>
+            <a:ext cx="822960" cy="731520"/>
           </a:xfrm>
           <a:prstGeom prst="roundRect">
             <a:avLst>
-              <a:gd name="adj" fmla="val 15625"/>
+              <a:gd name="adj" fmla="val 12500"/>
             </a:avLst>
           </a:prstGeom>
           <a:solidFill>
-            <a:srgbClr val="E0645B"/>
+            <a:srgbClr val="E0A458"/>
           </a:solidFill>
           <a:ln/>
         </p:spPr>
@@ -5941,7 +8408,7 @@
               <a:buNone/>
             </a:pPr>
             <a:r>
-              <a:rPr lang="en-US" sz="2200" b="1" dirty="0">
+              <a:rPr lang="en-US" sz="2600" b="1" dirty="0">
                 <a:solidFill>
                   <a:srgbClr val="13161C"/>
                 </a:solidFill>
@@ -5949,242 +8416,180 @@
                 <a:ea typeface="Courier New" pitchFamily="34" charset="-122"/>
                 <a:cs typeface="Courier New" pitchFamily="34" charset="-120"/>
               </a:rPr>
-              <a:t>3</a:t>
-            </a:r>
-            <a:endParaRPr lang="en-US" sz="2200" dirty="0"/>
-          </a:p>
-        </p:txBody>
-      </p:sp>
-      <p:sp>
-        <p:nvSpPr>
-          <p:cNvPr id="14" name="Text 12"/>
-          <p:cNvSpPr/>
-          <p:nvPr/>
-        </p:nvSpPr>
-        <p:spPr>
-          <a:xfrm>
-            <a:off x="1600200" y="3831336"/>
-            <a:ext cx="9784080" cy="402336"/>
-          </a:xfrm>
-          <a:prstGeom prst="rect">
-            <a:avLst/>
-          </a:prstGeom>
-          <a:noFill/>
-          <a:ln/>
-        </p:spPr>
-        <p:txBody>
-          <a:bodyPr wrap="square" lIns="0" tIns="0" rIns="0" bIns="0" rtlCol="0" anchor="ctr"/>
-          <a:lstStyle/>
-          <a:p>
-            <a:pPr indent="0" marL="0">
-              <a:buNone/>
-            </a:pPr>
-            <a:r>
-              <a:rPr lang="en-US" sz="1800" b="1" dirty="0">
-                <a:solidFill>
-                  <a:srgbClr val="E8EDF2"/>
+              <a:t>C</a:t>
+            </a:r>
+            <a:endParaRPr lang="en-US" sz="2600" dirty="0"/>
+          </a:p>
+        </p:txBody>
+      </p:sp>
+      <p:sp>
+        <p:nvSpPr>
+          <p:cNvPr id="19" name="Text 17"/>
+          <p:cNvSpPr/>
+          <p:nvPr/>
+        </p:nvSpPr>
+        <p:spPr>
+          <a:xfrm>
+            <a:off x="10149840" y="2377440"/>
+            <a:ext cx="1234440" cy="731520"/>
+          </a:xfrm>
+          <a:prstGeom prst="rect">
+            <a:avLst/>
+          </a:prstGeom>
+          <a:noFill/>
+          <a:ln/>
+        </p:spPr>
+        <p:txBody>
+          <a:bodyPr wrap="square" lIns="0" tIns="0" rIns="0" bIns="0" rtlCol="0" anchor="ctr"/>
+          <a:lstStyle/>
+          <a:p>
+            <a:pPr algn="r" indent="0" marL="0">
+              <a:buNone/>
+            </a:pPr>
+            <a:r>
+              <a:rPr lang="en-US" sz="1600" dirty="0">
+                <a:solidFill>
+                  <a:srgbClr val="E0A458"/>
                 </a:solidFill>
                 <a:latin typeface="Malgun Gothic" pitchFamily="34" charset="0"/>
                 <a:ea typeface="Malgun Gothic" pitchFamily="34" charset="-122"/>
                 <a:cs typeface="Malgun Gothic" pitchFamily="34" charset="-120"/>
               </a:rPr>
-              <a:t>배열 크기 상수 고치기</a:t>
-            </a:r>
-            <a:endParaRPr lang="en-US" sz="1800" dirty="0"/>
-          </a:p>
-        </p:txBody>
-      </p:sp>
-      <p:sp>
-        <p:nvSpPr>
-          <p:cNvPr id="15" name="Text 13"/>
-          <p:cNvSpPr/>
-          <p:nvPr/>
-        </p:nvSpPr>
-        <p:spPr>
-          <a:xfrm>
-            <a:off x="1600200" y="4215384"/>
-            <a:ext cx="9784080" cy="384048"/>
-          </a:xfrm>
-          <a:prstGeom prst="rect">
-            <a:avLst/>
-          </a:prstGeom>
-          <a:noFill/>
-          <a:ln/>
-        </p:spPr>
-        <p:txBody>
-          <a:bodyPr wrap="square" lIns="0" tIns="0" rIns="0" bIns="0" rtlCol="0" anchor="ctr"/>
-          <a:lstStyle/>
-          <a:p>
-            <a:pPr indent="0" marL="0">
-              <a:buNone/>
-            </a:pPr>
-            <a:r>
-              <a:rPr lang="en-US" sz="1400" dirty="0">
-                <a:solidFill>
-                  <a:srgbClr val="9AA6B2"/>
+              <a:t>★★★</a:t>
+            </a:r>
+            <a:endParaRPr lang="en-US" sz="1600" dirty="0"/>
+          </a:p>
+        </p:txBody>
+      </p:sp>
+      <p:sp>
+        <p:nvSpPr>
+          <p:cNvPr id="20" name="Text 18"/>
+          <p:cNvSpPr/>
+          <p:nvPr/>
+        </p:nvSpPr>
+        <p:spPr>
+          <a:xfrm>
+            <a:off x="8424672" y="3246120"/>
+            <a:ext cx="2987040" cy="731520"/>
+          </a:xfrm>
+          <a:prstGeom prst="rect">
+            <a:avLst/>
+          </a:prstGeom>
+          <a:noFill/>
+          <a:ln/>
+        </p:spPr>
+        <p:txBody>
+          <a:bodyPr wrap="square" lIns="0" tIns="0" rIns="0" bIns="0" rtlCol="0" anchor="t"/>
+          <a:lstStyle/>
+          <a:p>
+            <a:pPr indent="0" marL="0">
+              <a:buNone/>
+            </a:pPr>
+            <a:r>
+              <a:rPr lang="en-US" sz="1800" b="1" dirty="0">
+                <a:solidFill>
+                  <a:srgbClr val="E8EDF2"/>
                 </a:solidFill>
                 <a:latin typeface="Malgun Gothic" pitchFamily="34" charset="0"/>
                 <a:ea typeface="Malgun Gothic" pitchFamily="34" charset="-122"/>
                 <a:cs typeface="Malgun Gothic" pitchFamily="34" charset="-120"/>
               </a:rPr>
-              <a:t>extern cuda_memtests[11] → [12] (cuda_memtest.cpp:57) ⚠️</a:t>
-            </a:r>
-            <a:endParaRPr lang="en-US" sz="1400" dirty="0"/>
-          </a:p>
-        </p:txBody>
-      </p:sp>
-      <p:sp>
-        <p:nvSpPr>
-          <p:cNvPr id="16" name="Shape 14"/>
-          <p:cNvSpPr/>
-          <p:nvPr/>
-        </p:nvSpPr>
-        <p:spPr>
-          <a:xfrm>
-            <a:off x="548640" y="4782312"/>
-            <a:ext cx="11064240" cy="932688"/>
-          </a:xfrm>
-          <a:prstGeom prst="roundRect">
-            <a:avLst>
-              <a:gd name="adj" fmla="val 7843"/>
-            </a:avLst>
-          </a:prstGeom>
-          <a:solidFill>
-            <a:srgbClr val="1E232C"/>
-          </a:solidFill>
-          <a:ln/>
-        </p:spPr>
-      </p:sp>
-      <p:sp>
-        <p:nvSpPr>
-          <p:cNvPr id="17" name="Text 15"/>
-          <p:cNvSpPr/>
-          <p:nvPr/>
-        </p:nvSpPr>
-        <p:spPr>
-          <a:xfrm>
-            <a:off x="777240" y="4956048"/>
-            <a:ext cx="585216" cy="585216"/>
-          </a:xfrm>
-          <a:prstGeom prst="roundRect">
-            <a:avLst>
-              <a:gd name="adj" fmla="val 15625"/>
-            </a:avLst>
-          </a:prstGeom>
-          <a:solidFill>
-            <a:srgbClr val="E0A458"/>
-          </a:solidFill>
-          <a:ln/>
-        </p:spPr>
-        <p:txBody>
-          <a:bodyPr wrap="square" rtlCol="0" anchor="ctr"/>
-          <a:lstStyle/>
-          <a:p>
-            <a:pPr algn="ctr" indent="0" marL="0">
-              <a:buNone/>
-            </a:pPr>
-            <a:r>
-              <a:rPr lang="en-US" sz="2200" b="1" dirty="0">
-                <a:solidFill>
-                  <a:srgbClr val="13161C"/>
-                </a:solidFill>
-                <a:latin typeface="Courier New" pitchFamily="34" charset="0"/>
-                <a:ea typeface="Courier New" pitchFamily="34" charset="-122"/>
-                <a:cs typeface="Courier New" pitchFamily="34" charset="-120"/>
-              </a:rPr>
-              <a:t>4</a:t>
-            </a:r>
-            <a:endParaRPr lang="en-US" sz="2200" dirty="0"/>
-          </a:p>
-        </p:txBody>
-      </p:sp>
-      <p:sp>
-        <p:nvSpPr>
-          <p:cNvPr id="18" name="Text 16"/>
-          <p:cNvSpPr/>
-          <p:nvPr/>
-        </p:nvSpPr>
-        <p:spPr>
-          <a:xfrm>
-            <a:off x="1600200" y="4892040"/>
-            <a:ext cx="9784080" cy="402336"/>
-          </a:xfrm>
-          <a:prstGeom prst="rect">
-            <a:avLst/>
-          </a:prstGeom>
-          <a:noFill/>
-          <a:ln/>
-        </p:spPr>
-        <p:txBody>
-          <a:bodyPr wrap="square" lIns="0" tIns="0" rIns="0" bIns="0" rtlCol="0" anchor="ctr"/>
-          <a:lstStyle/>
-          <a:p>
-            <a:pPr indent="0" marL="0">
-              <a:buNone/>
-            </a:pPr>
-            <a:r>
-              <a:rPr lang="en-US" sz="1800" b="1" dirty="0">
-                <a:solidFill>
-                  <a:srgbClr val="E8EDF2"/>
+              <a:t>오류 히스토그램</a:t>
+            </a:r>
+            <a:endParaRPr lang="en-US" sz="1800" dirty="0"/>
+          </a:p>
+        </p:txBody>
+      </p:sp>
+      <p:sp>
+        <p:nvSpPr>
+          <p:cNvPr id="21" name="Text 19"/>
+          <p:cNvSpPr/>
+          <p:nvPr/>
+        </p:nvSpPr>
+        <p:spPr>
+          <a:xfrm>
+            <a:off x="8424672" y="3977640"/>
+            <a:ext cx="2987040" cy="1097280"/>
+          </a:xfrm>
+          <a:prstGeom prst="rect">
+            <a:avLst/>
+          </a:prstGeom>
+          <a:noFill/>
+          <a:ln/>
+        </p:spPr>
+        <p:txBody>
+          <a:bodyPr wrap="square" lIns="0" tIns="0" rIns="0" bIns="0" rtlCol="0" anchor="t"/>
+          <a:lstStyle/>
+          <a:p>
+            <a:pPr indent="0" marL="0">
+              <a:lnSpc>
+                <a:spcPct val="115000"/>
+              </a:lnSpc>
+              <a:buNone/>
+            </a:pPr>
+            <a:r>
+              <a:rPr lang="en-US" sz="1400" dirty="0">
+                <a:solidFill>
+                  <a:srgbClr val="9AA6B2"/>
                 </a:solidFill>
                 <a:latin typeface="Malgun Gothic" pitchFamily="34" charset="0"/>
                 <a:ea typeface="Malgun Gothic" pitchFamily="34" charset="-122"/>
                 <a:cs typeface="Malgun Gothic" pitchFamily="34" charset="-120"/>
               </a:rPr>
-              <a:t>빌드 &amp; 실행</a:t>
-            </a:r>
-            <a:endParaRPr lang="en-US" sz="1800" dirty="0"/>
-          </a:p>
-        </p:txBody>
-      </p:sp>
-      <p:sp>
-        <p:nvSpPr>
-          <p:cNvPr id="19" name="Text 17"/>
-          <p:cNvSpPr/>
-          <p:nvPr/>
-        </p:nvSpPr>
-        <p:spPr>
-          <a:xfrm>
-            <a:off x="1600200" y="5276088"/>
-            <a:ext cx="9784080" cy="384048"/>
-          </a:xfrm>
-          <a:prstGeom prst="rect">
-            <a:avLst/>
-          </a:prstGeom>
-          <a:noFill/>
-          <a:ln/>
-        </p:spPr>
-        <p:txBody>
-          <a:bodyPr wrap="square" lIns="0" tIns="0" rIns="0" bIns="0" rtlCol="0" anchor="ctr"/>
-          <a:lstStyle/>
-          <a:p>
-            <a:pPr indent="0" marL="0">
-              <a:buNone/>
-            </a:pPr>
-            <a:r>
-              <a:rPr lang="en-US" sz="1400" dirty="0">
-                <a:solidFill>
-                  <a:srgbClr val="9AA6B2"/>
+              <a:t>오류 주소의 비트 패턴을 집계해 출력</a:t>
+            </a:r>
+            <a:endParaRPr lang="en-US" sz="1400" dirty="0"/>
+          </a:p>
+        </p:txBody>
+      </p:sp>
+      <p:sp>
+        <p:nvSpPr>
+          <p:cNvPr id="22" name="Text 20"/>
+          <p:cNvSpPr/>
+          <p:nvPr/>
+        </p:nvSpPr>
+        <p:spPr>
+          <a:xfrm>
+            <a:off x="8424672" y="5212080"/>
+            <a:ext cx="2987040" cy="365760"/>
+          </a:xfrm>
+          <a:prstGeom prst="rect">
+            <a:avLst/>
+          </a:prstGeom>
+          <a:noFill/>
+          <a:ln/>
+        </p:spPr>
+        <p:txBody>
+          <a:bodyPr wrap="square" lIns="0" tIns="0" rIns="0" bIns="0" rtlCol="0" anchor="ctr"/>
+          <a:lstStyle/>
+          <a:p>
+            <a:pPr indent="0" marL="0">
+              <a:buNone/>
+            </a:pPr>
+            <a:r>
+              <a:rPr lang="en-US" sz="1300" b="1" dirty="0">
+                <a:solidFill>
+                  <a:srgbClr val="E0A458"/>
                 </a:solidFill>
                 <a:latin typeface="Malgun Gothic" pitchFamily="34" charset="0"/>
                 <a:ea typeface="Malgun Gothic" pitchFamily="34" charset="-122"/>
                 <a:cs typeface="Malgun Gothic" pitchFamily="34" charset="-120"/>
               </a:rPr>
-              <a:t>--list_tests 로 확인 후 --enable_test 11 로 실행</a:t>
-            </a:r>
-            <a:endParaRPr lang="en-US" sz="1400" dirty="0"/>
-          </a:p>
-        </p:txBody>
-      </p:sp>
-      <p:sp>
-        <p:nvSpPr>
-          <p:cNvPr id="20" name="Text 18"/>
-          <p:cNvSpPr/>
-          <p:nvPr/>
-        </p:nvSpPr>
-        <p:spPr>
-          <a:xfrm>
-            <a:off x="548640" y="5943600"/>
+              <a:t>세션 4 활용</a:t>
+            </a:r>
+            <a:endParaRPr lang="en-US" sz="1300" dirty="0"/>
+          </a:p>
+        </p:txBody>
+      </p:sp>
+      <p:sp>
+        <p:nvSpPr>
+          <p:cNvPr id="23" name="Text 21"/>
+          <p:cNvSpPr/>
+          <p:nvPr/>
+        </p:nvSpPr>
+        <p:spPr>
+          <a:xfrm>
+            <a:off x="548640" y="5897880"/>
             <a:ext cx="11064240" cy="457200"/>
           </a:xfrm>
           <a:prstGeom prst="rect">
@@ -6197,19 +8602,19 @@
           <a:bodyPr wrap="square" lIns="0" tIns="0" rIns="0" bIns="0" rtlCol="0" anchor="ctr"/>
           <a:lstStyle/>
           <a:p>
-            <a:pPr indent="0" marL="0">
+            <a:pPr algn="ctr" indent="0" marL="0">
               <a:buNone/>
             </a:pPr>
             <a:r>
               <a:rPr lang="en-US" sz="1300" i="1" dirty="0">
                 <a:solidFill>
-                  <a:srgbClr val="E0A458"/>
+                  <a:srgbClr val="9AA6B2"/>
                 </a:solidFill>
                 <a:latin typeface="Malgun Gothic" pitchFamily="34" charset="0"/>
                 <a:ea typeface="Malgun Gothic" pitchFamily="34" charset="-122"/>
                 <a:cs typeface="Malgun Gothic" pitchFamily="34" charset="-120"/>
               </a:rPr>
-              <a:t>⚠️ 3단계를 빠뜨리면 새 테스트가 목록에 안 보입니다 — main 쪽 DIM()이 이 상수를 셉니다(cuda_memtest.cpp:223).</a:t>
+              <a:t>실습 가이드는 가장 쉬운 옵션 A(체커보드)를 단계별로 제공합니다 — move_inv_test를 재사용합니다.</a:t>
             </a:r>
             <a:endParaRPr lang="en-US" sz="1300" dirty="0"/>
           </a:p>
@@ -6284,7 +8689,7 @@
                 <a:ea typeface="Courier New" pitchFamily="34" charset="-122"/>
                 <a:cs typeface="Courier New" pitchFamily="34" charset="-120"/>
               </a:rPr>
-              <a:t>7</a:t>
+              <a:t>6</a:t>
             </a:r>
             <a:endParaRPr lang="en-US" sz="2200" dirty="0"/>
           </a:p>
@@ -6323,7 +8728,7 @@
                 <a:ea typeface="Malgun Gothic" pitchFamily="34" charset="-122"/>
                 <a:cs typeface="Malgun Gothic" pitchFamily="34" charset="-120"/>
               </a:rPr>
-              <a:t>옵션 A · 코드 스케치</a:t>
+              <a:t>옵션 A · 체커보드 테스트 4단계</a:t>
             </a:r>
             <a:endParaRPr lang="en-US" sz="3000" dirty="0"/>
           </a:p>
@@ -6337,23 +8742,18 @@
         </p:nvSpPr>
         <p:spPr>
           <a:xfrm>
-            <a:off x="548640" y="1554480"/>
-            <a:ext cx="11064240" cy="2148840"/>
+            <a:off x="548640" y="1600200"/>
+            <a:ext cx="11064240" cy="932688"/>
           </a:xfrm>
           <a:prstGeom prst="roundRect">
             <a:avLst>
-              <a:gd name="adj" fmla="val 2553"/>
+              <a:gd name="adj" fmla="val 7843"/>
             </a:avLst>
           </a:prstGeom>
           <a:solidFill>
-            <a:srgbClr val="0E1116"/>
+            <a:srgbClr val="1E232C"/>
           </a:solidFill>
-          <a:ln w="12700">
-            <a:solidFill>
-              <a:srgbClr val="2C3440"/>
-            </a:solidFill>
-            <a:prstDash val="solid"/>
-          </a:ln>
+          <a:ln/>
         </p:spPr>
       </p:sp>
       <p:sp>
@@ -6364,325 +8764,584 @@
         </p:nvSpPr>
         <p:spPr>
           <a:xfrm>
-            <a:off x="749808" y="1700784"/>
-            <a:ext cx="10661904" cy="1856232"/>
-          </a:xfrm>
-          <a:prstGeom prst="rect">
-            <a:avLst/>
-          </a:prstGeom>
-          <a:noFill/>
-          <a:ln/>
-        </p:spPr>
-        <p:txBody>
-          <a:bodyPr wrap="square" lIns="0" tIns="0" rIns="0" bIns="0" rtlCol="0" anchor="t"/>
-          <a:lstStyle/>
-          <a:p>
-            <a:pPr algn="l" indent="0" marL="0">
-              <a:lnSpc>
-                <a:spcPct val="108000"/>
-              </a:lnSpc>
-              <a:buNone/>
-            </a:pPr>
-            <a:r>
-              <a:rPr lang="en-US" sz="1300" dirty="0">
-                <a:solidFill>
-                  <a:srgbClr val="9AA6B2"/>
+            <a:off x="777240" y="1773936"/>
+            <a:ext cx="585216" cy="585216"/>
+          </a:xfrm>
+          <a:prstGeom prst="roundRect">
+            <a:avLst>
+              <a:gd name="adj" fmla="val 15625"/>
+            </a:avLst>
+          </a:prstGeom>
+          <a:solidFill>
+            <a:srgbClr val="8CC63F"/>
+          </a:solidFill>
+          <a:ln/>
+        </p:spPr>
+        <p:txBody>
+          <a:bodyPr wrap="square" rtlCol="0" anchor="ctr"/>
+          <a:lstStyle/>
+          <a:p>
+            <a:pPr algn="ctr" indent="0" marL="0">
+              <a:buNone/>
+            </a:pPr>
+            <a:r>
+              <a:rPr lang="en-US" sz="2200" b="1" dirty="0">
+                <a:solidFill>
+                  <a:srgbClr val="13161C"/>
                 </a:solidFill>
                 <a:latin typeface="Courier New" pitchFamily="34" charset="0"/>
                 <a:ea typeface="Courier New" pitchFamily="34" charset="-122"/>
                 <a:cs typeface="Courier New" pitchFamily="34" charset="-120"/>
               </a:rPr>
-              <a:t>// 1) tests.cpp — test2 아래에 새 함수</a:t>
-            </a:r>
-            <a:endParaRPr lang="en-US" sz="1300" dirty="0"/>
-          </a:p>
-          <a:p>
-            <a:pPr algn="l" indent="0" marL="0">
-              <a:lnSpc>
-                <a:spcPct val="108000"/>
-              </a:lnSpc>
-              <a:buNone/>
-            </a:pPr>
-            <a:r>
-              <a:rPr lang="en-US" sz="1300" dirty="0">
+              <a:t>1</a:t>
+            </a:r>
+            <a:endParaRPr lang="en-US" sz="2200" dirty="0"/>
+          </a:p>
+        </p:txBody>
+      </p:sp>
+      <p:sp>
+        <p:nvSpPr>
+          <p:cNvPr id="6" name="Text 4"/>
+          <p:cNvSpPr/>
+          <p:nvPr/>
+        </p:nvSpPr>
+        <p:spPr>
+          <a:xfrm>
+            <a:off x="1600200" y="1709928"/>
+            <a:ext cx="9784080" cy="402336"/>
+          </a:xfrm>
+          <a:prstGeom prst="rect">
+            <a:avLst/>
+          </a:prstGeom>
+          <a:noFill/>
+          <a:ln/>
+        </p:spPr>
+        <p:txBody>
+          <a:bodyPr wrap="square" lIns="0" tIns="0" rIns="0" bIns="0" rtlCol="0" anchor="ctr"/>
+          <a:lstStyle/>
+          <a:p>
+            <a:pPr indent="0" marL="0">
+              <a:buNone/>
+            </a:pPr>
+            <a:r>
+              <a:rPr lang="en-US" sz="1800" b="1" dirty="0">
                 <a:solidFill>
                   <a:srgbClr val="E8EDF2"/>
+                </a:solidFill>
+                <a:latin typeface="Malgun Gothic" pitchFamily="34" charset="0"/>
+                <a:ea typeface="Malgun Gothic" pitchFamily="34" charset="-122"/>
+                <a:cs typeface="Malgun Gothic" pitchFamily="34" charset="-120"/>
+              </a:rPr>
+              <a:t>새 테스트 함수 작성</a:t>
+            </a:r>
+            <a:endParaRPr lang="en-US" sz="1800" dirty="0"/>
+          </a:p>
+        </p:txBody>
+      </p:sp>
+      <p:sp>
+        <p:nvSpPr>
+          <p:cNvPr id="7" name="Text 5"/>
+          <p:cNvSpPr/>
+          <p:nvPr/>
+        </p:nvSpPr>
+        <p:spPr>
+          <a:xfrm>
+            <a:off x="1600200" y="2093976"/>
+            <a:ext cx="9784080" cy="384048"/>
+          </a:xfrm>
+          <a:prstGeom prst="rect">
+            <a:avLst/>
+          </a:prstGeom>
+          <a:noFill/>
+          <a:ln/>
+        </p:spPr>
+        <p:txBody>
+          <a:bodyPr wrap="square" lIns="0" tIns="0" rIns="0" bIns="0" rtlCol="0" anchor="ctr"/>
+          <a:lstStyle/>
+          <a:p>
+            <a:pPr indent="0" marL="0">
+              <a:buNone/>
+            </a:pPr>
+            <a:r>
+              <a:rPr lang="en-US" sz="1400" dirty="0">
+                <a:solidFill>
+                  <a:srgbClr val="9AA6B2"/>
+                </a:solidFill>
+                <a:latin typeface="Malgun Gothic" pitchFamily="34" charset="0"/>
+                <a:ea typeface="Malgun Gothic" pitchFamily="34" charset="-122"/>
+                <a:cs typeface="Malgun Gothic" pitchFamily="34" charset="-120"/>
+              </a:rPr>
+              <a:t>move_inv_test에 p1=0xAAAAAAAA, p2=0x55555555 전달 (tests.cpp)</a:t>
+            </a:r>
+            <a:endParaRPr lang="en-US" sz="1400" dirty="0"/>
+          </a:p>
+        </p:txBody>
+      </p:sp>
+      <p:sp>
+        <p:nvSpPr>
+          <p:cNvPr id="8" name="Shape 6"/>
+          <p:cNvSpPr/>
+          <p:nvPr/>
+        </p:nvSpPr>
+        <p:spPr>
+          <a:xfrm>
+            <a:off x="548640" y="2660904"/>
+            <a:ext cx="11064240" cy="932688"/>
+          </a:xfrm>
+          <a:prstGeom prst="roundRect">
+            <a:avLst>
+              <a:gd name="adj" fmla="val 7843"/>
+            </a:avLst>
+          </a:prstGeom>
+          <a:solidFill>
+            <a:srgbClr val="1E232C"/>
+          </a:solidFill>
+          <a:ln/>
+        </p:spPr>
+      </p:sp>
+      <p:sp>
+        <p:nvSpPr>
+          <p:cNvPr id="9" name="Text 7"/>
+          <p:cNvSpPr/>
+          <p:nvPr/>
+        </p:nvSpPr>
+        <p:spPr>
+          <a:xfrm>
+            <a:off x="777240" y="2834640"/>
+            <a:ext cx="585216" cy="585216"/>
+          </a:xfrm>
+          <a:prstGeom prst="roundRect">
+            <a:avLst>
+              <a:gd name="adj" fmla="val 15625"/>
+            </a:avLst>
+          </a:prstGeom>
+          <a:solidFill>
+            <a:srgbClr val="4FB0C6"/>
+          </a:solidFill>
+          <a:ln/>
+        </p:spPr>
+        <p:txBody>
+          <a:bodyPr wrap="square" rtlCol="0" anchor="ctr"/>
+          <a:lstStyle/>
+          <a:p>
+            <a:pPr algn="ctr" indent="0" marL="0">
+              <a:buNone/>
+            </a:pPr>
+            <a:r>
+              <a:rPr lang="en-US" sz="2200" b="1" dirty="0">
+                <a:solidFill>
+                  <a:srgbClr val="13161C"/>
                 </a:solidFill>
                 <a:latin typeface="Courier New" pitchFamily="34" charset="0"/>
                 <a:ea typeface="Courier New" pitchFamily="34" charset="-122"/>
                 <a:cs typeface="Courier New" pitchFamily="34" charset="-120"/>
               </a:rPr>
-              <a:t>void test_checkerboard(char* ptr, unsigned int tot_num_blocks) {</a:t>
-            </a:r>
-            <a:endParaRPr lang="en-US" sz="1300" dirty="0"/>
-          </a:p>
-          <a:p>
-            <a:pPr algn="l" indent="0" marL="0">
-              <a:lnSpc>
-                <a:spcPct val="108000"/>
-              </a:lnSpc>
-              <a:buNone/>
-            </a:pPr>
-            <a:r>
-              <a:rPr lang="en-US" sz="1300" dirty="0">
-                <a:solidFill>
-                  <a:srgbClr val="8CC63F"/>
+              <a:t>2</a:t>
+            </a:r>
+            <a:endParaRPr lang="en-US" sz="2200" dirty="0"/>
+          </a:p>
+        </p:txBody>
+      </p:sp>
+      <p:sp>
+        <p:nvSpPr>
+          <p:cNvPr id="10" name="Text 8"/>
+          <p:cNvSpPr/>
+          <p:nvPr/>
+        </p:nvSpPr>
+        <p:spPr>
+          <a:xfrm>
+            <a:off x="1600200" y="2770632"/>
+            <a:ext cx="9784080" cy="402336"/>
+          </a:xfrm>
+          <a:prstGeom prst="rect">
+            <a:avLst/>
+          </a:prstGeom>
+          <a:noFill/>
+          <a:ln/>
+        </p:spPr>
+        <p:txBody>
+          <a:bodyPr wrap="square" lIns="0" tIns="0" rIns="0" bIns="0" rtlCol="0" anchor="ctr"/>
+          <a:lstStyle/>
+          <a:p>
+            <a:pPr indent="0" marL="0">
+              <a:buNone/>
+            </a:pPr>
+            <a:r>
+              <a:rPr lang="en-US" sz="1800" b="1" dirty="0">
+                <a:solidFill>
+                  <a:srgbClr val="E8EDF2"/>
+                </a:solidFill>
+                <a:latin typeface="Malgun Gothic" pitchFamily="34" charset="0"/>
+                <a:ea typeface="Malgun Gothic" pitchFamily="34" charset="-122"/>
+                <a:cs typeface="Malgun Gothic" pitchFamily="34" charset="-120"/>
+              </a:rPr>
+              <a:t>테스트 등록</a:t>
+            </a:r>
+            <a:endParaRPr lang="en-US" sz="1800" dirty="0"/>
+          </a:p>
+        </p:txBody>
+      </p:sp>
+      <p:sp>
+        <p:nvSpPr>
+          <p:cNvPr id="11" name="Text 9"/>
+          <p:cNvSpPr/>
+          <p:nvPr/>
+        </p:nvSpPr>
+        <p:spPr>
+          <a:xfrm>
+            <a:off x="1600200" y="3154680"/>
+            <a:ext cx="9784080" cy="384048"/>
+          </a:xfrm>
+          <a:prstGeom prst="rect">
+            <a:avLst/>
+          </a:prstGeom>
+          <a:noFill/>
+          <a:ln/>
+        </p:spPr>
+        <p:txBody>
+          <a:bodyPr wrap="square" lIns="0" tIns="0" rIns="0" bIns="0" rtlCol="0" anchor="ctr"/>
+          <a:lstStyle/>
+          <a:p>
+            <a:pPr indent="0" marL="0">
+              <a:buNone/>
+            </a:pPr>
+            <a:r>
+              <a:rPr lang="en-US" sz="1400" dirty="0">
+                <a:solidFill>
+                  <a:srgbClr val="9AA6B2"/>
+                </a:solidFill>
+                <a:latin typeface="Malgun Gothic" pitchFamily="34" charset="0"/>
+                <a:ea typeface="Malgun Gothic" pitchFamily="34" charset="-122"/>
+                <a:cs typeface="Malgun Gothic" pitchFamily="34" charset="-120"/>
+              </a:rPr>
+              <a:t>cuda_memtests[] 배열 끝에 {함수, 설명, 1} 추가 (tests.cpp:1555)</a:t>
+            </a:r>
+            <a:endParaRPr lang="en-US" sz="1400" dirty="0"/>
+          </a:p>
+        </p:txBody>
+      </p:sp>
+      <p:sp>
+        <p:nvSpPr>
+          <p:cNvPr id="12" name="Shape 10"/>
+          <p:cNvSpPr/>
+          <p:nvPr/>
+        </p:nvSpPr>
+        <p:spPr>
+          <a:xfrm>
+            <a:off x="548640" y="3721608"/>
+            <a:ext cx="11064240" cy="932688"/>
+          </a:xfrm>
+          <a:prstGeom prst="roundRect">
+            <a:avLst>
+              <a:gd name="adj" fmla="val 7843"/>
+            </a:avLst>
+          </a:prstGeom>
+          <a:solidFill>
+            <a:srgbClr val="1E232C"/>
+          </a:solidFill>
+          <a:ln/>
+        </p:spPr>
+      </p:sp>
+      <p:sp>
+        <p:nvSpPr>
+          <p:cNvPr id="13" name="Text 11"/>
+          <p:cNvSpPr/>
+          <p:nvPr/>
+        </p:nvSpPr>
+        <p:spPr>
+          <a:xfrm>
+            <a:off x="777240" y="3895344"/>
+            <a:ext cx="585216" cy="585216"/>
+          </a:xfrm>
+          <a:prstGeom prst="roundRect">
+            <a:avLst>
+              <a:gd name="adj" fmla="val 15625"/>
+            </a:avLst>
+          </a:prstGeom>
+          <a:solidFill>
+            <a:srgbClr val="E0645B"/>
+          </a:solidFill>
+          <a:ln/>
+        </p:spPr>
+        <p:txBody>
+          <a:bodyPr wrap="square" rtlCol="0" anchor="ctr"/>
+          <a:lstStyle/>
+          <a:p>
+            <a:pPr algn="ctr" indent="0" marL="0">
+              <a:buNone/>
+            </a:pPr>
+            <a:r>
+              <a:rPr lang="en-US" sz="2200" b="1" dirty="0">
+                <a:solidFill>
+                  <a:srgbClr val="13161C"/>
                 </a:solidFill>
                 <a:latin typeface="Courier New" pitchFamily="34" charset="0"/>
                 <a:ea typeface="Courier New" pitchFamily="34" charset="-122"/>
                 <a:cs typeface="Courier New" pitchFamily="34" charset="-120"/>
               </a:rPr>
-              <a:t>    unsigned int p1 = 0xAAAAAAAA;   // 1010...  </a:t>
-            </a:r>
-            <a:endParaRPr lang="en-US" sz="1300" dirty="0"/>
-          </a:p>
-          <a:p>
-            <a:pPr algn="l" indent="0" marL="0">
-              <a:lnSpc>
-                <a:spcPct val="108000"/>
-              </a:lnSpc>
-              <a:buNone/>
-            </a:pPr>
-            <a:r>
-              <a:rPr lang="en-US" sz="1300" dirty="0">
-                <a:solidFill>
-                  <a:srgbClr val="8CC63F"/>
+              <a:t>3</a:t>
+            </a:r>
+            <a:endParaRPr lang="en-US" sz="2200" dirty="0"/>
+          </a:p>
+        </p:txBody>
+      </p:sp>
+      <p:sp>
+        <p:nvSpPr>
+          <p:cNvPr id="14" name="Text 12"/>
+          <p:cNvSpPr/>
+          <p:nvPr/>
+        </p:nvSpPr>
+        <p:spPr>
+          <a:xfrm>
+            <a:off x="1600200" y="3831336"/>
+            <a:ext cx="9784080" cy="402336"/>
+          </a:xfrm>
+          <a:prstGeom prst="rect">
+            <a:avLst/>
+          </a:prstGeom>
+          <a:noFill/>
+          <a:ln/>
+        </p:spPr>
+        <p:txBody>
+          <a:bodyPr wrap="square" lIns="0" tIns="0" rIns="0" bIns="0" rtlCol="0" anchor="ctr"/>
+          <a:lstStyle/>
+          <a:p>
+            <a:pPr indent="0" marL="0">
+              <a:buNone/>
+            </a:pPr>
+            <a:r>
+              <a:rPr lang="en-US" sz="1800" b="1" dirty="0">
+                <a:solidFill>
+                  <a:srgbClr val="E8EDF2"/>
+                </a:solidFill>
+                <a:latin typeface="Malgun Gothic" pitchFamily="34" charset="0"/>
+                <a:ea typeface="Malgun Gothic" pitchFamily="34" charset="-122"/>
+                <a:cs typeface="Malgun Gothic" pitchFamily="34" charset="-120"/>
+              </a:rPr>
+              <a:t>배열 크기 상수 고치기</a:t>
+            </a:r>
+            <a:endParaRPr lang="en-US" sz="1800" dirty="0"/>
+          </a:p>
+        </p:txBody>
+      </p:sp>
+      <p:sp>
+        <p:nvSpPr>
+          <p:cNvPr id="15" name="Text 13"/>
+          <p:cNvSpPr/>
+          <p:nvPr/>
+        </p:nvSpPr>
+        <p:spPr>
+          <a:xfrm>
+            <a:off x="1600200" y="4215384"/>
+            <a:ext cx="9784080" cy="384048"/>
+          </a:xfrm>
+          <a:prstGeom prst="rect">
+            <a:avLst/>
+          </a:prstGeom>
+          <a:noFill/>
+          <a:ln/>
+        </p:spPr>
+        <p:txBody>
+          <a:bodyPr wrap="square" lIns="0" tIns="0" rIns="0" bIns="0" rtlCol="0" anchor="ctr"/>
+          <a:lstStyle/>
+          <a:p>
+            <a:pPr indent="0" marL="0">
+              <a:buNone/>
+            </a:pPr>
+            <a:r>
+              <a:rPr lang="en-US" sz="1400" dirty="0">
+                <a:solidFill>
+                  <a:srgbClr val="9AA6B2"/>
+                </a:solidFill>
+                <a:latin typeface="Malgun Gothic" pitchFamily="34" charset="0"/>
+                <a:ea typeface="Malgun Gothic" pitchFamily="34" charset="-122"/>
+                <a:cs typeface="Malgun Gothic" pitchFamily="34" charset="-120"/>
+              </a:rPr>
+              <a:t>extern cuda_memtests[11] → [12] (cuda_memtest.cpp:57) ⚠️</a:t>
+            </a:r>
+            <a:endParaRPr lang="en-US" sz="1400" dirty="0"/>
+          </a:p>
+        </p:txBody>
+      </p:sp>
+      <p:sp>
+        <p:nvSpPr>
+          <p:cNvPr id="16" name="Shape 14"/>
+          <p:cNvSpPr/>
+          <p:nvPr/>
+        </p:nvSpPr>
+        <p:spPr>
+          <a:xfrm>
+            <a:off x="548640" y="4782312"/>
+            <a:ext cx="11064240" cy="932688"/>
+          </a:xfrm>
+          <a:prstGeom prst="roundRect">
+            <a:avLst>
+              <a:gd name="adj" fmla="val 7843"/>
+            </a:avLst>
+          </a:prstGeom>
+          <a:solidFill>
+            <a:srgbClr val="1E232C"/>
+          </a:solidFill>
+          <a:ln/>
+        </p:spPr>
+      </p:sp>
+      <p:sp>
+        <p:nvSpPr>
+          <p:cNvPr id="17" name="Text 15"/>
+          <p:cNvSpPr/>
+          <p:nvPr/>
+        </p:nvSpPr>
+        <p:spPr>
+          <a:xfrm>
+            <a:off x="777240" y="4956048"/>
+            <a:ext cx="585216" cy="585216"/>
+          </a:xfrm>
+          <a:prstGeom prst="roundRect">
+            <a:avLst>
+              <a:gd name="adj" fmla="val 15625"/>
+            </a:avLst>
+          </a:prstGeom>
+          <a:solidFill>
+            <a:srgbClr val="E0A458"/>
+          </a:solidFill>
+          <a:ln/>
+        </p:spPr>
+        <p:txBody>
+          <a:bodyPr wrap="square" rtlCol="0" anchor="ctr"/>
+          <a:lstStyle/>
+          <a:p>
+            <a:pPr algn="ctr" indent="0" marL="0">
+              <a:buNone/>
+            </a:pPr>
+            <a:r>
+              <a:rPr lang="en-US" sz="2200" b="1" dirty="0">
+                <a:solidFill>
+                  <a:srgbClr val="13161C"/>
                 </a:solidFill>
                 <a:latin typeface="Courier New" pitchFamily="34" charset="0"/>
                 <a:ea typeface="Courier New" pitchFamily="34" charset="-122"/>
                 <a:cs typeface="Courier New" pitchFamily="34" charset="-120"/>
               </a:rPr>
-              <a:t>    unsigned int p2 = ~p1;          // 0101... = 0x55555555</a:t>
-            </a:r>
-            <a:endParaRPr lang="en-US" sz="1300" dirty="0"/>
-          </a:p>
-          <a:p>
-            <a:pPr algn="l" indent="0" marL="0">
-              <a:lnSpc>
-                <a:spcPct val="108000"/>
-              </a:lnSpc>
-              <a:buNone/>
-            </a:pPr>
-            <a:r>
-              <a:rPr lang="en-US" sz="1300" dirty="0">
-                <a:solidFill>
-                  <a:srgbClr val="4FB0C6"/>
-                </a:solidFill>
-                <a:latin typeface="Courier New" pitchFamily="34" charset="0"/>
-                <a:ea typeface="Courier New" pitchFamily="34" charset="-122"/>
-                <a:cs typeface="Courier New" pitchFamily="34" charset="-120"/>
-              </a:rPr>
-              <a:t>    move_inv_test(ptr, tot_num_blocks, p1, p2);  // 세션 2 재사용!</a:t>
-            </a:r>
-            <a:endParaRPr lang="en-US" sz="1300" dirty="0"/>
-          </a:p>
-          <a:p>
-            <a:pPr algn="l" indent="0" marL="0">
-              <a:lnSpc>
-                <a:spcPct val="108000"/>
-              </a:lnSpc>
-              <a:buNone/>
-            </a:pPr>
-            <a:r>
-              <a:rPr lang="en-US" sz="1300" dirty="0">
-                <a:solidFill>
-                  <a:srgbClr val="4FB0C6"/>
-                </a:solidFill>
-                <a:latin typeface="Courier New" pitchFamily="34" charset="0"/>
-                <a:ea typeface="Courier New" pitchFamily="34" charset="-122"/>
-                <a:cs typeface="Courier New" pitchFamily="34" charset="-120"/>
-              </a:rPr>
-              <a:t>    move_inv_test(ptr, tot_num_blocks, p2, p1);</a:t>
-            </a:r>
-            <a:endParaRPr lang="en-US" sz="1300" dirty="0"/>
-          </a:p>
-          <a:p>
-            <a:pPr algn="l" indent="0" marL="0">
-              <a:lnSpc>
-                <a:spcPct val="108000"/>
-              </a:lnSpc>
-              <a:buNone/>
-            </a:pPr>
-            <a:r>
-              <a:rPr lang="en-US" sz="1300" dirty="0">
+              <a:t>4</a:t>
+            </a:r>
+            <a:endParaRPr lang="en-US" sz="2200" dirty="0"/>
+          </a:p>
+        </p:txBody>
+      </p:sp>
+      <p:sp>
+        <p:nvSpPr>
+          <p:cNvPr id="18" name="Text 16"/>
+          <p:cNvSpPr/>
+          <p:nvPr/>
+        </p:nvSpPr>
+        <p:spPr>
+          <a:xfrm>
+            <a:off x="1600200" y="4892040"/>
+            <a:ext cx="9784080" cy="402336"/>
+          </a:xfrm>
+          <a:prstGeom prst="rect">
+            <a:avLst/>
+          </a:prstGeom>
+          <a:noFill/>
+          <a:ln/>
+        </p:spPr>
+        <p:txBody>
+          <a:bodyPr wrap="square" lIns="0" tIns="0" rIns="0" bIns="0" rtlCol="0" anchor="ctr"/>
+          <a:lstStyle/>
+          <a:p>
+            <a:pPr indent="0" marL="0">
+              <a:buNone/>
+            </a:pPr>
+            <a:r>
+              <a:rPr lang="en-US" sz="1800" b="1" dirty="0">
                 <a:solidFill>
                   <a:srgbClr val="E8EDF2"/>
-                </a:solidFill>
-                <a:latin typeface="Courier New" pitchFamily="34" charset="0"/>
-                <a:ea typeface="Courier New" pitchFamily="34" charset="-122"/>
-                <a:cs typeface="Courier New" pitchFamily="34" charset="-120"/>
-              </a:rPr>
-              <a:t>}</a:t>
-            </a:r>
-            <a:endParaRPr lang="en-US" sz="1300" dirty="0"/>
-          </a:p>
-        </p:txBody>
-      </p:sp>
-      <p:sp>
-        <p:nvSpPr>
-          <p:cNvPr id="6" name="Shape 4"/>
-          <p:cNvSpPr/>
-          <p:nvPr/>
-        </p:nvSpPr>
-        <p:spPr>
-          <a:xfrm>
-            <a:off x="548640" y="3840480"/>
-            <a:ext cx="11064240" cy="1463040"/>
-          </a:xfrm>
-          <a:prstGeom prst="roundRect">
-            <a:avLst>
-              <a:gd name="adj" fmla="val 3750"/>
-            </a:avLst>
-          </a:prstGeom>
-          <a:solidFill>
-            <a:srgbClr val="0E1116"/>
-          </a:solidFill>
-          <a:ln w="12700">
-            <a:solidFill>
-              <a:srgbClr val="2C3440"/>
-            </a:solidFill>
-            <a:prstDash val="solid"/>
-          </a:ln>
-        </p:spPr>
-      </p:sp>
-      <p:sp>
-        <p:nvSpPr>
-          <p:cNvPr id="7" name="Text 5"/>
-          <p:cNvSpPr/>
-          <p:nvPr/>
-        </p:nvSpPr>
-        <p:spPr>
-          <a:xfrm>
-            <a:off x="749808" y="3986784"/>
-            <a:ext cx="10661904" cy="1170432"/>
-          </a:xfrm>
-          <a:prstGeom prst="rect">
-            <a:avLst/>
-          </a:prstGeom>
-          <a:noFill/>
-          <a:ln/>
-        </p:spPr>
-        <p:txBody>
-          <a:bodyPr wrap="square" lIns="0" tIns="0" rIns="0" bIns="0" rtlCol="0" anchor="t"/>
-          <a:lstStyle/>
-          <a:p>
-            <a:pPr algn="l" indent="0" marL="0">
-              <a:lnSpc>
-                <a:spcPct val="108000"/>
-              </a:lnSpc>
-              <a:buNone/>
-            </a:pPr>
-            <a:r>
-              <a:rPr lang="en-US" sz="1300" dirty="0">
-                <a:solidFill>
-                  <a:srgbClr val="9AA6B2"/>
-                </a:solidFill>
-                <a:latin typeface="Courier New" pitchFamily="34" charset="0"/>
-                <a:ea typeface="Courier New" pitchFamily="34" charset="-122"/>
-                <a:cs typeface="Courier New" pitchFamily="34" charset="-120"/>
-              </a:rPr>
-              <a:t>// 2) tests.cpp:1555 — 배열에 등록</a:t>
-            </a:r>
-            <a:endParaRPr lang="en-US" sz="1300" dirty="0"/>
-          </a:p>
-          <a:p>
-            <a:pPr algn="l" indent="0" marL="0">
-              <a:lnSpc>
-                <a:spcPct val="108000"/>
-              </a:lnSpc>
-              <a:buNone/>
-            </a:pPr>
-            <a:r>
-              <a:rPr lang="en-US" sz="1300" dirty="0">
-                <a:solidFill>
-                  <a:srgbClr val="8CC63F"/>
-                </a:solidFill>
-                <a:latin typeface="Courier New" pitchFamily="34" charset="0"/>
-                <a:ea typeface="Courier New" pitchFamily="34" charset="-122"/>
-                <a:cs typeface="Courier New" pitchFamily="34" charset="-120"/>
-              </a:rPr>
-              <a:t>{test_checkerboard, (char*)"Test11 [Checkerboard]", 1},</a:t>
-            </a:r>
-            <a:endParaRPr lang="en-US" sz="1300" dirty="0"/>
-          </a:p>
-          <a:p>
-            <a:pPr algn="l" indent="0" marL="0">
-              <a:lnSpc>
-                <a:spcPct val="108000"/>
-              </a:lnSpc>
-              <a:buNone/>
-            </a:pPr>
-            <a:r>
-              <a:rPr lang="en-US" sz="1300" dirty="0">
-                <a:solidFill>
-                  <a:srgbClr val="9AA6B2"/>
-                </a:solidFill>
-                <a:latin typeface="Courier New" pitchFamily="34" charset="0"/>
-                <a:ea typeface="Courier New" pitchFamily="34" charset="-122"/>
-                <a:cs typeface="Courier New" pitchFamily="34" charset="-120"/>
-              </a:rPr>
-              <a:t>// 3) cuda_memtest.cpp:57 — 크기 상수</a:t>
-            </a:r>
-            <a:endParaRPr lang="en-US" sz="1300" dirty="0"/>
-          </a:p>
-          <a:p>
-            <a:pPr algn="l" indent="0" marL="0">
-              <a:lnSpc>
-                <a:spcPct val="108000"/>
-              </a:lnSpc>
-              <a:buNone/>
-            </a:pPr>
-            <a:r>
-              <a:rPr lang="en-US" sz="1300" dirty="0">
-                <a:solidFill>
-                  <a:srgbClr val="E0645B"/>
-                </a:solidFill>
-                <a:latin typeface="Courier New" pitchFamily="34" charset="0"/>
-                <a:ea typeface="Courier New" pitchFamily="34" charset="-122"/>
-                <a:cs typeface="Courier New" pitchFamily="34" charset="-120"/>
-              </a:rPr>
-              <a:t>extern cuda_memtest_t cuda_memtests[12];   // 11 → 12</a:t>
-            </a:r>
-            <a:endParaRPr lang="en-US" sz="1300" dirty="0"/>
-          </a:p>
-        </p:txBody>
-      </p:sp>
-      <p:sp>
-        <p:nvSpPr>
-          <p:cNvPr id="8" name="Text 6"/>
-          <p:cNvSpPr/>
-          <p:nvPr/>
-        </p:nvSpPr>
-        <p:spPr>
-          <a:xfrm>
-            <a:off x="548640" y="5440680"/>
-            <a:ext cx="11064240" cy="457200"/>
-          </a:xfrm>
-          <a:prstGeom prst="rect">
-            <a:avLst/>
-          </a:prstGeom>
-          <a:noFill/>
-          <a:ln/>
-        </p:spPr>
-        <p:txBody>
-          <a:bodyPr wrap="square" lIns="0" tIns="0" rIns="0" bIns="0" rtlCol="0" anchor="ctr"/>
-          <a:lstStyle/>
-          <a:p>
-            <a:pPr indent="0" marL="0">
-              <a:buNone/>
-            </a:pPr>
-            <a:r>
-              <a:rPr lang="en-US" sz="1400" i="1" dirty="0">
-                <a:solidFill>
-                  <a:srgbClr val="9AA6B2"/>
                 </a:solidFill>
                 <a:latin typeface="Malgun Gothic" pitchFamily="34" charset="0"/>
                 <a:ea typeface="Malgun Gothic" pitchFamily="34" charset="-122"/>
                 <a:cs typeface="Malgun Gothic" pitchFamily="34" charset="-120"/>
               </a:rPr>
-              <a:t>새 커널을 짤 필요가 없습니다 — 세션 2의 move_inv_test(write→readwrite→read)가 검사를 다 해줍니다. 재사용의 힘!</a:t>
+              <a:t>빌드 &amp; 실행</a:t>
+            </a:r>
+            <a:endParaRPr lang="en-US" sz="1800" dirty="0"/>
+          </a:p>
+        </p:txBody>
+      </p:sp>
+      <p:sp>
+        <p:nvSpPr>
+          <p:cNvPr id="19" name="Text 17"/>
+          <p:cNvSpPr/>
+          <p:nvPr/>
+        </p:nvSpPr>
+        <p:spPr>
+          <a:xfrm>
+            <a:off x="1600200" y="5276088"/>
+            <a:ext cx="9784080" cy="384048"/>
+          </a:xfrm>
+          <a:prstGeom prst="rect">
+            <a:avLst/>
+          </a:prstGeom>
+          <a:noFill/>
+          <a:ln/>
+        </p:spPr>
+        <p:txBody>
+          <a:bodyPr wrap="square" lIns="0" tIns="0" rIns="0" bIns="0" rtlCol="0" anchor="ctr"/>
+          <a:lstStyle/>
+          <a:p>
+            <a:pPr indent="0" marL="0">
+              <a:buNone/>
+            </a:pPr>
+            <a:r>
+              <a:rPr lang="en-US" sz="1400" dirty="0">
+                <a:solidFill>
+                  <a:srgbClr val="9AA6B2"/>
+                </a:solidFill>
+                <a:latin typeface="Malgun Gothic" pitchFamily="34" charset="0"/>
+                <a:ea typeface="Malgun Gothic" pitchFamily="34" charset="-122"/>
+                <a:cs typeface="Malgun Gothic" pitchFamily="34" charset="-120"/>
+              </a:rPr>
+              <a:t>--list_tests 로 확인 후 --enable_test 11 로 실행</a:t>
             </a:r>
             <a:endParaRPr lang="en-US" sz="1400" dirty="0"/>
+          </a:p>
+        </p:txBody>
+      </p:sp>
+      <p:sp>
+        <p:nvSpPr>
+          <p:cNvPr id="20" name="Text 18"/>
+          <p:cNvSpPr/>
+          <p:nvPr/>
+        </p:nvSpPr>
+        <p:spPr>
+          <a:xfrm>
+            <a:off x="548640" y="5943600"/>
+            <a:ext cx="11064240" cy="457200"/>
+          </a:xfrm>
+          <a:prstGeom prst="rect">
+            <a:avLst/>
+          </a:prstGeom>
+          <a:noFill/>
+          <a:ln/>
+        </p:spPr>
+        <p:txBody>
+          <a:bodyPr wrap="square" lIns="0" tIns="0" rIns="0" bIns="0" rtlCol="0" anchor="ctr"/>
+          <a:lstStyle/>
+          <a:p>
+            <a:pPr indent="0" marL="0">
+              <a:buNone/>
+            </a:pPr>
+            <a:r>
+              <a:rPr lang="en-US" sz="1300" i="1" dirty="0">
+                <a:solidFill>
+                  <a:srgbClr val="E0A458"/>
+                </a:solidFill>
+                <a:latin typeface="Malgun Gothic" pitchFamily="34" charset="0"/>
+                <a:ea typeface="Malgun Gothic" pitchFamily="34" charset="-122"/>
+                <a:cs typeface="Malgun Gothic" pitchFamily="34" charset="-120"/>
+              </a:rPr>
+              <a:t>⚠️ 3단계를 빠뜨리면 새 테스트가 목록에 안 보입니다 — main 쪽 DIM()이 이 상수를 셉니다(cuda_memtest.cpp:223).</a:t>
+            </a:r>
+            <a:endParaRPr lang="en-US" sz="1300" dirty="0"/>
           </a:p>
         </p:txBody>
       </p:sp>
@@ -6755,7 +9414,7 @@
                 <a:ea typeface="Courier New" pitchFamily="34" charset="-122"/>
                 <a:cs typeface="Courier New" pitchFamily="34" charset="-120"/>
               </a:rPr>
-              <a:t>8</a:t>
+              <a:t>7</a:t>
             </a:r>
             <a:endParaRPr lang="en-US" sz="2200" dirty="0"/>
           </a:p>
@@ -6794,7 +9453,7 @@
                 <a:ea typeface="Malgun Gothic" pitchFamily="34" charset="-122"/>
                 <a:cs typeface="Malgun Gothic" pitchFamily="34" charset="-120"/>
               </a:rPr>
-              <a:t>전체 여정 되짚기</a:t>
+              <a:t>옵션 A · 코드 스케치</a:t>
             </a:r>
             <a:endParaRPr lang="en-US" sz="3000" dirty="0"/>
           </a:p>
@@ -6808,18 +9467,23 @@
         </p:nvSpPr>
         <p:spPr>
           <a:xfrm>
-            <a:off x="548640" y="1600200"/>
-            <a:ext cx="11064240" cy="786384"/>
+            <a:off x="548640" y="1554480"/>
+            <a:ext cx="11064240" cy="2148840"/>
           </a:xfrm>
           <a:prstGeom prst="roundRect">
             <a:avLst>
-              <a:gd name="adj" fmla="val 8140"/>
+              <a:gd name="adj" fmla="val 2553"/>
             </a:avLst>
           </a:prstGeom>
           <a:solidFill>
-            <a:srgbClr val="1E232C"/>
+            <a:srgbClr val="0E1116"/>
           </a:solidFill>
-          <a:ln/>
+          <a:ln w="12700">
+            <a:solidFill>
+              <a:srgbClr val="2C3440"/>
+            </a:solidFill>
+            <a:prstDash val="solid"/>
+          </a:ln>
         </p:spPr>
       </p:sp>
       <p:sp>
@@ -6830,705 +9494,323 @@
         </p:nvSpPr>
         <p:spPr>
           <a:xfrm>
-            <a:off x="804672" y="1691640"/>
-            <a:ext cx="1554480" cy="603504"/>
-          </a:xfrm>
-          <a:prstGeom prst="rect">
-            <a:avLst/>
-          </a:prstGeom>
-          <a:noFill/>
-          <a:ln/>
-        </p:spPr>
-        <p:txBody>
-          <a:bodyPr wrap="square" lIns="0" tIns="0" rIns="0" bIns="0" rtlCol="0" anchor="ctr"/>
-          <a:lstStyle/>
-          <a:p>
-            <a:pPr indent="0" marL="0">
-              <a:buNone/>
-            </a:pPr>
-            <a:r>
-              <a:rPr lang="en-US" sz="1700" b="1" dirty="0">
-                <a:solidFill>
-                  <a:srgbClr val="8CC63F"/>
+            <a:off x="749808" y="1700784"/>
+            <a:ext cx="10661904" cy="1856232"/>
+          </a:xfrm>
+          <a:prstGeom prst="rect">
+            <a:avLst/>
+          </a:prstGeom>
+          <a:noFill/>
+          <a:ln/>
+        </p:spPr>
+        <p:txBody>
+          <a:bodyPr wrap="square" lIns="0" tIns="0" rIns="0" bIns="0" rtlCol="0" anchor="t"/>
+          <a:lstStyle/>
+          <a:p>
+            <a:pPr algn="l" indent="0" marL="0">
+              <a:lnSpc>
+                <a:spcPct val="108000"/>
+              </a:lnSpc>
+              <a:buNone/>
+            </a:pPr>
+            <a:r>
+              <a:rPr lang="en-US" sz="1300" dirty="0">
+                <a:solidFill>
+                  <a:srgbClr val="9AA6B2"/>
                 </a:solidFill>
                 <a:latin typeface="Courier New" pitchFamily="34" charset="0"/>
                 <a:ea typeface="Courier New" pitchFamily="34" charset="-122"/>
                 <a:cs typeface="Courier New" pitchFamily="34" charset="-120"/>
               </a:rPr>
-              <a:t>세션 1</a:t>
-            </a:r>
-            <a:endParaRPr lang="en-US" sz="1700" dirty="0"/>
-          </a:p>
-        </p:txBody>
-      </p:sp>
-      <p:sp>
-        <p:nvSpPr>
-          <p:cNvPr id="6" name="Text 4"/>
-          <p:cNvSpPr/>
-          <p:nvPr/>
-        </p:nvSpPr>
-        <p:spPr>
-          <a:xfrm>
-            <a:off x="2468880" y="1691640"/>
-            <a:ext cx="4206240" cy="603504"/>
-          </a:xfrm>
-          <a:prstGeom prst="rect">
-            <a:avLst/>
-          </a:prstGeom>
-          <a:noFill/>
-          <a:ln/>
-        </p:spPr>
-        <p:txBody>
-          <a:bodyPr wrap="square" lIns="0" tIns="0" rIns="0" bIns="0" rtlCol="0" anchor="ctr"/>
-          <a:lstStyle/>
-          <a:p>
-            <a:pPr indent="0" marL="0">
-              <a:buNone/>
-            </a:pPr>
-            <a:r>
-              <a:rPr lang="en-US" sz="1600" b="1" dirty="0">
+              <a:t>// 1) tests.cpp — test2 아래에 새 함수</a:t>
+            </a:r>
+            <a:endParaRPr lang="en-US" sz="1300" dirty="0"/>
+          </a:p>
+          <a:p>
+            <a:pPr algn="l" indent="0" marL="0">
+              <a:lnSpc>
+                <a:spcPct val="108000"/>
+              </a:lnSpc>
+              <a:buNone/>
+            </a:pPr>
+            <a:r>
+              <a:rPr lang="en-US" sz="1300" dirty="0">
                 <a:solidFill>
                   <a:srgbClr val="E8EDF2"/>
+                </a:solidFill>
+                <a:latin typeface="Courier New" pitchFamily="34" charset="0"/>
+                <a:ea typeface="Courier New" pitchFamily="34" charset="-122"/>
+                <a:cs typeface="Courier New" pitchFamily="34" charset="-120"/>
+              </a:rPr>
+              <a:t>void test_checkerboard(char* ptr, unsigned int tot_num_blocks) {</a:t>
+            </a:r>
+            <a:endParaRPr lang="en-US" sz="1300" dirty="0"/>
+          </a:p>
+          <a:p>
+            <a:pPr algn="l" indent="0" marL="0">
+              <a:lnSpc>
+                <a:spcPct val="108000"/>
+              </a:lnSpc>
+              <a:buNone/>
+            </a:pPr>
+            <a:r>
+              <a:rPr lang="en-US" sz="1300" dirty="0">
+                <a:solidFill>
+                  <a:srgbClr val="8CC63F"/>
+                </a:solidFill>
+                <a:latin typeface="Courier New" pitchFamily="34" charset="0"/>
+                <a:ea typeface="Courier New" pitchFamily="34" charset="-122"/>
+                <a:cs typeface="Courier New" pitchFamily="34" charset="-120"/>
+              </a:rPr>
+              <a:t>    unsigned int p1 = 0xAAAAAAAA;   // 1010...  </a:t>
+            </a:r>
+            <a:endParaRPr lang="en-US" sz="1300" dirty="0"/>
+          </a:p>
+          <a:p>
+            <a:pPr algn="l" indent="0" marL="0">
+              <a:lnSpc>
+                <a:spcPct val="108000"/>
+              </a:lnSpc>
+              <a:buNone/>
+            </a:pPr>
+            <a:r>
+              <a:rPr lang="en-US" sz="1300" dirty="0">
+                <a:solidFill>
+                  <a:srgbClr val="8CC63F"/>
+                </a:solidFill>
+                <a:latin typeface="Courier New" pitchFamily="34" charset="0"/>
+                <a:ea typeface="Courier New" pitchFamily="34" charset="-122"/>
+                <a:cs typeface="Courier New" pitchFamily="34" charset="-120"/>
+              </a:rPr>
+              <a:t>    unsigned int p2 = ~p1;          // 0101... = 0x55555555</a:t>
+            </a:r>
+            <a:endParaRPr lang="en-US" sz="1300" dirty="0"/>
+          </a:p>
+          <a:p>
+            <a:pPr algn="l" indent="0" marL="0">
+              <a:lnSpc>
+                <a:spcPct val="108000"/>
+              </a:lnSpc>
+              <a:buNone/>
+            </a:pPr>
+            <a:r>
+              <a:rPr lang="en-US" sz="1300" dirty="0">
+                <a:solidFill>
+                  <a:srgbClr val="4FB0C6"/>
+                </a:solidFill>
+                <a:latin typeface="Courier New" pitchFamily="34" charset="0"/>
+                <a:ea typeface="Courier New" pitchFamily="34" charset="-122"/>
+                <a:cs typeface="Courier New" pitchFamily="34" charset="-120"/>
+              </a:rPr>
+              <a:t>    move_inv_test(ptr, tot_num_blocks, p1, p2);  // 세션 2 재사용!</a:t>
+            </a:r>
+            <a:endParaRPr lang="en-US" sz="1300" dirty="0"/>
+          </a:p>
+          <a:p>
+            <a:pPr algn="l" indent="0" marL="0">
+              <a:lnSpc>
+                <a:spcPct val="108000"/>
+              </a:lnSpc>
+              <a:buNone/>
+            </a:pPr>
+            <a:r>
+              <a:rPr lang="en-US" sz="1300" dirty="0">
+                <a:solidFill>
+                  <a:srgbClr val="4FB0C6"/>
+                </a:solidFill>
+                <a:latin typeface="Courier New" pitchFamily="34" charset="0"/>
+                <a:ea typeface="Courier New" pitchFamily="34" charset="-122"/>
+                <a:cs typeface="Courier New" pitchFamily="34" charset="-120"/>
+              </a:rPr>
+              <a:t>    move_inv_test(ptr, tot_num_blocks, p2, p1);</a:t>
+            </a:r>
+            <a:endParaRPr lang="en-US" sz="1300" dirty="0"/>
+          </a:p>
+          <a:p>
+            <a:pPr algn="l" indent="0" marL="0">
+              <a:lnSpc>
+                <a:spcPct val="108000"/>
+              </a:lnSpc>
+              <a:buNone/>
+            </a:pPr>
+            <a:r>
+              <a:rPr lang="en-US" sz="1300" dirty="0">
+                <a:solidFill>
+                  <a:srgbClr val="E8EDF2"/>
+                </a:solidFill>
+                <a:latin typeface="Courier New" pitchFamily="34" charset="0"/>
+                <a:ea typeface="Courier New" pitchFamily="34" charset="-122"/>
+                <a:cs typeface="Courier New" pitchFamily="34" charset="-120"/>
+              </a:rPr>
+              <a:t>}</a:t>
+            </a:r>
+            <a:endParaRPr lang="en-US" sz="1300" dirty="0"/>
+          </a:p>
+        </p:txBody>
+      </p:sp>
+      <p:sp>
+        <p:nvSpPr>
+          <p:cNvPr id="6" name="Shape 4"/>
+          <p:cNvSpPr/>
+          <p:nvPr/>
+        </p:nvSpPr>
+        <p:spPr>
+          <a:xfrm>
+            <a:off x="548640" y="3840480"/>
+            <a:ext cx="11064240" cy="1463040"/>
+          </a:xfrm>
+          <a:prstGeom prst="roundRect">
+            <a:avLst>
+              <a:gd name="adj" fmla="val 3750"/>
+            </a:avLst>
+          </a:prstGeom>
+          <a:solidFill>
+            <a:srgbClr val="0E1116"/>
+          </a:solidFill>
+          <a:ln w="12700">
+            <a:solidFill>
+              <a:srgbClr val="2C3440"/>
+            </a:solidFill>
+            <a:prstDash val="solid"/>
+          </a:ln>
+        </p:spPr>
+      </p:sp>
+      <p:sp>
+        <p:nvSpPr>
+          <p:cNvPr id="7" name="Text 5"/>
+          <p:cNvSpPr/>
+          <p:nvPr/>
+        </p:nvSpPr>
+        <p:spPr>
+          <a:xfrm>
+            <a:off x="749808" y="3986784"/>
+            <a:ext cx="10661904" cy="1170432"/>
+          </a:xfrm>
+          <a:prstGeom prst="rect">
+            <a:avLst/>
+          </a:prstGeom>
+          <a:noFill/>
+          <a:ln/>
+        </p:spPr>
+        <p:txBody>
+          <a:bodyPr wrap="square" lIns="0" tIns="0" rIns="0" bIns="0" rtlCol="0" anchor="t"/>
+          <a:lstStyle/>
+          <a:p>
+            <a:pPr algn="l" indent="0" marL="0">
+              <a:lnSpc>
+                <a:spcPct val="108000"/>
+              </a:lnSpc>
+              <a:buNone/>
+            </a:pPr>
+            <a:r>
+              <a:rPr lang="en-US" sz="1300" dirty="0">
+                <a:solidFill>
+                  <a:srgbClr val="9AA6B2"/>
+                </a:solidFill>
+                <a:latin typeface="Courier New" pitchFamily="34" charset="0"/>
+                <a:ea typeface="Courier New" pitchFamily="34" charset="-122"/>
+                <a:cs typeface="Courier New" pitchFamily="34" charset="-120"/>
+              </a:rPr>
+              <a:t>// 2) tests.cpp:1555 — 배열에 등록</a:t>
+            </a:r>
+            <a:endParaRPr lang="en-US" sz="1300" dirty="0"/>
+          </a:p>
+          <a:p>
+            <a:pPr algn="l" indent="0" marL="0">
+              <a:lnSpc>
+                <a:spcPct val="108000"/>
+              </a:lnSpc>
+              <a:buNone/>
+            </a:pPr>
+            <a:r>
+              <a:rPr lang="en-US" sz="1300" dirty="0">
+                <a:solidFill>
+                  <a:srgbClr val="8CC63F"/>
+                </a:solidFill>
+                <a:latin typeface="Courier New" pitchFamily="34" charset="0"/>
+                <a:ea typeface="Courier New" pitchFamily="34" charset="-122"/>
+                <a:cs typeface="Courier New" pitchFamily="34" charset="-120"/>
+              </a:rPr>
+              <a:t>{test_checkerboard, (char*)"Test11 [Checkerboard]", 1},</a:t>
+            </a:r>
+            <a:endParaRPr lang="en-US" sz="1300" dirty="0"/>
+          </a:p>
+          <a:p>
+            <a:pPr algn="l" indent="0" marL="0">
+              <a:lnSpc>
+                <a:spcPct val="108000"/>
+              </a:lnSpc>
+              <a:buNone/>
+            </a:pPr>
+            <a:r>
+              <a:rPr lang="en-US" sz="1300" dirty="0">
+                <a:solidFill>
+                  <a:srgbClr val="9AA6B2"/>
+                </a:solidFill>
+                <a:latin typeface="Courier New" pitchFamily="34" charset="0"/>
+                <a:ea typeface="Courier New" pitchFamily="34" charset="-122"/>
+                <a:cs typeface="Courier New" pitchFamily="34" charset="-120"/>
+              </a:rPr>
+              <a:t>// 3) cuda_memtest.cpp:57 — 크기 상수</a:t>
+            </a:r>
+            <a:endParaRPr lang="en-US" sz="1300" dirty="0"/>
+          </a:p>
+          <a:p>
+            <a:pPr algn="l" indent="0" marL="0">
+              <a:lnSpc>
+                <a:spcPct val="108000"/>
+              </a:lnSpc>
+              <a:buNone/>
+            </a:pPr>
+            <a:r>
+              <a:rPr lang="en-US" sz="1300" dirty="0">
+                <a:solidFill>
+                  <a:srgbClr val="E0645B"/>
+                </a:solidFill>
+                <a:latin typeface="Courier New" pitchFamily="34" charset="0"/>
+                <a:ea typeface="Courier New" pitchFamily="34" charset="-122"/>
+                <a:cs typeface="Courier New" pitchFamily="34" charset="-120"/>
+              </a:rPr>
+              <a:t>extern cuda_memtest_t cuda_memtests[12];   // 11 → 12</a:t>
+            </a:r>
+            <a:endParaRPr lang="en-US" sz="1300" dirty="0"/>
+          </a:p>
+        </p:txBody>
+      </p:sp>
+      <p:sp>
+        <p:nvSpPr>
+          <p:cNvPr id="8" name="Text 6"/>
+          <p:cNvSpPr/>
+          <p:nvPr/>
+        </p:nvSpPr>
+        <p:spPr>
+          <a:xfrm>
+            <a:off x="548640" y="5440680"/>
+            <a:ext cx="11064240" cy="457200"/>
+          </a:xfrm>
+          <a:prstGeom prst="rect">
+            <a:avLst/>
+          </a:prstGeom>
+          <a:noFill/>
+          <a:ln/>
+        </p:spPr>
+        <p:txBody>
+          <a:bodyPr wrap="square" lIns="0" tIns="0" rIns="0" bIns="0" rtlCol="0" anchor="ctr"/>
+          <a:lstStyle/>
+          <a:p>
+            <a:pPr indent="0" marL="0">
+              <a:buNone/>
+            </a:pPr>
+            <a:r>
+              <a:rPr lang="en-US" sz="1400" i="1" dirty="0">
+                <a:solidFill>
+                  <a:srgbClr val="9AA6B2"/>
                 </a:solidFill>
                 <a:latin typeface="Malgun Gothic" pitchFamily="34" charset="0"/>
                 <a:ea typeface="Malgun Gothic" pitchFamily="34" charset="-122"/>
                 <a:cs typeface="Malgun Gothic" pitchFamily="34" charset="-120"/>
               </a:rPr>
-              <a:t>스레드 모델 · 첫 커널</a:t>
-            </a:r>
-            <a:endParaRPr lang="en-US" sz="1600" dirty="0"/>
-          </a:p>
-        </p:txBody>
-      </p:sp>
-      <p:sp>
-        <p:nvSpPr>
-          <p:cNvPr id="7" name="Text 5"/>
-          <p:cNvSpPr/>
-          <p:nvPr/>
-        </p:nvSpPr>
-        <p:spPr>
-          <a:xfrm>
-            <a:off x="6858000" y="1691640"/>
-            <a:ext cx="4480560" cy="603504"/>
-          </a:xfrm>
-          <a:prstGeom prst="rect">
-            <a:avLst/>
-          </a:prstGeom>
-          <a:noFill/>
-          <a:ln/>
-        </p:spPr>
-        <p:txBody>
-          <a:bodyPr wrap="square" lIns="0" tIns="0" rIns="0" bIns="0" rtlCol="0" anchor="ctr"/>
-          <a:lstStyle/>
-          <a:p>
-            <a:pPr indent="0" marL="0">
-              <a:buNone/>
-            </a:pPr>
-            <a:r>
-              <a:rPr lang="en-US" sz="1300" dirty="0">
-                <a:solidFill>
-                  <a:srgbClr val="9AA6B2"/>
-                </a:solidFill>
-                <a:latin typeface="Courier New" pitchFamily="34" charset="0"/>
-                <a:ea typeface="Courier New" pitchFamily="34" charset="-122"/>
-                <a:cs typeface="Courier New" pitchFamily="34" charset="-120"/>
-              </a:rPr>
-              <a:t>__global__, &lt;&lt;&lt;grid,block&gt;&gt;&gt;, blockIdx</a:t>
-            </a:r>
-            <a:endParaRPr lang="en-US" sz="1300" dirty="0"/>
-          </a:p>
-        </p:txBody>
-      </p:sp>
-      <p:sp>
-        <p:nvSpPr>
-          <p:cNvPr id="8" name="Shape 6"/>
-          <p:cNvSpPr/>
-          <p:nvPr/>
-        </p:nvSpPr>
-        <p:spPr>
-          <a:xfrm>
-            <a:off x="548640" y="2496312"/>
-            <a:ext cx="11064240" cy="786384"/>
-          </a:xfrm>
-          <a:prstGeom prst="roundRect">
-            <a:avLst>
-              <a:gd name="adj" fmla="val 8140"/>
-            </a:avLst>
-          </a:prstGeom>
-          <a:solidFill>
-            <a:srgbClr val="1E232C"/>
-          </a:solidFill>
-          <a:ln/>
-        </p:spPr>
-      </p:sp>
-      <p:sp>
-        <p:nvSpPr>
-          <p:cNvPr id="9" name="Text 7"/>
-          <p:cNvSpPr/>
-          <p:nvPr/>
-        </p:nvSpPr>
-        <p:spPr>
-          <a:xfrm>
-            <a:off x="804672" y="2587752"/>
-            <a:ext cx="1554480" cy="603504"/>
-          </a:xfrm>
-          <a:prstGeom prst="rect">
-            <a:avLst/>
-          </a:prstGeom>
-          <a:noFill/>
-          <a:ln/>
-        </p:spPr>
-        <p:txBody>
-          <a:bodyPr wrap="square" lIns="0" tIns="0" rIns="0" bIns="0" rtlCol="0" anchor="ctr"/>
-          <a:lstStyle/>
-          <a:p>
-            <a:pPr indent="0" marL="0">
-              <a:buNone/>
-            </a:pPr>
-            <a:r>
-              <a:rPr lang="en-US" sz="1700" b="1" dirty="0">
-                <a:solidFill>
-                  <a:srgbClr val="4FB0C6"/>
-                </a:solidFill>
-                <a:latin typeface="Courier New" pitchFamily="34" charset="0"/>
-                <a:ea typeface="Courier New" pitchFamily="34" charset="-122"/>
-                <a:cs typeface="Courier New" pitchFamily="34" charset="-120"/>
-              </a:rPr>
-              <a:t>세션 2</a:t>
-            </a:r>
-            <a:endParaRPr lang="en-US" sz="1700" dirty="0"/>
-          </a:p>
-        </p:txBody>
-      </p:sp>
-      <p:sp>
-        <p:nvSpPr>
-          <p:cNvPr id="10" name="Text 8"/>
-          <p:cNvSpPr/>
-          <p:nvPr/>
-        </p:nvSpPr>
-        <p:spPr>
-          <a:xfrm>
-            <a:off x="2468880" y="2587752"/>
-            <a:ext cx="4206240" cy="603504"/>
-          </a:xfrm>
-          <a:prstGeom prst="rect">
-            <a:avLst/>
-          </a:prstGeom>
-          <a:noFill/>
-          <a:ln/>
-        </p:spPr>
-        <p:txBody>
-          <a:bodyPr wrap="square" lIns="0" tIns="0" rIns="0" bIns="0" rtlCol="0" anchor="ctr"/>
-          <a:lstStyle/>
-          <a:p>
-            <a:pPr indent="0" marL="0">
-              <a:buNone/>
-            </a:pPr>
-            <a:r>
-              <a:rPr lang="en-US" sz="1600" b="1" dirty="0">
-                <a:solidFill>
-                  <a:srgbClr val="E8EDF2"/>
-                </a:solidFill>
-                <a:latin typeface="Malgun Gothic" pitchFamily="34" charset="0"/>
-                <a:ea typeface="Malgun Gothic" pitchFamily="34" charset="-122"/>
-                <a:cs typeface="Malgun Gothic" pitchFamily="34" charset="-120"/>
-              </a:rPr>
-              <a:t>메모리 모델 · 데이터 이동</a:t>
-            </a:r>
-            <a:endParaRPr lang="en-US" sz="1600" dirty="0"/>
-          </a:p>
-        </p:txBody>
-      </p:sp>
-      <p:sp>
-        <p:nvSpPr>
-          <p:cNvPr id="11" name="Text 9"/>
-          <p:cNvSpPr/>
-          <p:nvPr/>
-        </p:nvSpPr>
-        <p:spPr>
-          <a:xfrm>
-            <a:off x="6858000" y="2587752"/>
-            <a:ext cx="4480560" cy="603504"/>
-          </a:xfrm>
-          <a:prstGeom prst="rect">
-            <a:avLst/>
-          </a:prstGeom>
-          <a:noFill/>
-          <a:ln/>
-        </p:spPr>
-        <p:txBody>
-          <a:bodyPr wrap="square" lIns="0" tIns="0" rIns="0" bIns="0" rtlCol="0" anchor="ctr"/>
-          <a:lstStyle/>
-          <a:p>
-            <a:pPr indent="0" marL="0">
-              <a:buNone/>
-            </a:pPr>
-            <a:r>
-              <a:rPr lang="en-US" sz="1300" dirty="0">
-                <a:solidFill>
-                  <a:srgbClr val="9AA6B2"/>
-                </a:solidFill>
-                <a:latin typeface="Courier New" pitchFamily="34" charset="0"/>
-                <a:ea typeface="Courier New" pitchFamily="34" charset="-122"/>
-                <a:cs typeface="Courier New" pitchFamily="34" charset="-120"/>
-              </a:rPr>
-              <a:t>cudaMalloc/Memcpy, 쓰기-종료-읽기</a:t>
-            </a:r>
-            <a:endParaRPr lang="en-US" sz="1300" dirty="0"/>
-          </a:p>
-        </p:txBody>
-      </p:sp>
-      <p:sp>
-        <p:nvSpPr>
-          <p:cNvPr id="12" name="Shape 10"/>
-          <p:cNvSpPr/>
-          <p:nvPr/>
-        </p:nvSpPr>
-        <p:spPr>
-          <a:xfrm>
-            <a:off x="548640" y="3392424"/>
-            <a:ext cx="11064240" cy="786384"/>
-          </a:xfrm>
-          <a:prstGeom prst="roundRect">
-            <a:avLst>
-              <a:gd name="adj" fmla="val 8140"/>
-            </a:avLst>
-          </a:prstGeom>
-          <a:solidFill>
-            <a:srgbClr val="1E232C"/>
-          </a:solidFill>
-          <a:ln/>
-        </p:spPr>
-      </p:sp>
-      <p:sp>
-        <p:nvSpPr>
-          <p:cNvPr id="13" name="Text 11"/>
-          <p:cNvSpPr/>
-          <p:nvPr/>
-        </p:nvSpPr>
-        <p:spPr>
-          <a:xfrm>
-            <a:off x="804672" y="3483864"/>
-            <a:ext cx="1554480" cy="603504"/>
-          </a:xfrm>
-          <a:prstGeom prst="rect">
-            <a:avLst/>
-          </a:prstGeom>
-          <a:noFill/>
-          <a:ln/>
-        </p:spPr>
-        <p:txBody>
-          <a:bodyPr wrap="square" lIns="0" tIns="0" rIns="0" bIns="0" rtlCol="0" anchor="ctr"/>
-          <a:lstStyle/>
-          <a:p>
-            <a:pPr indent="0" marL="0">
-              <a:buNone/>
-            </a:pPr>
-            <a:r>
-              <a:rPr lang="en-US" sz="1700" b="1" dirty="0">
-                <a:solidFill>
-                  <a:srgbClr val="E0A458"/>
-                </a:solidFill>
-                <a:latin typeface="Courier New" pitchFamily="34" charset="0"/>
-                <a:ea typeface="Courier New" pitchFamily="34" charset="-122"/>
-                <a:cs typeface="Courier New" pitchFamily="34" charset="-120"/>
-              </a:rPr>
-              <a:t>세션 3</a:t>
-            </a:r>
-            <a:endParaRPr lang="en-US" sz="1700" dirty="0"/>
-          </a:p>
-        </p:txBody>
-      </p:sp>
-      <p:sp>
-        <p:nvSpPr>
-          <p:cNvPr id="14" name="Text 12"/>
-          <p:cNvSpPr/>
-          <p:nvPr/>
-        </p:nvSpPr>
-        <p:spPr>
-          <a:xfrm>
-            <a:off x="2468880" y="3483864"/>
-            <a:ext cx="4206240" cy="603504"/>
-          </a:xfrm>
-          <a:prstGeom prst="rect">
-            <a:avLst/>
-          </a:prstGeom>
-          <a:noFill/>
-          <a:ln/>
-        </p:spPr>
-        <p:txBody>
-          <a:bodyPr wrap="square" lIns="0" tIns="0" rIns="0" bIns="0" rtlCol="0" anchor="ctr"/>
-          <a:lstStyle/>
-          <a:p>
-            <a:pPr indent="0" marL="0">
-              <a:buNone/>
-            </a:pPr>
-            <a:r>
-              <a:rPr lang="en-US" sz="1600" b="1" dirty="0">
-                <a:solidFill>
-                  <a:srgbClr val="E8EDF2"/>
-                </a:solidFill>
-                <a:latin typeface="Malgun Gothic" pitchFamily="34" charset="0"/>
-                <a:ea typeface="Malgun Gothic" pitchFamily="34" charset="-122"/>
-                <a:cs typeface="Malgun Gothic" pitchFamily="34" charset="-120"/>
-              </a:rPr>
-              <a:t>병렬성 · 성능</a:t>
-            </a:r>
-            <a:endParaRPr lang="en-US" sz="1600" dirty="0"/>
-          </a:p>
-        </p:txBody>
-      </p:sp>
-      <p:sp>
-        <p:nvSpPr>
-          <p:cNvPr id="15" name="Text 13"/>
-          <p:cNvSpPr/>
-          <p:nvPr/>
-        </p:nvSpPr>
-        <p:spPr>
-          <a:xfrm>
-            <a:off x="6858000" y="3483864"/>
-            <a:ext cx="4480560" cy="603504"/>
-          </a:xfrm>
-          <a:prstGeom prst="rect">
-            <a:avLst/>
-          </a:prstGeom>
-          <a:noFill/>
-          <a:ln/>
-        </p:spPr>
-        <p:txBody>
-          <a:bodyPr wrap="square" lIns="0" tIns="0" rIns="0" bIns="0" rtlCol="0" anchor="ctr"/>
-          <a:lstStyle/>
-          <a:p>
-            <a:pPr indent="0" marL="0">
-              <a:buNone/>
-            </a:pPr>
-            <a:r>
-              <a:rPr lang="en-US" sz="1300" dirty="0">
-                <a:solidFill>
-                  <a:srgbClr val="9AA6B2"/>
-                </a:solidFill>
-                <a:latin typeface="Courier New" pitchFamily="34" charset="0"/>
-                <a:ea typeface="Courier New" pitchFamily="34" charset="-122"/>
-                <a:cs typeface="Courier New" pitchFamily="34" charset="-120"/>
-              </a:rPr>
-              <a:t>threadIdx, 병합, 이벤트로 대역폭</a:t>
-            </a:r>
-            <a:endParaRPr lang="en-US" sz="1300" dirty="0"/>
-          </a:p>
-        </p:txBody>
-      </p:sp>
-      <p:sp>
-        <p:nvSpPr>
-          <p:cNvPr id="16" name="Shape 14"/>
-          <p:cNvSpPr/>
-          <p:nvPr/>
-        </p:nvSpPr>
-        <p:spPr>
-          <a:xfrm>
-            <a:off x="548640" y="4288536"/>
-            <a:ext cx="11064240" cy="786384"/>
-          </a:xfrm>
-          <a:prstGeom prst="roundRect">
-            <a:avLst>
-              <a:gd name="adj" fmla="val 8140"/>
-            </a:avLst>
-          </a:prstGeom>
-          <a:solidFill>
-            <a:srgbClr val="1E232C"/>
-          </a:solidFill>
-          <a:ln/>
-        </p:spPr>
-      </p:sp>
-      <p:sp>
-        <p:nvSpPr>
-          <p:cNvPr id="17" name="Text 15"/>
-          <p:cNvSpPr/>
-          <p:nvPr/>
-        </p:nvSpPr>
-        <p:spPr>
-          <a:xfrm>
-            <a:off x="804672" y="4379976"/>
-            <a:ext cx="1554480" cy="603504"/>
-          </a:xfrm>
-          <a:prstGeom prst="rect">
-            <a:avLst/>
-          </a:prstGeom>
-          <a:noFill/>
-          <a:ln/>
-        </p:spPr>
-        <p:txBody>
-          <a:bodyPr wrap="square" lIns="0" tIns="0" rIns="0" bIns="0" rtlCol="0" anchor="ctr"/>
-          <a:lstStyle/>
-          <a:p>
-            <a:pPr indent="0" marL="0">
-              <a:buNone/>
-            </a:pPr>
-            <a:r>
-              <a:rPr lang="en-US" sz="1700" b="1" dirty="0">
-                <a:solidFill>
-                  <a:srgbClr val="E0645B"/>
-                </a:solidFill>
-                <a:latin typeface="Courier New" pitchFamily="34" charset="0"/>
-                <a:ea typeface="Courier New" pitchFamily="34" charset="-122"/>
-                <a:cs typeface="Courier New" pitchFamily="34" charset="-120"/>
-              </a:rPr>
-              <a:t>세션 4</a:t>
-            </a:r>
-            <a:endParaRPr lang="en-US" sz="1700" dirty="0"/>
-          </a:p>
-        </p:txBody>
-      </p:sp>
-      <p:sp>
-        <p:nvSpPr>
-          <p:cNvPr id="18" name="Text 16"/>
-          <p:cNvSpPr/>
-          <p:nvPr/>
-        </p:nvSpPr>
-        <p:spPr>
-          <a:xfrm>
-            <a:off x="2468880" y="4379976"/>
-            <a:ext cx="4206240" cy="603504"/>
-          </a:xfrm>
-          <a:prstGeom prst="rect">
-            <a:avLst/>
-          </a:prstGeom>
-          <a:noFill/>
-          <a:ln/>
-        </p:spPr>
-        <p:txBody>
-          <a:bodyPr wrap="square" lIns="0" tIns="0" rIns="0" bIns="0" rtlCol="0" anchor="ctr"/>
-          <a:lstStyle/>
-          <a:p>
-            <a:pPr indent="0" marL="0">
-              <a:buNone/>
-            </a:pPr>
-            <a:r>
-              <a:rPr lang="en-US" sz="1600" b="1" dirty="0">
-                <a:solidFill>
-                  <a:srgbClr val="E8EDF2"/>
-                </a:solidFill>
-                <a:latin typeface="Malgun Gothic" pitchFamily="34" charset="0"/>
-                <a:ea typeface="Malgun Gothic" pitchFamily="34" charset="-122"/>
-                <a:cs typeface="Malgun Gothic" pitchFamily="34" charset="-120"/>
-              </a:rPr>
-              <a:t>원자연산 · 에러</a:t>
-            </a:r>
-            <a:endParaRPr lang="en-US" sz="1600" dirty="0"/>
-          </a:p>
-        </p:txBody>
-      </p:sp>
-      <p:sp>
-        <p:nvSpPr>
-          <p:cNvPr id="19" name="Text 17"/>
-          <p:cNvSpPr/>
-          <p:nvPr/>
-        </p:nvSpPr>
-        <p:spPr>
-          <a:xfrm>
-            <a:off x="6858000" y="4379976"/>
-            <a:ext cx="4480560" cy="603504"/>
-          </a:xfrm>
-          <a:prstGeom prst="rect">
-            <a:avLst/>
-          </a:prstGeom>
-          <a:noFill/>
-          <a:ln/>
-        </p:spPr>
-        <p:txBody>
-          <a:bodyPr wrap="square" lIns="0" tIns="0" rIns="0" bIns="0" rtlCol="0" anchor="ctr"/>
-          <a:lstStyle/>
-          <a:p>
-            <a:pPr indent="0" marL="0">
-              <a:buNone/>
-            </a:pPr>
-            <a:r>
-              <a:rPr lang="en-US" sz="1300" dirty="0">
-                <a:solidFill>
-                  <a:srgbClr val="9AA6B2"/>
-                </a:solidFill>
-                <a:latin typeface="Courier New" pitchFamily="34" charset="0"/>
-                <a:ea typeface="Courier New" pitchFamily="34" charset="-122"/>
-                <a:cs typeface="Courier New" pitchFamily="34" charset="-120"/>
-              </a:rPr>
-              <a:t>atomicAdd, CUERR, 비동기 오류</a:t>
-            </a:r>
-            <a:endParaRPr lang="en-US" sz="1300" dirty="0"/>
-          </a:p>
-        </p:txBody>
-      </p:sp>
-      <p:sp>
-        <p:nvSpPr>
-          <p:cNvPr id="20" name="Shape 18"/>
-          <p:cNvSpPr/>
-          <p:nvPr/>
-        </p:nvSpPr>
-        <p:spPr>
-          <a:xfrm>
-            <a:off x="548640" y="5184648"/>
-            <a:ext cx="11064240" cy="786384"/>
-          </a:xfrm>
-          <a:prstGeom prst="roundRect">
-            <a:avLst>
-              <a:gd name="adj" fmla="val 8140"/>
-            </a:avLst>
-          </a:prstGeom>
-          <a:solidFill>
-            <a:srgbClr val="1E232C"/>
-          </a:solidFill>
-          <a:ln/>
-        </p:spPr>
-      </p:sp>
-      <p:sp>
-        <p:nvSpPr>
-          <p:cNvPr id="21" name="Text 19"/>
-          <p:cNvSpPr/>
-          <p:nvPr/>
-        </p:nvSpPr>
-        <p:spPr>
-          <a:xfrm>
-            <a:off x="804672" y="5276088"/>
-            <a:ext cx="1554480" cy="603504"/>
-          </a:xfrm>
-          <a:prstGeom prst="rect">
-            <a:avLst/>
-          </a:prstGeom>
-          <a:noFill/>
-          <a:ln/>
-        </p:spPr>
-        <p:txBody>
-          <a:bodyPr wrap="square" lIns="0" tIns="0" rIns="0" bIns="0" rtlCol="0" anchor="ctr"/>
-          <a:lstStyle/>
-          <a:p>
-            <a:pPr indent="0" marL="0">
-              <a:buNone/>
-            </a:pPr>
-            <a:r>
-              <a:rPr lang="en-US" sz="1700" b="1" dirty="0">
-                <a:solidFill>
-                  <a:srgbClr val="8CC63F"/>
-                </a:solidFill>
-                <a:latin typeface="Courier New" pitchFamily="34" charset="0"/>
-                <a:ea typeface="Courier New" pitchFamily="34" charset="-122"/>
-                <a:cs typeface="Courier New" pitchFamily="34" charset="-120"/>
-              </a:rPr>
-              <a:t>세션 5</a:t>
-            </a:r>
-            <a:endParaRPr lang="en-US" sz="1700" dirty="0"/>
-          </a:p>
-        </p:txBody>
-      </p:sp>
-      <p:sp>
-        <p:nvSpPr>
-          <p:cNvPr id="22" name="Text 20"/>
-          <p:cNvSpPr/>
-          <p:nvPr/>
-        </p:nvSpPr>
-        <p:spPr>
-          <a:xfrm>
-            <a:off x="2468880" y="5276088"/>
-            <a:ext cx="4206240" cy="603504"/>
-          </a:xfrm>
-          <a:prstGeom prst="rect">
-            <a:avLst/>
-          </a:prstGeom>
-          <a:noFill/>
-          <a:ln/>
-        </p:spPr>
-        <p:txBody>
-          <a:bodyPr wrap="square" lIns="0" tIns="0" rIns="0" bIns="0" rtlCol="0" anchor="ctr"/>
-          <a:lstStyle/>
-          <a:p>
-            <a:pPr indent="0" marL="0">
-              <a:buNone/>
-            </a:pPr>
-            <a:r>
-              <a:rPr lang="en-US" sz="1600" b="1" dirty="0">
-                <a:solidFill>
-                  <a:srgbClr val="E8EDF2"/>
-                </a:solidFill>
-                <a:latin typeface="Malgun Gothic" pitchFamily="34" charset="0"/>
-                <a:ea typeface="Malgun Gothic" pitchFamily="34" charset="-122"/>
-                <a:cs typeface="Malgun Gothic" pitchFamily="34" charset="-120"/>
-              </a:rPr>
-              <a:t>멀티 GPU · 이식성 · 프로젝트</a:t>
-            </a:r>
-            <a:endParaRPr lang="en-US" sz="1600" dirty="0"/>
-          </a:p>
-        </p:txBody>
-      </p:sp>
-      <p:sp>
-        <p:nvSpPr>
-          <p:cNvPr id="23" name="Text 21"/>
-          <p:cNvSpPr/>
-          <p:nvPr/>
-        </p:nvSpPr>
-        <p:spPr>
-          <a:xfrm>
-            <a:off x="6858000" y="5276088"/>
-            <a:ext cx="4480560" cy="603504"/>
-          </a:xfrm>
-          <a:prstGeom prst="rect">
-            <a:avLst/>
-          </a:prstGeom>
-          <a:noFill/>
-          <a:ln/>
-        </p:spPr>
-        <p:txBody>
-          <a:bodyPr wrap="square" lIns="0" tIns="0" rIns="0" bIns="0" rtlCol="0" anchor="ctr"/>
-          <a:lstStyle/>
-          <a:p>
-            <a:pPr indent="0" marL="0">
-              <a:buNone/>
-            </a:pPr>
-            <a:r>
-              <a:rPr lang="en-US" sz="1300" dirty="0">
-                <a:solidFill>
-                  <a:srgbClr val="9AA6B2"/>
-                </a:solidFill>
-                <a:latin typeface="Courier New" pitchFamily="34" charset="0"/>
-                <a:ea typeface="Courier New" pitchFamily="34" charset="-122"/>
-                <a:cs typeface="Courier New" pitchFamily="34" charset="-120"/>
-              </a:rPr>
-              <a:t>pthread, HIP, 나만의 커널</a:t>
-            </a:r>
-            <a:endParaRPr lang="en-US" sz="1300" dirty="0"/>
-          </a:p>
-        </p:txBody>
-      </p:sp>
-      <p:sp>
-        <p:nvSpPr>
-          <p:cNvPr id="24" name="Text 22"/>
-          <p:cNvSpPr/>
-          <p:nvPr/>
-        </p:nvSpPr>
-        <p:spPr>
-          <a:xfrm>
-            <a:off x="548640" y="6126480"/>
-            <a:ext cx="11064240" cy="365760"/>
-          </a:xfrm>
-          <a:prstGeom prst="rect">
-            <a:avLst/>
-          </a:prstGeom>
-          <a:noFill/>
-          <a:ln/>
-        </p:spPr>
-        <p:txBody>
-          <a:bodyPr wrap="square" lIns="0" tIns="0" rIns="0" bIns="0" rtlCol="0" anchor="ctr"/>
-          <a:lstStyle/>
-          <a:p>
-            <a:pPr algn="ctr" indent="0" marL="0">
-              <a:buNone/>
-            </a:pPr>
-            <a:r>
-              <a:rPr lang="en-US" sz="1400" i="1" dirty="0">
-                <a:solidFill>
-                  <a:srgbClr val="9AA6B2"/>
-                </a:solidFill>
-                <a:latin typeface="Malgun Gothic" pitchFamily="34" charset="0"/>
-                <a:ea typeface="Malgun Gothic" pitchFamily="34" charset="-122"/>
-                <a:cs typeface="Malgun Gothic" pitchFamily="34" charset="-120"/>
-              </a:rPr>
-              <a:t>장난감 예제가 아니라 500줄 넘는 실제 프로덕션 코드로 CUDA의 핵심을 모두 훑었습니다.</a:t>
+              <a:t>새 커널을 짤 필요가 없습니다 — 세션 2의 move_inv_test(write→readwrite→read)가 검사를 다 해줍니다. 재사용의 힘!</a:t>
             </a:r>
             <a:endParaRPr lang="en-US" sz="1400" dirty="0"/>
           </a:p>
